--- a/docs/trusttill_pitch_deck.pptx
+++ b/docs/trusttill_pitch_deck.pptx
@@ -2,19 +2,19 @@
 <file path=ppt/presentation.xml><?xml version="1.0" encoding="utf-8"?>
 <p:presentation xmlns:p="http://schemas.openxmlformats.org/presentationml/2006/main">
   <p:sldMasterIdLst>
-    <p:sldMasterId xmlns:r="http://schemas.openxmlformats.org/officeDocument/2006/relationships" id="2147483648" r:id="R006cbc8ae39644f5"/>
+    <p:sldMasterId xmlns:r="http://schemas.openxmlformats.org/officeDocument/2006/relationships" id="2147483648" r:id="R86b86eb576554cd4"/>
   </p:sldMasterIdLst>
   <p:notesMasterIdLst>
-    <p:notesMasterId xmlns:r="http://schemas.openxmlformats.org/officeDocument/2006/relationships" r:id="R0fbf4d99c1604178"/>
+    <p:notesMasterId xmlns:r="http://schemas.openxmlformats.org/officeDocument/2006/relationships" r:id="Rf4cc9c35e5ed4c3b"/>
   </p:notesMasterIdLst>
   <p:sldIdLst>
-    <p:sldId xmlns:r="http://schemas.openxmlformats.org/officeDocument/2006/relationships" id="256" r:id="Rbb63b1ba0c5d4d14"/>
-    <p:sldId xmlns:r="http://schemas.openxmlformats.org/officeDocument/2006/relationships" id="257" r:id="R11750dfe4a1f4759"/>
-    <p:sldId xmlns:r="http://schemas.openxmlformats.org/officeDocument/2006/relationships" id="258" r:id="R0da88e946b5c4e30"/>
-    <p:sldId xmlns:r="http://schemas.openxmlformats.org/officeDocument/2006/relationships" id="259" r:id="R43d1754c0ae84a0c"/>
-    <p:sldId xmlns:r="http://schemas.openxmlformats.org/officeDocument/2006/relationships" id="260" r:id="R4028cc710c954942"/>
-    <p:sldId xmlns:r="http://schemas.openxmlformats.org/officeDocument/2006/relationships" id="261" r:id="R6c31679f1f6842ed"/>
-    <p:sldId xmlns:r="http://schemas.openxmlformats.org/officeDocument/2006/relationships" id="262" r:id="R4ef291b810fa4584"/>
+    <p:sldId xmlns:r="http://schemas.openxmlformats.org/officeDocument/2006/relationships" id="256" r:id="Rca89b5faf8fd4a21"/>
+    <p:sldId xmlns:r="http://schemas.openxmlformats.org/officeDocument/2006/relationships" id="257" r:id="R345b60d41dfd4d8e"/>
+    <p:sldId xmlns:r="http://schemas.openxmlformats.org/officeDocument/2006/relationships" id="258" r:id="R88975ac117c042d3"/>
+    <p:sldId xmlns:r="http://schemas.openxmlformats.org/officeDocument/2006/relationships" id="259" r:id="Rda2201bbdb4346ac"/>
+    <p:sldId xmlns:r="http://schemas.openxmlformats.org/officeDocument/2006/relationships" id="260" r:id="R4dfbcefbadb54076"/>
+    <p:sldId xmlns:r="http://schemas.openxmlformats.org/officeDocument/2006/relationships" id="261" r:id="R956b87b0e8014a5d"/>
+    <p:sldId xmlns:r="http://schemas.openxmlformats.org/officeDocument/2006/relationships" id="262" r:id="Rfd5cf8914fd34b2d"/>
   </p:sldIdLst>
   <p:sldSz cx="12192000" cy="6858000"/>
   <p:notesSz cx="6858000" cy="9144000"/>
@@ -543,12 +543,7 @@
           <a:lstStyle xmlns:a="http://schemas.openxmlformats.org/drawingml/2006/main"/>
           <a:p xmlns:a="http://schemas.openxmlformats.org/drawingml/2006/main">
             <a:r>
-              <a:t>Open with the merchant problem, not the technology.</a:t>
-            </a:r>
-          </a:p>
-          <a:p xmlns:a="http://schemas.openxmlformats.org/drawingml/2006/main">
-            <a:r>
-              <a:t>Position TrustTill as an evidence layer for Wema, not a bank replacement.</a:t>
+              <a:t>Open with the problem in plain language. TrustTill is an evidence layer, not a loan app.</a:t>
             </a:r>
           </a:p>
         </p:txBody>
@@ -618,12 +613,7 @@
           <a:lstStyle xmlns:a="http://schemas.openxmlformats.org/drawingml/2006/main"/>
           <a:p xmlns:a="http://schemas.openxmlformats.org/drawingml/2006/main">
             <a:r>
-              <a:t>Do not overclaim exclusion statistics.</a:t>
-            </a:r>
-          </a:p>
-          <a:p xmlns:a="http://schemas.openxmlformats.org/drawingml/2006/main">
-            <a:r>
-              <a:t>Keep the problem practical: records are messy, so support and credit readiness become harder.</a:t>
+              <a:t>Make the problem specific. Do not say merchants need generic loans. Say Wema needs cleaner evidence.</a:t>
             </a:r>
           </a:p>
         </p:txBody>
@@ -693,12 +683,7 @@
           <a:lstStyle xmlns:a="http://schemas.openxmlformats.org/drawingml/2006/main"/>
           <a:p xmlns:a="http://schemas.openxmlformats.org/drawingml/2006/main">
             <a:r>
-              <a:t>This is the core aha moment.</a:t>
-            </a:r>
-          </a:p>
-          <a:p xmlns:a="http://schemas.openxmlformats.org/drawingml/2006/main">
-            <a:r>
-              <a:t>Say that the MVP starts with transparent rules, then can add AI parsing safely.</a:t>
+              <a:t>This answers the 'how is the AI possible?' question. The AI does not decide truth alone.</a:t>
             </a:r>
           </a:p>
         </p:txBody>
@@ -768,12 +753,7 @@
           <a:lstStyle xmlns:a="http://schemas.openxmlformats.org/drawingml/2006/main"/>
           <a:p xmlns:a="http://schemas.openxmlformats.org/drawingml/2006/main">
             <a:r>
-              <a:t>Use the live HTML demo if possible.</a:t>
-            </a:r>
-          </a:p>
-          <a:p xmlns:a="http://schemas.openxmlformats.org/drawingml/2006/main">
-            <a:r>
-              <a:t>If internet or laptop display fails, this screenshot still proves the core workflow.</a:t>
+              <a:t>Switch to the live demo if possible. This slide is the fallback proof.</a:t>
             </a:r>
           </a:p>
         </p:txBody>
@@ -843,12 +823,7 @@
           <a:lstStyle xmlns:a="http://schemas.openxmlformats.org/drawingml/2006/main"/>
           <a:p xmlns:a="http://schemas.openxmlformats.org/drawingml/2006/main">
             <a:r>
-              <a:t>This slide should sound like Wema's business value, not just social good.</a:t>
-            </a:r>
-          </a:p>
-          <a:p xmlns:a="http://schemas.openxmlformats.org/drawingml/2006/main">
-            <a:r>
-              <a:t>Mention acquisition, deposits, support, and safer future credit readiness.</a:t>
+              <a:t>Make this sponsor-specific. Wema gets acquisition, record quality, and safer review.</a:t>
             </a:r>
           </a:p>
         </p:txBody>
@@ -918,12 +893,7 @@
           <a:lstStyle xmlns:a="http://schemas.openxmlformats.org/drawingml/2006/main"/>
           <a:p xmlns:a="http://schemas.openxmlformats.org/drawingml/2006/main">
             <a:r>
-              <a:t>This helps answer judge concerns about feasibility.</a:t>
-            </a:r>
-          </a:p>
-          <a:p xmlns:a="http://schemas.openxmlformats.org/drawingml/2006/main">
-            <a:r>
-              <a:t>Stress that the first version is a workflow and evidence layer, not production underwriting.</a:t>
+              <a:t>Use this slide to establish implementation credibility.</a:t>
             </a:r>
           </a:p>
         </p:txBody>
@@ -993,12 +963,7 @@
           <a:lstStyle xmlns:a="http://schemas.openxmlformats.org/drawingml/2006/main"/>
           <a:p xmlns:a="http://schemas.openxmlformats.org/drawingml/2006/main">
             <a:r>
-              <a:t>End with a specific next step, not a vague thank you.</a:t>
-            </a:r>
-          </a:p>
-          <a:p xmlns:a="http://schemas.openxmlformats.org/drawingml/2006/main">
-            <a:r>
-              <a:t>Ask for a pilot and support that Wema can plausibly provide after Hackaholics.</a:t>
+              <a:t>End on a concrete pilot request. Keep it actionable and credible.</a:t>
             </a:r>
           </a:p>
         </p:txBody>
@@ -1066,7 +1031,7 @@
   </p:cSld>
   <p:clrMap bg1="lt1" tx1="dk1" bg2="lt2" tx2="dk2" accent1="accent1" accent2="accent2" accent3="accent3" accent4="accent4" accent5="accent5" accent6="accent6" hlink="hlink" folHlink="folHlink"/>
   <p:sldLayoutIdLst>
-    <p:sldLayoutId xmlns:r="http://schemas.openxmlformats.org/officeDocument/2006/relationships" id="2147483649" r:id="R2572e887c69b45de"/>
+    <p:sldLayoutId xmlns:r="http://schemas.openxmlformats.org/officeDocument/2006/relationships" id="2147483649" r:id="R8fcd6633e667418e"/>
   </p:sldLayoutIdLst>
   <p:txStyles>
     <p:titleStyle>
@@ -1617,19 +1582,19 @@
           <p:cNvPr id="1" name="">
             <a:extLst xmlns:a="http://schemas.openxmlformats.org/drawingml/2006/main">
               <a:ext uri="{FF2B5EF4-FFF2-40B4-BE49-F238E27FC236}">
-                <a16:creationId xmlns:a16="http://schemas.microsoft.com/office/drawing/2014/main" id="{C6B4C6C6-2AD3-469F-AF49-D15886BBFD52}"/>
-              </a:ext>
-            </a:extLst>
-          </p:cNvPr>
-          <p:cNvSpPr>
-            <a:spLocks xmlns:a="http://schemas.openxmlformats.org/drawingml/2006/main" noGrp="1"/>
-          </p:cNvSpPr>
-          <p:nvPr/>
-        </p:nvSpPr>
-        <p:spPr>
-          <a:xfrm xmlns:a="http://schemas.openxmlformats.org/drawingml/2006/main">
-            <a:off x="533400" y="609600"/>
-            <a:ext cx="6286500" cy="1047750"/>
+                <a16:creationId xmlns:a16="http://schemas.microsoft.com/office/drawing/2014/main" id="{E31B73A2-84F1-4A47-99E7-27ED46896CD7}"/>
+              </a:ext>
+            </a:extLst>
+          </p:cNvPr>
+          <p:cNvSpPr>
+            <a:spLocks xmlns:a="http://schemas.openxmlformats.org/drawingml/2006/main" noGrp="1"/>
+          </p:cNvSpPr>
+          <p:nvPr/>
+        </p:nvSpPr>
+        <p:spPr>
+          <a:xfrm xmlns:a="http://schemas.openxmlformats.org/drawingml/2006/main">
+            <a:off x="609600" y="685800"/>
+            <a:ext cx="6477000" cy="876300"/>
           </a:xfrm>
           <a:prstGeom xmlns:a="http://schemas.openxmlformats.org/drawingml/2006/main" prst="rect">
             <a:avLst/>
@@ -1645,14 +1610,14 @@
           <a:lstStyle xmlns:a="http://schemas.openxmlformats.org/drawingml/2006/main"/>
           <a:p xmlns:a="http://schemas.openxmlformats.org/drawingml/2006/main">
             <a:pPr>
-              <a:defRPr sz="5400" b="1">
+              <a:defRPr sz="6000" b="1">
                 <a:solidFill>
                   <a:srgbClr val="003D48"/>
                 </a:solidFill>
               </a:defRPr>
             </a:pPr>
             <a:r>
-              <a:rPr sz="5400" b="1">
+              <a:rPr sz="6000" b="1">
                 <a:solidFill>
                   <a:srgbClr val="003D48"/>
                 </a:solidFill>
@@ -1667,19 +1632,19 @@
           <p:cNvPr id="2" name="">
             <a:extLst xmlns:a="http://schemas.openxmlformats.org/drawingml/2006/main">
               <a:ext uri="{FF2B5EF4-FFF2-40B4-BE49-F238E27FC236}">
-                <a16:creationId xmlns:a16="http://schemas.microsoft.com/office/drawing/2014/main" id="{4DA526C7-CDA5-4732-B0C5-8BE3FB0DE405}"/>
-              </a:ext>
-            </a:extLst>
-          </p:cNvPr>
-          <p:cNvSpPr>
-            <a:spLocks xmlns:a="http://schemas.openxmlformats.org/drawingml/2006/main" noGrp="1"/>
-          </p:cNvSpPr>
-          <p:nvPr/>
-        </p:nvSpPr>
-        <p:spPr>
-          <a:xfrm xmlns:a="http://schemas.openxmlformats.org/drawingml/2006/main">
-            <a:off x="571500" y="1809750"/>
-            <a:ext cx="7239000" cy="952500"/>
+                <a16:creationId xmlns:a16="http://schemas.microsoft.com/office/drawing/2014/main" id="{0ECD2F3D-ADD2-4117-AED4-AE412867C33F}"/>
+              </a:ext>
+            </a:extLst>
+          </p:cNvPr>
+          <p:cNvSpPr>
+            <a:spLocks xmlns:a="http://schemas.openxmlformats.org/drawingml/2006/main" noGrp="1"/>
+          </p:cNvSpPr>
+          <p:nvPr/>
+        </p:nvSpPr>
+        <p:spPr>
+          <a:xfrm xmlns:a="http://schemas.openxmlformats.org/drawingml/2006/main">
+            <a:off x="647700" y="1790700"/>
+            <a:ext cx="7048500" cy="895350"/>
           </a:xfrm>
           <a:prstGeom xmlns:a="http://schemas.openxmlformats.org/drawingml/2006/main" prst="rect">
             <a:avLst/>
@@ -1695,19 +1660,19 @@
           <a:lstStyle xmlns:a="http://schemas.openxmlformats.org/drawingml/2006/main"/>
           <a:p xmlns:a="http://schemas.openxmlformats.org/drawingml/2006/main">
             <a:pPr>
-              <a:defRPr sz="2250" b="0">
+              <a:defRPr sz="2550" b="0">
                 <a:solidFill>
                   <a:srgbClr val="101820"/>
                 </a:solidFill>
               </a:defRPr>
             </a:pPr>
             <a:r>
-              <a:rPr sz="2250" b="0">
+              <a:rPr sz="2550" b="0">
                 <a:solidFill>
                   <a:srgbClr val="101820"/>
                 </a:solidFill>
               </a:rPr>
-              <a:t>Making informal merchants bankable from the payment evidence they already have.</a:t>
+              <a:t>Making offline merchants bank-readable from the sales evidence they already have.</a:t>
             </a:r>
           </a:p>
         </p:txBody>
@@ -1717,31 +1682,31 @@
           <p:cNvPr id="3" name="">
             <a:extLst xmlns:a="http://schemas.openxmlformats.org/drawingml/2006/main">
               <a:ext uri="{FF2B5EF4-FFF2-40B4-BE49-F238E27FC236}">
-                <a16:creationId xmlns:a16="http://schemas.microsoft.com/office/drawing/2014/main" id="{E636E7DE-1E61-4F5F-AD11-4C318EB34253}"/>
-              </a:ext>
-            </a:extLst>
-          </p:cNvPr>
-          <p:cNvSpPr>
-            <a:spLocks xmlns:a="http://schemas.openxmlformats.org/drawingml/2006/main" noGrp="1"/>
-          </p:cNvSpPr>
-          <p:nvPr/>
-        </p:nvSpPr>
-        <p:spPr>
-          <a:xfrm xmlns:a="http://schemas.openxmlformats.org/drawingml/2006/main">
-            <a:off x="571500" y="3105150"/>
-            <a:ext cx="1809750" cy="361950"/>
+                <a16:creationId xmlns:a16="http://schemas.microsoft.com/office/drawing/2014/main" id="{930C952E-E787-48E1-B460-2997D4B75B95}"/>
+              </a:ext>
+            </a:extLst>
+          </p:cNvPr>
+          <p:cNvSpPr>
+            <a:spLocks xmlns:a="http://schemas.openxmlformats.org/drawingml/2006/main" noGrp="1"/>
+          </p:cNvSpPr>
+          <p:nvPr/>
+        </p:nvSpPr>
+        <p:spPr>
+          <a:xfrm xmlns:a="http://schemas.openxmlformats.org/drawingml/2006/main">
+            <a:off x="647700" y="3143250"/>
+            <a:ext cx="1809750" cy="342900"/>
           </a:xfrm>
           <a:prstGeom xmlns:a="http://schemas.openxmlformats.org/drawingml/2006/main" prst="roundRect">
             <a:avLst>
-              <a:gd name="adj" fmla="val 47368"/>
+              <a:gd name="adj" fmla="val 50000"/>
             </a:avLst>
           </a:prstGeom>
           <a:solidFill xmlns:a="http://schemas.openxmlformats.org/drawingml/2006/main">
-            <a:srgbClr val="F8F3EA"/>
+            <a:srgbClr val="FBF5EA"/>
           </a:solidFill>
           <a:ln xmlns:a="http://schemas.openxmlformats.org/drawingml/2006/main" w="9525">
             <a:solidFill>
-              <a:srgbClr val="C8D1D2"/>
+              <a:srgbClr val="D8DEDF"/>
             </a:solidFill>
             <a:prstDash val="solid"/>
           </a:ln>
@@ -1773,23 +1738,23 @@
           <p:cNvPr id="4" name="">
             <a:extLst xmlns:a="http://schemas.openxmlformats.org/drawingml/2006/main">
               <a:ext uri="{FF2B5EF4-FFF2-40B4-BE49-F238E27FC236}">
-                <a16:creationId xmlns:a16="http://schemas.microsoft.com/office/drawing/2014/main" id="{D1973939-A157-471F-828C-84CA5E951A38}"/>
-              </a:ext>
-            </a:extLst>
-          </p:cNvPr>
-          <p:cNvSpPr>
-            <a:spLocks xmlns:a="http://schemas.openxmlformats.org/drawingml/2006/main" noGrp="1"/>
-          </p:cNvSpPr>
-          <p:nvPr/>
-        </p:nvSpPr>
-        <p:spPr>
-          <a:xfrm xmlns:a="http://schemas.openxmlformats.org/drawingml/2006/main">
-            <a:off x="2571750" y="3105150"/>
-            <a:ext cx="2190750" cy="361950"/>
+                <a16:creationId xmlns:a16="http://schemas.microsoft.com/office/drawing/2014/main" id="{4F65DD4C-76F6-4FFD-AAF6-4185EDD9EB06}"/>
+              </a:ext>
+            </a:extLst>
+          </p:cNvPr>
+          <p:cNvSpPr>
+            <a:spLocks xmlns:a="http://schemas.openxmlformats.org/drawingml/2006/main" noGrp="1"/>
+          </p:cNvSpPr>
+          <p:nvPr/>
+        </p:nvSpPr>
+        <p:spPr>
+          <a:xfrm xmlns:a="http://schemas.openxmlformats.org/drawingml/2006/main">
+            <a:off x="2647950" y="3143250"/>
+            <a:ext cx="2190750" cy="342900"/>
           </a:xfrm>
           <a:prstGeom xmlns:a="http://schemas.openxmlformats.org/drawingml/2006/main" prst="roundRect">
             <a:avLst>
-              <a:gd name="adj" fmla="val 47368"/>
+              <a:gd name="adj" fmla="val 50000"/>
             </a:avLst>
           </a:prstGeom>
           <a:solidFill xmlns:a="http://schemas.openxmlformats.org/drawingml/2006/main">
@@ -1797,7 +1762,7 @@
           </a:solidFill>
           <a:ln xmlns:a="http://schemas.openxmlformats.org/drawingml/2006/main" w="9525">
             <a:solidFill>
-              <a:srgbClr val="C8D1D2"/>
+              <a:srgbClr val="D8DEDF"/>
             </a:solidFill>
             <a:prstDash val="solid"/>
           </a:ln>
@@ -1809,14 +1774,14 @@
             <a:pPr algn="ctr">
               <a:defRPr sz="1200" b="1">
                 <a:solidFill>
-                  <a:srgbClr val="DE1A4C"/>
+                  <a:srgbClr val="E4144F"/>
                 </a:solidFill>
               </a:defRPr>
             </a:pPr>
             <a:r>
               <a:rPr sz="1200" b="1">
                 <a:solidFill>
-                  <a:srgbClr val="DE1A4C"/>
+                  <a:srgbClr val="E4144F"/>
                 </a:solidFill>
               </a:rPr>
               <a:t>Financial Inclusion</a:t>
@@ -1829,19 +1794,75 @@
           <p:cNvPr id="5" name="">
             <a:extLst xmlns:a="http://schemas.openxmlformats.org/drawingml/2006/main">
               <a:ext uri="{FF2B5EF4-FFF2-40B4-BE49-F238E27FC236}">
-                <a16:creationId xmlns:a16="http://schemas.microsoft.com/office/drawing/2014/main" id="{C998EA15-9E99-430A-8317-47E4D6D128A0}"/>
-              </a:ext>
-            </a:extLst>
-          </p:cNvPr>
-          <p:cNvSpPr>
-            <a:spLocks xmlns:a="http://schemas.openxmlformats.org/drawingml/2006/main" noGrp="1"/>
-          </p:cNvSpPr>
-          <p:nvPr/>
-        </p:nvSpPr>
-        <p:spPr>
-          <a:xfrm xmlns:a="http://schemas.openxmlformats.org/drawingml/2006/main">
-            <a:off x="8001000" y="685800"/>
-            <a:ext cx="3238500" cy="4762500"/>
+                <a16:creationId xmlns:a16="http://schemas.microsoft.com/office/drawing/2014/main" id="{A2335189-E6C1-455D-BFA6-BEDC14CAD6F7}"/>
+              </a:ext>
+            </a:extLst>
+          </p:cNvPr>
+          <p:cNvSpPr>
+            <a:spLocks xmlns:a="http://schemas.openxmlformats.org/drawingml/2006/main" noGrp="1"/>
+          </p:cNvSpPr>
+          <p:nvPr/>
+        </p:nvSpPr>
+        <p:spPr>
+          <a:xfrm xmlns:a="http://schemas.openxmlformats.org/drawingml/2006/main">
+            <a:off x="5029200" y="3143250"/>
+            <a:ext cx="2095500" cy="342900"/>
+          </a:xfrm>
+          <a:prstGeom xmlns:a="http://schemas.openxmlformats.org/drawingml/2006/main" prst="roundRect">
+            <a:avLst>
+              <a:gd name="adj" fmla="val 50000"/>
+            </a:avLst>
+          </a:prstGeom>
+          <a:solidFill xmlns:a="http://schemas.openxmlformats.org/drawingml/2006/main">
+            <a:srgbClr val="F4F7F6"/>
+          </a:solidFill>
+          <a:ln xmlns:a="http://schemas.openxmlformats.org/drawingml/2006/main" w="9525">
+            <a:solidFill>
+              <a:srgbClr val="D8DEDF"/>
+            </a:solidFill>
+            <a:prstDash val="solid"/>
+          </a:ln>
+        </p:spPr>
+        <p:txBody>
+          <a:bodyPr xmlns:a="http://schemas.openxmlformats.org/drawingml/2006/main"/>
+          <a:lstStyle xmlns:a="http://schemas.openxmlformats.org/drawingml/2006/main"/>
+          <a:p xmlns:a="http://schemas.openxmlformats.org/drawingml/2006/main">
+            <a:pPr algn="ctr">
+              <a:defRPr sz="1200" b="1">
+                <a:solidFill>
+                  <a:srgbClr val="003D48"/>
+                </a:solidFill>
+              </a:defRPr>
+            </a:pPr>
+            <a:r>
+              <a:rPr sz="1200" b="1">
+                <a:solidFill>
+                  <a:srgbClr val="003D48"/>
+                </a:solidFill>
+              </a:rPr>
+              <a:t>AI evidence layer</a:t>
+            </a:r>
+          </a:p>
+        </p:txBody>
+      </p:sp>
+      <p:sp>
+        <p:nvSpPr>
+          <p:cNvPr id="6" name="">
+            <a:extLst xmlns:a="http://schemas.openxmlformats.org/drawingml/2006/main">
+              <a:ext uri="{FF2B5EF4-FFF2-40B4-BE49-F238E27FC236}">
+                <a16:creationId xmlns:a16="http://schemas.microsoft.com/office/drawing/2014/main" id="{219E4093-6C81-46E7-AE3F-BB68324D4B9A}"/>
+              </a:ext>
+            </a:extLst>
+          </p:cNvPr>
+          <p:cNvSpPr>
+            <a:spLocks xmlns:a="http://schemas.openxmlformats.org/drawingml/2006/main" noGrp="1"/>
+          </p:cNvSpPr>
+          <p:nvPr/>
+        </p:nvSpPr>
+        <p:spPr>
+          <a:xfrm xmlns:a="http://schemas.openxmlformats.org/drawingml/2006/main">
+            <a:off x="8096250" y="742950"/>
+            <a:ext cx="3143250" cy="4191000"/>
           </a:xfrm>
           <a:prstGeom xmlns:a="http://schemas.openxmlformats.org/drawingml/2006/main" prst="rect">
             <a:avLst/>
@@ -1859,22 +1880,22 @@
       </p:sp>
       <p:sp>
         <p:nvSpPr>
-          <p:cNvPr id="6" name="">
-            <a:extLst xmlns:a="http://schemas.openxmlformats.org/drawingml/2006/main">
-              <a:ext uri="{FF2B5EF4-FFF2-40B4-BE49-F238E27FC236}">
-                <a16:creationId xmlns:a16="http://schemas.microsoft.com/office/drawing/2014/main" id="{430EA3AF-4237-454E-9BB5-7415922421FB}"/>
-              </a:ext>
-            </a:extLst>
-          </p:cNvPr>
-          <p:cNvSpPr>
-            <a:spLocks xmlns:a="http://schemas.openxmlformats.org/drawingml/2006/main" noGrp="1"/>
-          </p:cNvSpPr>
-          <p:nvPr/>
-        </p:nvSpPr>
-        <p:spPr>
-          <a:xfrm xmlns:a="http://schemas.openxmlformats.org/drawingml/2006/main">
-            <a:off x="8420100" y="1162050"/>
-            <a:ext cx="2095500" cy="323850"/>
+          <p:cNvPr id="7" name="">
+            <a:extLst xmlns:a="http://schemas.openxmlformats.org/drawingml/2006/main">
+              <a:ext uri="{FF2B5EF4-FFF2-40B4-BE49-F238E27FC236}">
+                <a16:creationId xmlns:a16="http://schemas.microsoft.com/office/drawing/2014/main" id="{F86A6190-1A4E-4BF2-B9CF-D4895BC8F83A}"/>
+              </a:ext>
+            </a:extLst>
+          </p:cNvPr>
+          <p:cNvSpPr>
+            <a:spLocks xmlns:a="http://schemas.openxmlformats.org/drawingml/2006/main" noGrp="1"/>
+          </p:cNvSpPr>
+          <p:nvPr/>
+        </p:nvSpPr>
+        <p:spPr>
+          <a:xfrm xmlns:a="http://schemas.openxmlformats.org/drawingml/2006/main">
+            <a:off x="8439150" y="1219200"/>
+            <a:ext cx="1905000" cy="323850"/>
           </a:xfrm>
           <a:prstGeom xmlns:a="http://schemas.openxmlformats.org/drawingml/2006/main" prst="rect">
             <a:avLst/>
@@ -1890,41 +1911,41 @@
           <a:lstStyle xmlns:a="http://schemas.openxmlformats.org/drawingml/2006/main"/>
           <a:p xmlns:a="http://schemas.openxmlformats.org/drawingml/2006/main">
             <a:pPr>
-              <a:defRPr sz="1350" b="1">
+              <a:defRPr sz="1500" b="1">
                 <a:solidFill>
                   <a:srgbClr val="FFFFFF"/>
                 </a:solidFill>
               </a:defRPr>
             </a:pPr>
             <a:r>
-              <a:rPr sz="1350" b="1">
+              <a:rPr sz="1500" b="1">
                 <a:solidFill>
                   <a:srgbClr val="FFFFFF"/>
                 </a:solidFill>
               </a:rPr>
-              <a:t>The claim</a:t>
-            </a:r>
-          </a:p>
-        </p:txBody>
-      </p:sp>
-      <p:sp>
-        <p:nvSpPr>
-          <p:cNvPr id="7" name="">
-            <a:extLst xmlns:a="http://schemas.openxmlformats.org/drawingml/2006/main">
-              <a:ext uri="{FF2B5EF4-FFF2-40B4-BE49-F238E27FC236}">
-                <a16:creationId xmlns:a16="http://schemas.microsoft.com/office/drawing/2014/main" id="{C946E10B-49E0-4F37-B8CD-4F9ADE568B35}"/>
-              </a:ext>
-            </a:extLst>
-          </p:cNvPr>
-          <p:cNvSpPr>
-            <a:spLocks xmlns:a="http://schemas.openxmlformats.org/drawingml/2006/main" noGrp="1"/>
-          </p:cNvSpPr>
-          <p:nvPr/>
-        </p:nvSpPr>
-        <p:spPr>
-          <a:xfrm xmlns:a="http://schemas.openxmlformats.org/drawingml/2006/main">
-            <a:off x="8420100" y="1695450"/>
-            <a:ext cx="2286000" cy="2190750"/>
+              <a:t>Core claim</a:t>
+            </a:r>
+          </a:p>
+        </p:txBody>
+      </p:sp>
+      <p:sp>
+        <p:nvSpPr>
+          <p:cNvPr id="8" name="">
+            <a:extLst xmlns:a="http://schemas.openxmlformats.org/drawingml/2006/main">
+              <a:ext uri="{FF2B5EF4-FFF2-40B4-BE49-F238E27FC236}">
+                <a16:creationId xmlns:a16="http://schemas.microsoft.com/office/drawing/2014/main" id="{D2210F58-D554-49DF-8F54-CEF18EF59EBE}"/>
+              </a:ext>
+            </a:extLst>
+          </p:cNvPr>
+          <p:cNvSpPr>
+            <a:spLocks xmlns:a="http://schemas.openxmlformats.org/drawingml/2006/main" noGrp="1"/>
+          </p:cNvSpPr>
+          <p:nvPr/>
+        </p:nvSpPr>
+        <p:spPr>
+          <a:xfrm xmlns:a="http://schemas.openxmlformats.org/drawingml/2006/main">
+            <a:off x="8439150" y="1943100"/>
+            <a:ext cx="2324100" cy="1428750"/>
           </a:xfrm>
           <a:prstGeom xmlns:a="http://schemas.openxmlformats.org/drawingml/2006/main" prst="rect">
             <a:avLst/>
@@ -1940,41 +1961,72 @@
           <a:lstStyle xmlns:a="http://schemas.openxmlformats.org/drawingml/2006/main"/>
           <a:p xmlns:a="http://schemas.openxmlformats.org/drawingml/2006/main">
             <a:pPr>
-              <a:defRPr sz="2100" b="1">
+              <a:defRPr sz="2175" b="1">
                 <a:solidFill>
                   <a:srgbClr val="FFFFFF"/>
                 </a:solidFill>
               </a:defRPr>
             </a:pPr>
             <a:r>
-              <a:rPr sz="2100" b="1">
+              <a:rPr sz="2175" b="1">
                 <a:solidFill>
                   <a:srgbClr val="FFFFFF"/>
                 </a:solidFill>
               </a:rPr>
-              <a:t>A merchant should not need formal bookkeeping before their business activity can be understood by a bank.</a:t>
-            </a:r>
-          </a:p>
-        </p:txBody>
-      </p:sp>
-      <p:sp>
-        <p:nvSpPr>
-          <p:cNvPr id="8" name="">
-            <a:extLst xmlns:a="http://schemas.openxmlformats.org/drawingml/2006/main">
-              <a:ext uri="{FF2B5EF4-FFF2-40B4-BE49-F238E27FC236}">
-                <a16:creationId xmlns:a16="http://schemas.microsoft.com/office/drawing/2014/main" id="{B8BFED70-62AB-4764-8424-48EC440D689A}"/>
-              </a:ext>
-            </a:extLst>
-          </p:cNvPr>
-          <p:cNvSpPr>
-            <a:spLocks xmlns:a="http://schemas.openxmlformats.org/drawingml/2006/main" noGrp="1"/>
-          </p:cNvSpPr>
-          <p:nvPr/>
-        </p:nvSpPr>
-        <p:spPr>
-          <a:xfrm xmlns:a="http://schemas.openxmlformats.org/drawingml/2006/main">
-            <a:off x="8420100" y="4286250"/>
-            <a:ext cx="2286000" cy="666750"/>
+              <a:t>Informal merchants become visible when their evidence is structured.</a:t>
+            </a:r>
+          </a:p>
+        </p:txBody>
+      </p:sp>
+      <p:sp>
+        <p:nvSpPr>
+          <p:cNvPr id="9" name="">
+            <a:extLst xmlns:a="http://schemas.openxmlformats.org/drawingml/2006/main">
+              <a:ext uri="{FF2B5EF4-FFF2-40B4-BE49-F238E27FC236}">
+                <a16:creationId xmlns:a16="http://schemas.microsoft.com/office/drawing/2014/main" id="{7519A602-ECAE-4E80-AB5F-8D7421D02B8A}"/>
+              </a:ext>
+            </a:extLst>
+          </p:cNvPr>
+          <p:cNvSpPr>
+            <a:spLocks xmlns:a="http://schemas.openxmlformats.org/drawingml/2006/main" noGrp="1"/>
+          </p:cNvSpPr>
+          <p:nvPr/>
+        </p:nvSpPr>
+        <p:spPr>
+          <a:xfrm xmlns:a="http://schemas.openxmlformats.org/drawingml/2006/main">
+            <a:off x="8439150" y="3695700"/>
+            <a:ext cx="1714500" cy="0"/>
+          </a:xfrm>
+          <a:prstGeom xmlns:a="http://schemas.openxmlformats.org/drawingml/2006/main" prst="line">
+            <a:avLst/>
+          </a:prstGeom>
+          <a:noFill xmlns:a="http://schemas.openxmlformats.org/drawingml/2006/main"/>
+          <a:ln xmlns:a="http://schemas.openxmlformats.org/drawingml/2006/main" w="19050">
+            <a:solidFill>
+              <a:srgbClr val="7FAFB3"/>
+            </a:solidFill>
+            <a:prstDash val="solid"/>
+          </a:ln>
+        </p:spPr>
+      </p:sp>
+      <p:sp>
+        <p:nvSpPr>
+          <p:cNvPr id="10" name="">
+            <a:extLst xmlns:a="http://schemas.openxmlformats.org/drawingml/2006/main">
+              <a:ext uri="{FF2B5EF4-FFF2-40B4-BE49-F238E27FC236}">
+                <a16:creationId xmlns:a16="http://schemas.microsoft.com/office/drawing/2014/main" id="{41656104-4EED-47D8-9B73-388D7609D09B}"/>
+              </a:ext>
+            </a:extLst>
+          </p:cNvPr>
+          <p:cNvSpPr>
+            <a:spLocks xmlns:a="http://schemas.openxmlformats.org/drawingml/2006/main" noGrp="1"/>
+          </p:cNvSpPr>
+          <p:nvPr/>
+        </p:nvSpPr>
+        <p:spPr>
+          <a:xfrm xmlns:a="http://schemas.openxmlformats.org/drawingml/2006/main">
+            <a:off x="8439150" y="4038600"/>
+            <a:ext cx="2324100" cy="552450"/>
           </a:xfrm>
           <a:prstGeom xmlns:a="http://schemas.openxmlformats.org/drawingml/2006/main" prst="rect">
             <a:avLst/>
@@ -1990,41 +2042,41 @@
           <a:lstStyle xmlns:a="http://schemas.openxmlformats.org/drawingml/2006/main"/>
           <a:p xmlns:a="http://schemas.openxmlformats.org/drawingml/2006/main">
             <a:pPr>
-              <a:defRPr sz="1350" b="0">
-                <a:solidFill>
-                  <a:srgbClr val="D7E5E6"/>
-                </a:solidFill>
-              </a:defRPr>
-            </a:pPr>
-            <a:r>
-              <a:rPr sz="1350" b="0">
-                <a:solidFill>
-                  <a:srgbClr val="D7E5E6"/>
-                </a:solidFill>
-              </a:rPr>
-              <a:t>Payment alerts, receipts, and sales notes are already useful evidence.</a:t>
-            </a:r>
-          </a:p>
-        </p:txBody>
-      </p:sp>
-      <p:sp>
-        <p:nvSpPr>
-          <p:cNvPr id="9" name="">
-            <a:extLst xmlns:a="http://schemas.openxmlformats.org/drawingml/2006/main">
-              <a:ext uri="{FF2B5EF4-FFF2-40B4-BE49-F238E27FC236}">
-                <a16:creationId xmlns:a16="http://schemas.microsoft.com/office/drawing/2014/main" id="{003D8A88-1B06-4E43-98DD-0837D252FB0D}"/>
-              </a:ext>
-            </a:extLst>
-          </p:cNvPr>
-          <p:cNvSpPr>
-            <a:spLocks xmlns:a="http://schemas.openxmlformats.org/drawingml/2006/main" noGrp="1"/>
-          </p:cNvSpPr>
-          <p:nvPr/>
-        </p:nvSpPr>
-        <p:spPr>
-          <a:xfrm xmlns:a="http://schemas.openxmlformats.org/drawingml/2006/main">
-            <a:off x="400050" y="6362700"/>
-            <a:ext cx="5905500" cy="228600"/>
+              <a:defRPr sz="1500" b="0">
+                <a:solidFill>
+                  <a:srgbClr val="DCECED"/>
+                </a:solidFill>
+              </a:defRPr>
+            </a:pPr>
+            <a:r>
+              <a:rPr sz="1500" b="0">
+                <a:solidFill>
+                  <a:srgbClr val="DCECED"/>
+                </a:solidFill>
+              </a:rPr>
+              <a:t>TrustTill turns scattered proof into a reviewable trail.</a:t>
+            </a:r>
+          </a:p>
+        </p:txBody>
+      </p:sp>
+      <p:sp>
+        <p:nvSpPr>
+          <p:cNvPr id="11" name="">
+            <a:extLst xmlns:a="http://schemas.openxmlformats.org/drawingml/2006/main">
+              <a:ext uri="{FF2B5EF4-FFF2-40B4-BE49-F238E27FC236}">
+                <a16:creationId xmlns:a16="http://schemas.microsoft.com/office/drawing/2014/main" id="{8089EBBA-9514-4D58-9306-E2244D614747}"/>
+              </a:ext>
+            </a:extLst>
+          </p:cNvPr>
+          <p:cNvSpPr>
+            <a:spLocks xmlns:a="http://schemas.openxmlformats.org/drawingml/2006/main" noGrp="1"/>
+          </p:cNvSpPr>
+          <p:nvPr/>
+        </p:nvSpPr>
+        <p:spPr>
+          <a:xfrm xmlns:a="http://schemas.openxmlformats.org/drawingml/2006/main">
+            <a:off x="533400" y="6362700"/>
+            <a:ext cx="5334000" cy="228600"/>
           </a:xfrm>
           <a:prstGeom xmlns:a="http://schemas.openxmlformats.org/drawingml/2006/main" prst="rect">
             <a:avLst/>
@@ -2042,14 +2094,14 @@
             <a:pPr>
               <a:defRPr sz="1050" b="1">
                 <a:solidFill>
-                  <a:srgbClr val="59666A"/>
+                  <a:srgbClr val="536267"/>
                 </a:solidFill>
               </a:defRPr>
             </a:pPr>
             <a:r>
               <a:rPr sz="1050" b="1">
                 <a:solidFill>
-                  <a:srgbClr val="59666A"/>
+                  <a:srgbClr val="536267"/>
                 </a:solidFill>
               </a:rPr>
               <a:t>TrustTill | Hackaholics 7.0 | Financial Inclusion</a:t>
@@ -2059,22 +2111,22 @@
       </p:sp>
       <p:sp>
         <p:nvSpPr>
-          <p:cNvPr id="10" name="">
-            <a:extLst xmlns:a="http://schemas.openxmlformats.org/drawingml/2006/main">
-              <a:ext uri="{FF2B5EF4-FFF2-40B4-BE49-F238E27FC236}">
-                <a16:creationId xmlns:a16="http://schemas.microsoft.com/office/drawing/2014/main" id="{3415A8B3-C91E-41C3-BBAD-5AE5F0E0A12E}"/>
-              </a:ext>
-            </a:extLst>
-          </p:cNvPr>
-          <p:cNvSpPr>
-            <a:spLocks xmlns:a="http://schemas.openxmlformats.org/drawingml/2006/main" noGrp="1"/>
-          </p:cNvSpPr>
-          <p:nvPr/>
-        </p:nvSpPr>
-        <p:spPr>
-          <a:xfrm xmlns:a="http://schemas.openxmlformats.org/drawingml/2006/main">
-            <a:off x="11468100" y="6362700"/>
-            <a:ext cx="323850" cy="228600"/>
+          <p:cNvPr id="12" name="">
+            <a:extLst xmlns:a="http://schemas.openxmlformats.org/drawingml/2006/main">
+              <a:ext uri="{FF2B5EF4-FFF2-40B4-BE49-F238E27FC236}">
+                <a16:creationId xmlns:a16="http://schemas.microsoft.com/office/drawing/2014/main" id="{868D5E27-7090-4BEE-B1B6-C8EB6AFB6EED}"/>
+              </a:ext>
+            </a:extLst>
+          </p:cNvPr>
+          <p:cNvSpPr>
+            <a:spLocks xmlns:a="http://schemas.openxmlformats.org/drawingml/2006/main" noGrp="1"/>
+          </p:cNvSpPr>
+          <p:nvPr/>
+        </p:nvSpPr>
+        <p:spPr>
+          <a:xfrm xmlns:a="http://schemas.openxmlformats.org/drawingml/2006/main">
+            <a:off x="11315700" y="6362700"/>
+            <a:ext cx="342900" cy="228600"/>
           </a:xfrm>
           <a:prstGeom xmlns:a="http://schemas.openxmlformats.org/drawingml/2006/main" prst="rect">
             <a:avLst/>
@@ -2092,14 +2144,14 @@
             <a:pPr algn="r">
               <a:defRPr sz="1050" b="1">
                 <a:solidFill>
-                  <a:srgbClr val="59666A"/>
+                  <a:srgbClr val="536267"/>
                 </a:solidFill>
               </a:defRPr>
             </a:pPr>
             <a:r>
               <a:rPr sz="1050" b="1">
                 <a:solidFill>
-                  <a:srgbClr val="59666A"/>
+                  <a:srgbClr val="536267"/>
                 </a:solidFill>
               </a:rPr>
               <a:t>1</a:t>
@@ -2110,7 +2162,7 @@
     </p:spTree>
     <p:extLst>
       <p:ext uri="{BB962C8B-B14F-4D97-AF65-F5344CB8AC3E}">
-        <p14:creationId xmlns:p14="http://schemas.microsoft.com/office/powerpoint/2010/main" val="316485754"/>
+        <p14:creationId xmlns:p14="http://schemas.microsoft.com/office/powerpoint/2010/main" val="908838822"/>
       </p:ext>
     </p:extLst>
   </p:cSld>
@@ -2141,19 +2193,19 @@
           <p:cNvPr id="1" name="">
             <a:extLst xmlns:a="http://schemas.openxmlformats.org/drawingml/2006/main">
               <a:ext uri="{FF2B5EF4-FFF2-40B4-BE49-F238E27FC236}">
-                <a16:creationId xmlns:a16="http://schemas.microsoft.com/office/drawing/2014/main" id="{F6E3AB66-F3E2-4C37-A0B7-C4E26CCA68FC}"/>
-              </a:ext>
-            </a:extLst>
-          </p:cNvPr>
-          <p:cNvSpPr>
-            <a:spLocks xmlns:a="http://schemas.openxmlformats.org/drawingml/2006/main" noGrp="1"/>
-          </p:cNvSpPr>
-          <p:nvPr/>
-        </p:nvSpPr>
-        <p:spPr>
-          <a:xfrm xmlns:a="http://schemas.openxmlformats.org/drawingml/2006/main">
-            <a:off x="533400" y="514350"/>
-            <a:ext cx="8001000" cy="895350"/>
+                <a16:creationId xmlns:a16="http://schemas.microsoft.com/office/drawing/2014/main" id="{E8909726-312D-4F46-A208-C561D84C0878}"/>
+              </a:ext>
+            </a:extLst>
+          </p:cNvPr>
+          <p:cNvSpPr>
+            <a:spLocks xmlns:a="http://schemas.openxmlformats.org/drawingml/2006/main" noGrp="1"/>
+          </p:cNvSpPr>
+          <p:nvPr/>
+        </p:nvSpPr>
+        <p:spPr>
+          <a:xfrm xmlns:a="http://schemas.openxmlformats.org/drawingml/2006/main">
+            <a:off x="533400" y="457200"/>
+            <a:ext cx="10287000" cy="819150"/>
           </a:xfrm>
           <a:prstGeom xmlns:a="http://schemas.openxmlformats.org/drawingml/2006/main" prst="rect">
             <a:avLst/>
@@ -2181,7 +2233,7 @@
                   <a:srgbClr val="101820"/>
                 </a:solidFill>
               </a:rPr>
-              <a:t>Informal merchants are active, but their records are invisible</a:t>
+              <a:t>Messy evidence makes real merchants look invisible</a:t>
             </a:r>
           </a:p>
         </p:txBody>
@@ -2191,19 +2243,19 @@
           <p:cNvPr id="2" name="">
             <a:extLst xmlns:a="http://schemas.openxmlformats.org/drawingml/2006/main">
               <a:ext uri="{FF2B5EF4-FFF2-40B4-BE49-F238E27FC236}">
-                <a16:creationId xmlns:a16="http://schemas.microsoft.com/office/drawing/2014/main" id="{71A8CB2B-CEB8-4BAF-933F-BA5BC4A2D479}"/>
-              </a:ext>
-            </a:extLst>
-          </p:cNvPr>
-          <p:cNvSpPr>
-            <a:spLocks xmlns:a="http://schemas.openxmlformats.org/drawingml/2006/main" noGrp="1"/>
-          </p:cNvSpPr>
-          <p:nvPr/>
-        </p:nvSpPr>
-        <p:spPr>
-          <a:xfrm xmlns:a="http://schemas.openxmlformats.org/drawingml/2006/main">
-            <a:off x="552450" y="1352550"/>
-            <a:ext cx="6667500" cy="514350"/>
+                <a16:creationId xmlns:a16="http://schemas.microsoft.com/office/drawing/2014/main" id="{5F1DB8DF-A2F5-41CE-8061-DDDF0B1349E5}"/>
+              </a:ext>
+            </a:extLst>
+          </p:cNvPr>
+          <p:cNvSpPr>
+            <a:spLocks xmlns:a="http://schemas.openxmlformats.org/drawingml/2006/main" noGrp="1"/>
+          </p:cNvSpPr>
+          <p:nvPr/>
+        </p:nvSpPr>
+        <p:spPr>
+          <a:xfrm xmlns:a="http://schemas.openxmlformats.org/drawingml/2006/main">
+            <a:off x="552450" y="1333500"/>
+            <a:ext cx="8763000" cy="400050"/>
           </a:xfrm>
           <a:prstGeom xmlns:a="http://schemas.openxmlformats.org/drawingml/2006/main" prst="rect">
             <a:avLst/>
@@ -2219,19 +2271,19 @@
           <a:lstStyle xmlns:a="http://schemas.openxmlformats.org/drawingml/2006/main"/>
           <a:p xmlns:a="http://schemas.openxmlformats.org/drawingml/2006/main">
             <a:pPr>
-              <a:defRPr sz="1650" b="0">
-                <a:solidFill>
-                  <a:srgbClr val="59666A"/>
-                </a:solidFill>
-              </a:defRPr>
-            </a:pPr>
-            <a:r>
-              <a:rPr sz="1650" b="0">
-                <a:solidFill>
-                  <a:srgbClr val="59666A"/>
-                </a:solidFill>
-              </a:rPr>
-              <a:t>The money moves every day. The business evidence is scattered.</a:t>
+              <a:defRPr sz="1800" b="0">
+                <a:solidFill>
+                  <a:srgbClr val="536267"/>
+                </a:solidFill>
+              </a:defRPr>
+            </a:pPr>
+            <a:r>
+              <a:rPr sz="1800" b="0">
+                <a:solidFill>
+                  <a:srgbClr val="536267"/>
+                </a:solidFill>
+              </a:rPr>
+              <a:t>A cash-heavy merchant can be active every day and still look unbankable.</a:t>
             </a:r>
           </a:p>
         </p:txBody>
@@ -2241,19 +2293,19 @@
           <p:cNvPr id="3" name="">
             <a:extLst xmlns:a="http://schemas.openxmlformats.org/drawingml/2006/main">
               <a:ext uri="{FF2B5EF4-FFF2-40B4-BE49-F238E27FC236}">
-                <a16:creationId xmlns:a16="http://schemas.microsoft.com/office/drawing/2014/main" id="{97B9FEC3-D100-44AA-9B63-ECD4C5FE850F}"/>
-              </a:ext>
-            </a:extLst>
-          </p:cNvPr>
-          <p:cNvSpPr>
-            <a:spLocks xmlns:a="http://schemas.openxmlformats.org/drawingml/2006/main" noGrp="1"/>
-          </p:cNvSpPr>
-          <p:nvPr/>
-        </p:nvSpPr>
-        <p:spPr>
-          <a:xfrm xmlns:a="http://schemas.openxmlformats.org/drawingml/2006/main">
-            <a:off x="533400" y="1943100"/>
-            <a:ext cx="10572750" cy="0"/>
+                <a16:creationId xmlns:a16="http://schemas.microsoft.com/office/drawing/2014/main" id="{3350E32D-FAF2-4AF1-AFE2-5598FF9C459A}"/>
+              </a:ext>
+            </a:extLst>
+          </p:cNvPr>
+          <p:cNvSpPr>
+            <a:spLocks xmlns:a="http://schemas.openxmlformats.org/drawingml/2006/main" noGrp="1"/>
+          </p:cNvSpPr>
+          <p:nvPr/>
+        </p:nvSpPr>
+        <p:spPr>
+          <a:xfrm xmlns:a="http://schemas.openxmlformats.org/drawingml/2006/main">
+            <a:off x="533400" y="2000250"/>
+            <a:ext cx="10591800" cy="0"/>
           </a:xfrm>
           <a:prstGeom xmlns:a="http://schemas.openxmlformats.org/drawingml/2006/main" prst="line">
             <a:avLst/>
@@ -2261,7 +2313,7 @@
           <a:noFill xmlns:a="http://schemas.openxmlformats.org/drawingml/2006/main"/>
           <a:ln xmlns:a="http://schemas.openxmlformats.org/drawingml/2006/main" w="13335">
             <a:solidFill>
-              <a:srgbClr val="C8D1D2"/>
+              <a:srgbClr val="D8DEDF"/>
             </a:solidFill>
             <a:prstDash val="solid"/>
           </a:ln>
@@ -2272,29 +2324,129 @@
           <p:cNvPr id="4" name="">
             <a:extLst xmlns:a="http://schemas.openxmlformats.org/drawingml/2006/main">
               <a:ext uri="{FF2B5EF4-FFF2-40B4-BE49-F238E27FC236}">
-                <a16:creationId xmlns:a16="http://schemas.microsoft.com/office/drawing/2014/main" id="{E3A605F0-DF0E-432C-9242-5550D34032C8}"/>
-              </a:ext>
-            </a:extLst>
-          </p:cNvPr>
-          <p:cNvSpPr>
-            <a:spLocks xmlns:a="http://schemas.openxmlformats.org/drawingml/2006/main" noGrp="1"/>
-          </p:cNvSpPr>
-          <p:nvPr/>
-        </p:nvSpPr>
-        <p:spPr>
-          <a:xfrm xmlns:a="http://schemas.openxmlformats.org/drawingml/2006/main">
-            <a:off x="685800" y="2476500"/>
-            <a:ext cx="3143250" cy="2571750"/>
+                <a16:creationId xmlns:a16="http://schemas.microsoft.com/office/drawing/2014/main" id="{C7AF10DC-9CB9-4A57-AA21-9E5C60024149}"/>
+              </a:ext>
+            </a:extLst>
+          </p:cNvPr>
+          <p:cNvSpPr>
+            <a:spLocks xmlns:a="http://schemas.openxmlformats.org/drawingml/2006/main" noGrp="1"/>
+          </p:cNvSpPr>
+          <p:nvPr/>
+        </p:nvSpPr>
+        <p:spPr>
+          <a:xfrm xmlns:a="http://schemas.openxmlformats.org/drawingml/2006/main">
+            <a:off x="533400" y="6362700"/>
+            <a:ext cx="5334000" cy="228600"/>
+          </a:xfrm>
+          <a:prstGeom xmlns:a="http://schemas.openxmlformats.org/drawingml/2006/main" prst="rect">
+            <a:avLst/>
+          </a:prstGeom>
+          <a:noFill xmlns:a="http://schemas.openxmlformats.org/drawingml/2006/main"/>
+          <a:ln xmlns:a="http://schemas.openxmlformats.org/drawingml/2006/main" w="0">
+            <a:noFill/>
+            <a:prstDash val="solid"/>
+          </a:ln>
+        </p:spPr>
+        <p:txBody>
+          <a:bodyPr xmlns:a="http://schemas.openxmlformats.org/drawingml/2006/main"/>
+          <a:lstStyle xmlns:a="http://schemas.openxmlformats.org/drawingml/2006/main"/>
+          <a:p xmlns:a="http://schemas.openxmlformats.org/drawingml/2006/main">
+            <a:pPr>
+              <a:defRPr sz="1050" b="1">
+                <a:solidFill>
+                  <a:srgbClr val="536267"/>
+                </a:solidFill>
+              </a:defRPr>
+            </a:pPr>
+            <a:r>
+              <a:rPr sz="1050" b="1">
+                <a:solidFill>
+                  <a:srgbClr val="536267"/>
+                </a:solidFill>
+              </a:rPr>
+              <a:t>TrustTill | Hackaholics 7.0 | Financial Inclusion</a:t>
+            </a:r>
+          </a:p>
+        </p:txBody>
+      </p:sp>
+      <p:sp>
+        <p:nvSpPr>
+          <p:cNvPr id="5" name="">
+            <a:extLst xmlns:a="http://schemas.openxmlformats.org/drawingml/2006/main">
+              <a:ext uri="{FF2B5EF4-FFF2-40B4-BE49-F238E27FC236}">
+                <a16:creationId xmlns:a16="http://schemas.microsoft.com/office/drawing/2014/main" id="{DEC6216B-6743-482B-B3AD-527D5094AA32}"/>
+              </a:ext>
+            </a:extLst>
+          </p:cNvPr>
+          <p:cNvSpPr>
+            <a:spLocks xmlns:a="http://schemas.openxmlformats.org/drawingml/2006/main" noGrp="1"/>
+          </p:cNvSpPr>
+          <p:nvPr/>
+        </p:nvSpPr>
+        <p:spPr>
+          <a:xfrm xmlns:a="http://schemas.openxmlformats.org/drawingml/2006/main">
+            <a:off x="11315700" y="6362700"/>
+            <a:ext cx="342900" cy="228600"/>
+          </a:xfrm>
+          <a:prstGeom xmlns:a="http://schemas.openxmlformats.org/drawingml/2006/main" prst="rect">
+            <a:avLst/>
+          </a:prstGeom>
+          <a:noFill xmlns:a="http://schemas.openxmlformats.org/drawingml/2006/main"/>
+          <a:ln xmlns:a="http://schemas.openxmlformats.org/drawingml/2006/main" w="0">
+            <a:noFill/>
+            <a:prstDash val="solid"/>
+          </a:ln>
+        </p:spPr>
+        <p:txBody>
+          <a:bodyPr xmlns:a="http://schemas.openxmlformats.org/drawingml/2006/main"/>
+          <a:lstStyle xmlns:a="http://schemas.openxmlformats.org/drawingml/2006/main"/>
+          <a:p xmlns:a="http://schemas.openxmlformats.org/drawingml/2006/main">
+            <a:pPr algn="r">
+              <a:defRPr sz="1050" b="1">
+                <a:solidFill>
+                  <a:srgbClr val="536267"/>
+                </a:solidFill>
+              </a:defRPr>
+            </a:pPr>
+            <a:r>
+              <a:rPr sz="1050" b="1">
+                <a:solidFill>
+                  <a:srgbClr val="536267"/>
+                </a:solidFill>
+              </a:rPr>
+              <a:t>2</a:t>
+            </a:r>
+          </a:p>
+        </p:txBody>
+      </p:sp>
+      <p:sp>
+        <p:nvSpPr>
+          <p:cNvPr id="6" name="">
+            <a:extLst xmlns:a="http://schemas.openxmlformats.org/drawingml/2006/main">
+              <a:ext uri="{FF2B5EF4-FFF2-40B4-BE49-F238E27FC236}">
+                <a16:creationId xmlns:a16="http://schemas.microsoft.com/office/drawing/2014/main" id="{22193EFA-0E66-40D5-AA63-52978D4DEC8B}"/>
+              </a:ext>
+            </a:extLst>
+          </p:cNvPr>
+          <p:cNvSpPr>
+            <a:spLocks xmlns:a="http://schemas.openxmlformats.org/drawingml/2006/main" noGrp="1"/>
+          </p:cNvSpPr>
+          <p:nvPr/>
+        </p:nvSpPr>
+        <p:spPr>
+          <a:xfrm xmlns:a="http://schemas.openxmlformats.org/drawingml/2006/main">
+            <a:off x="685800" y="2381250"/>
+            <a:ext cx="4476750" cy="2552700"/>
           </a:xfrm>
           <a:prstGeom xmlns:a="http://schemas.openxmlformats.org/drawingml/2006/main" prst="rect">
             <a:avLst/>
           </a:prstGeom>
           <a:solidFill xmlns:a="http://schemas.openxmlformats.org/drawingml/2006/main">
-            <a:srgbClr val="F2F5F4"/>
+            <a:srgbClr val="F4F7F6"/>
           </a:solidFill>
           <a:ln xmlns:a="http://schemas.openxmlformats.org/drawingml/2006/main" w="9525">
             <a:solidFill>
-              <a:srgbClr val="C8D1D2"/>
+              <a:srgbClr val="D8DEDF"/>
             </a:solidFill>
             <a:prstDash val="solid"/>
           </a:ln>
@@ -2302,22 +2454,22 @@
       </p:sp>
       <p:sp>
         <p:nvSpPr>
-          <p:cNvPr id="5" name="">
-            <a:extLst xmlns:a="http://schemas.openxmlformats.org/drawingml/2006/main">
-              <a:ext uri="{FF2B5EF4-FFF2-40B4-BE49-F238E27FC236}">
-                <a16:creationId xmlns:a16="http://schemas.microsoft.com/office/drawing/2014/main" id="{4234476C-3F7F-4E8B-B29F-3AE6B70A758A}"/>
-              </a:ext>
-            </a:extLst>
-          </p:cNvPr>
-          <p:cNvSpPr>
-            <a:spLocks xmlns:a="http://schemas.openxmlformats.org/drawingml/2006/main" noGrp="1"/>
-          </p:cNvSpPr>
-          <p:nvPr/>
-        </p:nvSpPr>
-        <p:spPr>
-          <a:xfrm xmlns:a="http://schemas.openxmlformats.org/drawingml/2006/main">
-            <a:off x="914400" y="2724150"/>
-            <a:ext cx="2571750" cy="400050"/>
+          <p:cNvPr id="7" name="">
+            <a:extLst xmlns:a="http://schemas.openxmlformats.org/drawingml/2006/main">
+              <a:ext uri="{FF2B5EF4-FFF2-40B4-BE49-F238E27FC236}">
+                <a16:creationId xmlns:a16="http://schemas.microsoft.com/office/drawing/2014/main" id="{90133733-5D90-40A8-B330-CE9D15AC8999}"/>
+              </a:ext>
+            </a:extLst>
+          </p:cNvPr>
+          <p:cNvSpPr>
+            <a:spLocks xmlns:a="http://schemas.openxmlformats.org/drawingml/2006/main" noGrp="1"/>
+          </p:cNvSpPr>
+          <p:nvPr/>
+        </p:nvSpPr>
+        <p:spPr>
+          <a:xfrm xmlns:a="http://schemas.openxmlformats.org/drawingml/2006/main">
+            <a:off x="971550" y="2724150"/>
+            <a:ext cx="3143250" cy="361950"/>
           </a:xfrm>
           <a:prstGeom xmlns:a="http://schemas.openxmlformats.org/drawingml/2006/main" prst="rect">
             <a:avLst/>
@@ -2333,41 +2485,41 @@
           <a:lstStyle xmlns:a="http://schemas.openxmlformats.org/drawingml/2006/main"/>
           <a:p xmlns:a="http://schemas.openxmlformats.org/drawingml/2006/main">
             <a:pPr>
-              <a:defRPr sz="1800" b="1">
+              <a:defRPr sz="2250" b="1">
                 <a:solidFill>
                   <a:srgbClr val="003D48"/>
                 </a:solidFill>
               </a:defRPr>
             </a:pPr>
             <a:r>
-              <a:rPr sz="1800" b="1">
+              <a:rPr sz="2250" b="1">
                 <a:solidFill>
                   <a:srgbClr val="003D48"/>
                 </a:solidFill>
               </a:rPr>
-              <a:t>What merchants have</a:t>
-            </a:r>
-          </a:p>
-        </p:txBody>
-      </p:sp>
-      <p:sp>
-        <p:nvSpPr>
-          <p:cNvPr id="6" name="">
-            <a:extLst xmlns:a="http://schemas.openxmlformats.org/drawingml/2006/main">
-              <a:ext uri="{FF2B5EF4-FFF2-40B4-BE49-F238E27FC236}">
-                <a16:creationId xmlns:a16="http://schemas.microsoft.com/office/drawing/2014/main" id="{E18D9EE8-78DB-42A9-B4C8-8423FCA964B2}"/>
-              </a:ext>
-            </a:extLst>
-          </p:cNvPr>
-          <p:cNvSpPr>
-            <a:spLocks xmlns:a="http://schemas.openxmlformats.org/drawingml/2006/main" noGrp="1"/>
-          </p:cNvSpPr>
-          <p:nvPr/>
-        </p:nvSpPr>
-        <p:spPr>
-          <a:xfrm xmlns:a="http://schemas.openxmlformats.org/drawingml/2006/main">
-            <a:off x="914400" y="3352800"/>
-            <a:ext cx="2571750" cy="1238250"/>
+              <a:t>Merchant reality</a:t>
+            </a:r>
+          </a:p>
+        </p:txBody>
+      </p:sp>
+      <p:sp>
+        <p:nvSpPr>
+          <p:cNvPr id="8" name="">
+            <a:extLst xmlns:a="http://schemas.openxmlformats.org/drawingml/2006/main">
+              <a:ext uri="{FF2B5EF4-FFF2-40B4-BE49-F238E27FC236}">
+                <a16:creationId xmlns:a16="http://schemas.microsoft.com/office/drawing/2014/main" id="{14B58862-373D-425E-82F2-CD693F067B08}"/>
+              </a:ext>
+            </a:extLst>
+          </p:cNvPr>
+          <p:cNvSpPr>
+            <a:spLocks xmlns:a="http://schemas.openxmlformats.org/drawingml/2006/main" noGrp="1"/>
+          </p:cNvSpPr>
+          <p:nvPr/>
+        </p:nvSpPr>
+        <p:spPr>
+          <a:xfrm xmlns:a="http://schemas.openxmlformats.org/drawingml/2006/main">
+            <a:off x="990600" y="3390900"/>
+            <a:ext cx="3048000" cy="1123950"/>
           </a:xfrm>
           <a:prstGeom xmlns:a="http://schemas.openxmlformats.org/drawingml/2006/main" prst="rect">
             <a:avLst/>
@@ -2395,7 +2547,7 @@
                   <a:srgbClr val="101820"/>
                 </a:solidFill>
               </a:rPr>
-              <a:t>SMS alerts</a:t>
+              <a:t>Cash sales</a:t>
             </a:r>
           </a:p>
           <a:p xmlns:a="http://schemas.openxmlformats.org/drawingml/2006/main">
@@ -2412,7 +2564,7 @@
                   <a:srgbClr val="101820"/>
                 </a:solidFill>
               </a:rPr>
-              <a:t>WhatsApp orders</a:t>
+              <a:t>Transfer alerts</a:t>
             </a:r>
           </a:p>
           <a:p xmlns:a="http://schemas.openxmlformats.org/drawingml/2006/main">
@@ -2429,7 +2581,7 @@
                   <a:srgbClr val="101820"/>
                 </a:solidFill>
               </a:rPr>
-              <a:t>Cash notes</a:t>
+              <a:t>Paper receipts</a:t>
             </a:r>
           </a:p>
           <a:p xmlns:a="http://schemas.openxmlformats.org/drawingml/2006/main">
@@ -2446,39 +2598,120 @@
                   <a:srgbClr val="101820"/>
                 </a:solidFill>
               </a:rPr>
-              <a:t>POS receipts</a:t>
-            </a:r>
-          </a:p>
-        </p:txBody>
-      </p:sp>
-      <p:sp>
-        <p:nvSpPr>
-          <p:cNvPr id="7" name="">
-            <a:extLst xmlns:a="http://schemas.openxmlformats.org/drawingml/2006/main">
-              <a:ext uri="{FF2B5EF4-FFF2-40B4-BE49-F238E27FC236}">
-                <a16:creationId xmlns:a16="http://schemas.microsoft.com/office/drawing/2014/main" id="{0B463001-B48D-40E3-B55F-F76FE4E2A414}"/>
-              </a:ext>
-            </a:extLst>
-          </p:cNvPr>
-          <p:cNvSpPr>
-            <a:spLocks xmlns:a="http://schemas.openxmlformats.org/drawingml/2006/main" noGrp="1"/>
-          </p:cNvSpPr>
-          <p:nvPr/>
-        </p:nvSpPr>
-        <p:spPr>
-          <a:xfrm xmlns:a="http://schemas.openxmlformats.org/drawingml/2006/main">
-            <a:off x="4324350" y="2476500"/>
-            <a:ext cx="3143250" cy="2571750"/>
+              <a:t>WhatsApp notes</a:t>
+            </a:r>
+          </a:p>
+        </p:txBody>
+      </p:sp>
+      <p:sp>
+        <p:nvSpPr>
+          <p:cNvPr id="9" name="">
+            <a:extLst xmlns:a="http://schemas.openxmlformats.org/drawingml/2006/main">
+              <a:ext uri="{FF2B5EF4-FFF2-40B4-BE49-F238E27FC236}">
+                <a16:creationId xmlns:a16="http://schemas.microsoft.com/office/drawing/2014/main" id="{97C44AD6-AC0E-470A-BF5A-B7017D81EF8F}"/>
+              </a:ext>
+            </a:extLst>
+          </p:cNvPr>
+          <p:cNvSpPr>
+            <a:spLocks xmlns:a="http://schemas.openxmlformats.org/drawingml/2006/main" noGrp="1"/>
+          </p:cNvSpPr>
+          <p:nvPr/>
+        </p:nvSpPr>
+        <p:spPr>
+          <a:xfrm xmlns:a="http://schemas.openxmlformats.org/drawingml/2006/main">
+            <a:off x="5219700" y="3752850"/>
+            <a:ext cx="1905000" cy="0"/>
+          </a:xfrm>
+          <a:prstGeom xmlns:a="http://schemas.openxmlformats.org/drawingml/2006/main" prst="line">
+            <a:avLst/>
+          </a:prstGeom>
+          <a:noFill xmlns:a="http://schemas.openxmlformats.org/drawingml/2006/main"/>
+          <a:ln xmlns:a="http://schemas.openxmlformats.org/drawingml/2006/main" w="28575">
+            <a:solidFill>
+              <a:srgbClr val="E4144F"/>
+            </a:solidFill>
+            <a:prstDash val="solid"/>
+          </a:ln>
+        </p:spPr>
+      </p:sp>
+      <p:sp>
+        <p:nvSpPr>
+          <p:cNvPr id="10" name="">
+            <a:extLst xmlns:a="http://schemas.openxmlformats.org/drawingml/2006/main">
+              <a:ext uri="{FF2B5EF4-FFF2-40B4-BE49-F238E27FC236}">
+                <a16:creationId xmlns:a16="http://schemas.microsoft.com/office/drawing/2014/main" id="{1BFBD83E-3BB9-4637-B76F-A0282FE1A69B}"/>
+              </a:ext>
+            </a:extLst>
+          </p:cNvPr>
+          <p:cNvSpPr>
+            <a:spLocks xmlns:a="http://schemas.openxmlformats.org/drawingml/2006/main" noGrp="1"/>
+          </p:cNvSpPr>
+          <p:nvPr/>
+        </p:nvSpPr>
+        <p:spPr>
+          <a:xfrm xmlns:a="http://schemas.openxmlformats.org/drawingml/2006/main">
+            <a:off x="6000750" y="3409950"/>
+            <a:ext cx="342900" cy="495300"/>
+          </a:xfrm>
+          <a:prstGeom xmlns:a="http://schemas.openxmlformats.org/drawingml/2006/main" prst="rect">
+            <a:avLst/>
+          </a:prstGeom>
+          <a:noFill xmlns:a="http://schemas.openxmlformats.org/drawingml/2006/main"/>
+          <a:ln xmlns:a="http://schemas.openxmlformats.org/drawingml/2006/main" w="0">
+            <a:noFill/>
+            <a:prstDash val="solid"/>
+          </a:ln>
+        </p:spPr>
+        <p:txBody>
+          <a:bodyPr xmlns:a="http://schemas.openxmlformats.org/drawingml/2006/main"/>
+          <a:lstStyle xmlns:a="http://schemas.openxmlformats.org/drawingml/2006/main"/>
+          <a:p xmlns:a="http://schemas.openxmlformats.org/drawingml/2006/main">
+            <a:pPr algn="ctr">
+              <a:defRPr sz="3150" b="1">
+                <a:solidFill>
+                  <a:srgbClr val="E4144F"/>
+                </a:solidFill>
+              </a:defRPr>
+            </a:pPr>
+            <a:r>
+              <a:rPr sz="3150" b="1">
+                <a:solidFill>
+                  <a:srgbClr val="E4144F"/>
+                </a:solidFill>
+              </a:rPr>
+              <a:t>&gt;</a:t>
+            </a:r>
+          </a:p>
+        </p:txBody>
+      </p:sp>
+      <p:sp>
+        <p:nvSpPr>
+          <p:cNvPr id="11" name="">
+            <a:extLst xmlns:a="http://schemas.openxmlformats.org/drawingml/2006/main">
+              <a:ext uri="{FF2B5EF4-FFF2-40B4-BE49-F238E27FC236}">
+                <a16:creationId xmlns:a16="http://schemas.microsoft.com/office/drawing/2014/main" id="{E4AC008B-E990-4C65-9E51-EA0E2B9C5EFA}"/>
+              </a:ext>
+            </a:extLst>
+          </p:cNvPr>
+          <p:cNvSpPr>
+            <a:spLocks xmlns:a="http://schemas.openxmlformats.org/drawingml/2006/main" noGrp="1"/>
+          </p:cNvSpPr>
+          <p:nvPr/>
+        </p:nvSpPr>
+        <p:spPr>
+          <a:xfrm xmlns:a="http://schemas.openxmlformats.org/drawingml/2006/main">
+            <a:off x="7429500" y="2381250"/>
+            <a:ext cx="4000500" cy="2552700"/>
           </a:xfrm>
           <a:prstGeom xmlns:a="http://schemas.openxmlformats.org/drawingml/2006/main" prst="rect">
             <a:avLst/>
           </a:prstGeom>
           <a:solidFill xmlns:a="http://schemas.openxmlformats.org/drawingml/2006/main">
-            <a:srgbClr val="F8F3EA"/>
+            <a:srgbClr val="FBF5EA"/>
           </a:solidFill>
           <a:ln xmlns:a="http://schemas.openxmlformats.org/drawingml/2006/main" w="9525">
             <a:solidFill>
-              <a:srgbClr val="C8D1D2"/>
+              <a:srgbClr val="D8DEDF"/>
             </a:solidFill>
             <a:prstDash val="solid"/>
           </a:ln>
@@ -2486,22 +2719,22 @@
       </p:sp>
       <p:sp>
         <p:nvSpPr>
-          <p:cNvPr id="8" name="">
-            <a:extLst xmlns:a="http://schemas.openxmlformats.org/drawingml/2006/main">
-              <a:ext uri="{FF2B5EF4-FFF2-40B4-BE49-F238E27FC236}">
-                <a16:creationId xmlns:a16="http://schemas.microsoft.com/office/drawing/2014/main" id="{CF47F1C7-4F49-49F6-B07B-5EDE810BD2FD}"/>
-              </a:ext>
-            </a:extLst>
-          </p:cNvPr>
-          <p:cNvSpPr>
-            <a:spLocks xmlns:a="http://schemas.openxmlformats.org/drawingml/2006/main" noGrp="1"/>
-          </p:cNvSpPr>
-          <p:nvPr/>
-        </p:nvSpPr>
-        <p:spPr>
-          <a:xfrm xmlns:a="http://schemas.openxmlformats.org/drawingml/2006/main">
-            <a:off x="4552950" y="2724150"/>
-            <a:ext cx="2571750" cy="400050"/>
+          <p:cNvPr id="12" name="">
+            <a:extLst xmlns:a="http://schemas.openxmlformats.org/drawingml/2006/main">
+              <a:ext uri="{FF2B5EF4-FFF2-40B4-BE49-F238E27FC236}">
+                <a16:creationId xmlns:a16="http://schemas.microsoft.com/office/drawing/2014/main" id="{1CA2F0D4-8EEE-4865-831C-5954675A2D91}"/>
+              </a:ext>
+            </a:extLst>
+          </p:cNvPr>
+          <p:cNvSpPr>
+            <a:spLocks xmlns:a="http://schemas.openxmlformats.org/drawingml/2006/main" noGrp="1"/>
+          </p:cNvSpPr>
+          <p:nvPr/>
+        </p:nvSpPr>
+        <p:spPr>
+          <a:xfrm xmlns:a="http://schemas.openxmlformats.org/drawingml/2006/main">
+            <a:off x="7715250" y="2724150"/>
+            <a:ext cx="3143250" cy="361950"/>
           </a:xfrm>
           <a:prstGeom xmlns:a="http://schemas.openxmlformats.org/drawingml/2006/main" prst="rect">
             <a:avLst/>
@@ -2517,41 +2750,41 @@
           <a:lstStyle xmlns:a="http://schemas.openxmlformats.org/drawingml/2006/main"/>
           <a:p xmlns:a="http://schemas.openxmlformats.org/drawingml/2006/main">
             <a:pPr>
-              <a:defRPr sz="1800" b="1">
+              <a:defRPr sz="2250" b="1">
                 <a:solidFill>
                   <a:srgbClr val="003D48"/>
                 </a:solidFill>
               </a:defRPr>
             </a:pPr>
             <a:r>
-              <a:rPr sz="1800" b="1">
+              <a:rPr sz="2250" b="1">
                 <a:solidFill>
                   <a:srgbClr val="003D48"/>
                 </a:solidFill>
               </a:rPr>
-              <a:t>What banks need</a:t>
-            </a:r>
-          </a:p>
-        </p:txBody>
-      </p:sp>
-      <p:sp>
-        <p:nvSpPr>
-          <p:cNvPr id="9" name="">
-            <a:extLst xmlns:a="http://schemas.openxmlformats.org/drawingml/2006/main">
-              <a:ext uri="{FF2B5EF4-FFF2-40B4-BE49-F238E27FC236}">
-                <a16:creationId xmlns:a16="http://schemas.microsoft.com/office/drawing/2014/main" id="{735E5A93-B444-48B9-BC71-7795BA185268}"/>
-              </a:ext>
-            </a:extLst>
-          </p:cNvPr>
-          <p:cNvSpPr>
-            <a:spLocks xmlns:a="http://schemas.openxmlformats.org/drawingml/2006/main" noGrp="1"/>
-          </p:cNvSpPr>
-          <p:nvPr/>
-        </p:nvSpPr>
-        <p:spPr>
-          <a:xfrm xmlns:a="http://schemas.openxmlformats.org/drawingml/2006/main">
-            <a:off x="4552950" y="3352800"/>
-            <a:ext cx="2571750" cy="1238250"/>
+              <a:t>Bank-readable proof</a:t>
+            </a:r>
+          </a:p>
+        </p:txBody>
+      </p:sp>
+      <p:sp>
+        <p:nvSpPr>
+          <p:cNvPr id="13" name="">
+            <a:extLst xmlns:a="http://schemas.openxmlformats.org/drawingml/2006/main">
+              <a:ext uri="{FF2B5EF4-FFF2-40B4-BE49-F238E27FC236}">
+                <a16:creationId xmlns:a16="http://schemas.microsoft.com/office/drawing/2014/main" id="{E557B1F6-2196-4D63-8D5D-7AC96A712E67}"/>
+              </a:ext>
+            </a:extLst>
+          </p:cNvPr>
+          <p:cNvSpPr>
+            <a:spLocks xmlns:a="http://schemas.openxmlformats.org/drawingml/2006/main" noGrp="1"/>
+          </p:cNvSpPr>
+          <p:nvPr/>
+        </p:nvSpPr>
+        <p:spPr>
+          <a:xfrm xmlns:a="http://schemas.openxmlformats.org/drawingml/2006/main">
+            <a:off x="7734300" y="3390900"/>
+            <a:ext cx="3048000" cy="1123950"/>
           </a:xfrm>
           <a:prstGeom xmlns:a="http://schemas.openxmlformats.org/drawingml/2006/main" prst="rect">
             <a:avLst/>
@@ -2579,7 +2812,7 @@
                   <a:srgbClr val="101820"/>
                 </a:solidFill>
               </a:rPr>
-              <a:t>Clean cashflow</a:t>
+              <a:t>Cashflow pattern</a:t>
             </a:r>
           </a:p>
           <a:p xmlns:a="http://schemas.openxmlformats.org/drawingml/2006/main">
@@ -2596,7 +2829,7 @@
                   <a:srgbClr val="101820"/>
                 </a:solidFill>
               </a:rPr>
-              <a:t>Customer patterns</a:t>
+              <a:t>Evidence quality</a:t>
             </a:r>
           </a:p>
           <a:p xmlns:a="http://schemas.openxmlformats.org/drawingml/2006/main">
@@ -2613,7 +2846,7 @@
                   <a:srgbClr val="101820"/>
                 </a:solidFill>
               </a:rPr>
-              <a:t>Dispute signals</a:t>
+              <a:t>Risk flags</a:t>
             </a:r>
           </a:p>
           <a:p xmlns:a="http://schemas.openxmlformats.org/drawingml/2006/main">
@@ -2630,62 +2863,29 @@
                   <a:srgbClr val="101820"/>
                 </a:solidFill>
               </a:rPr>
-              <a:t>Record quality</a:t>
-            </a:r>
-          </a:p>
-        </p:txBody>
-      </p:sp>
-      <p:sp>
-        <p:nvSpPr>
-          <p:cNvPr id="10" name="">
-            <a:extLst xmlns:a="http://schemas.openxmlformats.org/drawingml/2006/main">
-              <a:ext uri="{FF2B5EF4-FFF2-40B4-BE49-F238E27FC236}">
-                <a16:creationId xmlns:a16="http://schemas.microsoft.com/office/drawing/2014/main" id="{3E382AE2-58B5-4EB7-BACC-5CE7C73CDE70}"/>
-              </a:ext>
-            </a:extLst>
-          </p:cNvPr>
-          <p:cNvSpPr>
-            <a:spLocks xmlns:a="http://schemas.openxmlformats.org/drawingml/2006/main" noGrp="1"/>
-          </p:cNvSpPr>
-          <p:nvPr/>
-        </p:nvSpPr>
-        <p:spPr>
-          <a:xfrm xmlns:a="http://schemas.openxmlformats.org/drawingml/2006/main">
-            <a:off x="7962900" y="2476500"/>
-            <a:ext cx="3143250" cy="2571750"/>
-          </a:xfrm>
-          <a:prstGeom xmlns:a="http://schemas.openxmlformats.org/drawingml/2006/main" prst="rect">
-            <a:avLst/>
-          </a:prstGeom>
-          <a:solidFill xmlns:a="http://schemas.openxmlformats.org/drawingml/2006/main">
-            <a:srgbClr val="F2F5F4"/>
-          </a:solidFill>
-          <a:ln xmlns:a="http://schemas.openxmlformats.org/drawingml/2006/main" w="9525">
-            <a:solidFill>
-              <a:srgbClr val="C8D1D2"/>
-            </a:solidFill>
-            <a:prstDash val="solid"/>
-          </a:ln>
-        </p:spPr>
-      </p:sp>
-      <p:sp>
-        <p:nvSpPr>
-          <p:cNvPr id="11" name="">
-            <a:extLst xmlns:a="http://schemas.openxmlformats.org/drawingml/2006/main">
-              <a:ext uri="{FF2B5EF4-FFF2-40B4-BE49-F238E27FC236}">
-                <a16:creationId xmlns:a16="http://schemas.microsoft.com/office/drawing/2014/main" id="{4ECD0543-9F39-4C7B-A586-BF4FA0A81DFE}"/>
-              </a:ext>
-            </a:extLst>
-          </p:cNvPr>
-          <p:cNvSpPr>
-            <a:spLocks xmlns:a="http://schemas.openxmlformats.org/drawingml/2006/main" noGrp="1"/>
-          </p:cNvSpPr>
-          <p:nvPr/>
-        </p:nvSpPr>
-        <p:spPr>
-          <a:xfrm xmlns:a="http://schemas.openxmlformats.org/drawingml/2006/main">
-            <a:off x="8191500" y="2724150"/>
-            <a:ext cx="2571750" cy="400050"/>
+              <a:t>Next best action</a:t>
+            </a:r>
+          </a:p>
+        </p:txBody>
+      </p:sp>
+      <p:sp>
+        <p:nvSpPr>
+          <p:cNvPr id="14" name="">
+            <a:extLst xmlns:a="http://schemas.openxmlformats.org/drawingml/2006/main">
+              <a:ext uri="{FF2B5EF4-FFF2-40B4-BE49-F238E27FC236}">
+                <a16:creationId xmlns:a16="http://schemas.microsoft.com/office/drawing/2014/main" id="{C778659D-1A9B-4909-9EA3-028056F93CEE}"/>
+              </a:ext>
+            </a:extLst>
+          </p:cNvPr>
+          <p:cNvSpPr>
+            <a:spLocks xmlns:a="http://schemas.openxmlformats.org/drawingml/2006/main" noGrp="1"/>
+          </p:cNvSpPr>
+          <p:nvPr/>
+        </p:nvSpPr>
+        <p:spPr>
+          <a:xfrm xmlns:a="http://schemas.openxmlformats.org/drawingml/2006/main">
+            <a:off x="685800" y="5410200"/>
+            <a:ext cx="7239000" cy="438150"/>
           </a:xfrm>
           <a:prstGeom xmlns:a="http://schemas.openxmlformats.org/drawingml/2006/main" prst="rect">
             <a:avLst/>
@@ -2701,270 +2901,19 @@
           <a:lstStyle xmlns:a="http://schemas.openxmlformats.org/drawingml/2006/main"/>
           <a:p xmlns:a="http://schemas.openxmlformats.org/drawingml/2006/main">
             <a:pPr>
-              <a:defRPr sz="1800" b="1">
-                <a:solidFill>
-                  <a:srgbClr val="003D48"/>
-                </a:solidFill>
-              </a:defRPr>
-            </a:pPr>
-            <a:r>
-              <a:rPr sz="1800" b="1">
-                <a:solidFill>
-                  <a:srgbClr val="003D48"/>
-                </a:solidFill>
-              </a:rPr>
-              <a:t>What gets lost</a:t>
-            </a:r>
-          </a:p>
-        </p:txBody>
-      </p:sp>
-      <p:sp>
-        <p:nvSpPr>
-          <p:cNvPr id="12" name="">
-            <a:extLst xmlns:a="http://schemas.openxmlformats.org/drawingml/2006/main">
-              <a:ext uri="{FF2B5EF4-FFF2-40B4-BE49-F238E27FC236}">
-                <a16:creationId xmlns:a16="http://schemas.microsoft.com/office/drawing/2014/main" id="{70A85E4A-2930-41C8-99CC-85B5E386FC8E}"/>
-              </a:ext>
-            </a:extLst>
-          </p:cNvPr>
-          <p:cNvSpPr>
-            <a:spLocks xmlns:a="http://schemas.openxmlformats.org/drawingml/2006/main" noGrp="1"/>
-          </p:cNvSpPr>
-          <p:nvPr/>
-        </p:nvSpPr>
-        <p:spPr>
-          <a:xfrm xmlns:a="http://schemas.openxmlformats.org/drawingml/2006/main">
-            <a:off x="8191500" y="3352800"/>
-            <a:ext cx="2571750" cy="1238250"/>
-          </a:xfrm>
-          <a:prstGeom xmlns:a="http://schemas.openxmlformats.org/drawingml/2006/main" prst="rect">
-            <a:avLst/>
-          </a:prstGeom>
-          <a:noFill xmlns:a="http://schemas.openxmlformats.org/drawingml/2006/main"/>
-          <a:ln xmlns:a="http://schemas.openxmlformats.org/drawingml/2006/main" w="0">
-            <a:noFill/>
-            <a:prstDash val="solid"/>
-          </a:ln>
-        </p:spPr>
-        <p:txBody>
-          <a:bodyPr xmlns:a="http://schemas.openxmlformats.org/drawingml/2006/main"/>
-          <a:lstStyle xmlns:a="http://schemas.openxmlformats.org/drawingml/2006/main"/>
-          <a:p xmlns:a="http://schemas.openxmlformats.org/drawingml/2006/main">
-            <a:pPr>
-              <a:defRPr sz="2100" b="1">
-                <a:solidFill>
-                  <a:srgbClr val="101820"/>
-                </a:solidFill>
-              </a:defRPr>
-            </a:pPr>
-            <a:r>
-              <a:rPr sz="2100" b="1">
-                <a:solidFill>
-                  <a:srgbClr val="101820"/>
-                </a:solidFill>
-              </a:rPr>
-              <a:t>Context</a:t>
-            </a:r>
-          </a:p>
-          <a:p xmlns:a="http://schemas.openxmlformats.org/drawingml/2006/main">
-            <a:pPr>
-              <a:defRPr sz="2100" b="1">
-                <a:solidFill>
-                  <a:srgbClr val="101820"/>
-                </a:solidFill>
-              </a:defRPr>
-            </a:pPr>
-            <a:r>
-              <a:rPr sz="2100" b="1">
-                <a:solidFill>
-                  <a:srgbClr val="101820"/>
-                </a:solidFill>
-              </a:rPr>
-              <a:t>Consistency</a:t>
-            </a:r>
-          </a:p>
-          <a:p xmlns:a="http://schemas.openxmlformats.org/drawingml/2006/main">
-            <a:pPr>
-              <a:defRPr sz="2100" b="1">
-                <a:solidFill>
-                  <a:srgbClr val="101820"/>
-                </a:solidFill>
-              </a:defRPr>
-            </a:pPr>
-            <a:r>
-              <a:rPr sz="2100" b="1">
-                <a:solidFill>
-                  <a:srgbClr val="101820"/>
-                </a:solidFill>
-              </a:rPr>
-              <a:t>Trust</a:t>
-            </a:r>
-          </a:p>
-          <a:p xmlns:a="http://schemas.openxmlformats.org/drawingml/2006/main">
-            <a:pPr>
-              <a:defRPr sz="2100" b="1">
-                <a:solidFill>
-                  <a:srgbClr val="101820"/>
-                </a:solidFill>
-              </a:defRPr>
-            </a:pPr>
-            <a:r>
-              <a:rPr sz="2100" b="1">
-                <a:solidFill>
-                  <a:srgbClr val="101820"/>
-                </a:solidFill>
-              </a:rPr>
-              <a:t>A path to support</a:t>
-            </a:r>
-          </a:p>
-        </p:txBody>
-      </p:sp>
-      <p:sp>
-        <p:nvSpPr>
-          <p:cNvPr id="13" name="">
-            <a:extLst xmlns:a="http://schemas.openxmlformats.org/drawingml/2006/main">
-              <a:ext uri="{FF2B5EF4-FFF2-40B4-BE49-F238E27FC236}">
-                <a16:creationId xmlns:a16="http://schemas.microsoft.com/office/drawing/2014/main" id="{28D831E3-8A3B-4707-BFFE-40899BF946A4}"/>
-              </a:ext>
-            </a:extLst>
-          </p:cNvPr>
-          <p:cNvSpPr>
-            <a:spLocks xmlns:a="http://schemas.openxmlformats.org/drawingml/2006/main" noGrp="1"/>
-          </p:cNvSpPr>
-          <p:nvPr/>
-        </p:nvSpPr>
-        <p:spPr>
-          <a:xfrm xmlns:a="http://schemas.openxmlformats.org/drawingml/2006/main">
-            <a:off x="723900" y="5410200"/>
-            <a:ext cx="8763000" cy="419100"/>
-          </a:xfrm>
-          <a:prstGeom xmlns:a="http://schemas.openxmlformats.org/drawingml/2006/main" prst="rect">
-            <a:avLst/>
-          </a:prstGeom>
-          <a:noFill xmlns:a="http://schemas.openxmlformats.org/drawingml/2006/main"/>
-          <a:ln xmlns:a="http://schemas.openxmlformats.org/drawingml/2006/main" w="0">
-            <a:noFill/>
-            <a:prstDash val="solid"/>
-          </a:ln>
-        </p:spPr>
-        <p:txBody>
-          <a:bodyPr xmlns:a="http://schemas.openxmlformats.org/drawingml/2006/main"/>
-          <a:lstStyle xmlns:a="http://schemas.openxmlformats.org/drawingml/2006/main"/>
-          <a:p xmlns:a="http://schemas.openxmlformats.org/drawingml/2006/main">
-            <a:pPr>
-              <a:defRPr sz="1800" b="1">
-                <a:solidFill>
-                  <a:srgbClr val="DE1A4C"/>
-                </a:solidFill>
-              </a:defRPr>
-            </a:pPr>
-            <a:r>
-              <a:rPr sz="1800" b="1">
-                <a:solidFill>
-                  <a:srgbClr val="DE1A4C"/>
-                </a:solidFill>
-              </a:rPr>
-              <a:t>TrustTill bridges this gap by structuring evidence merchants already generate.</a:t>
-            </a:r>
-          </a:p>
-        </p:txBody>
-      </p:sp>
-      <p:sp>
-        <p:nvSpPr>
-          <p:cNvPr id="14" name="">
-            <a:extLst xmlns:a="http://schemas.openxmlformats.org/drawingml/2006/main">
-              <a:ext uri="{FF2B5EF4-FFF2-40B4-BE49-F238E27FC236}">
-                <a16:creationId xmlns:a16="http://schemas.microsoft.com/office/drawing/2014/main" id="{179CD71F-C97D-4EB8-8ABF-42ADA0001818}"/>
-              </a:ext>
-            </a:extLst>
-          </p:cNvPr>
-          <p:cNvSpPr>
-            <a:spLocks xmlns:a="http://schemas.openxmlformats.org/drawingml/2006/main" noGrp="1"/>
-          </p:cNvSpPr>
-          <p:nvPr/>
-        </p:nvSpPr>
-        <p:spPr>
-          <a:xfrm xmlns:a="http://schemas.openxmlformats.org/drawingml/2006/main">
-            <a:off x="400050" y="6362700"/>
-            <a:ext cx="5905500" cy="228600"/>
-          </a:xfrm>
-          <a:prstGeom xmlns:a="http://schemas.openxmlformats.org/drawingml/2006/main" prst="rect">
-            <a:avLst/>
-          </a:prstGeom>
-          <a:noFill xmlns:a="http://schemas.openxmlformats.org/drawingml/2006/main"/>
-          <a:ln xmlns:a="http://schemas.openxmlformats.org/drawingml/2006/main" w="0">
-            <a:noFill/>
-            <a:prstDash val="solid"/>
-          </a:ln>
-        </p:spPr>
-        <p:txBody>
-          <a:bodyPr xmlns:a="http://schemas.openxmlformats.org/drawingml/2006/main"/>
-          <a:lstStyle xmlns:a="http://schemas.openxmlformats.org/drawingml/2006/main"/>
-          <a:p xmlns:a="http://schemas.openxmlformats.org/drawingml/2006/main">
-            <a:pPr>
-              <a:defRPr sz="1050" b="1">
-                <a:solidFill>
-                  <a:srgbClr val="59666A"/>
-                </a:solidFill>
-              </a:defRPr>
-            </a:pPr>
-            <a:r>
-              <a:rPr sz="1050" b="1">
-                <a:solidFill>
-                  <a:srgbClr val="59666A"/>
-                </a:solidFill>
-              </a:rPr>
-              <a:t>TrustTill | Hackaholics 7.0 | Financial Inclusion</a:t>
-            </a:r>
-          </a:p>
-        </p:txBody>
-      </p:sp>
-      <p:sp>
-        <p:nvSpPr>
-          <p:cNvPr id="15" name="">
-            <a:extLst xmlns:a="http://schemas.openxmlformats.org/drawingml/2006/main">
-              <a:ext uri="{FF2B5EF4-FFF2-40B4-BE49-F238E27FC236}">
-                <a16:creationId xmlns:a16="http://schemas.microsoft.com/office/drawing/2014/main" id="{7C72ACFA-312F-4286-B9DC-94F04AAD4101}"/>
-              </a:ext>
-            </a:extLst>
-          </p:cNvPr>
-          <p:cNvSpPr>
-            <a:spLocks xmlns:a="http://schemas.openxmlformats.org/drawingml/2006/main" noGrp="1"/>
-          </p:cNvSpPr>
-          <p:nvPr/>
-        </p:nvSpPr>
-        <p:spPr>
-          <a:xfrm xmlns:a="http://schemas.openxmlformats.org/drawingml/2006/main">
-            <a:off x="11468100" y="6362700"/>
-            <a:ext cx="323850" cy="228600"/>
-          </a:xfrm>
-          <a:prstGeom xmlns:a="http://schemas.openxmlformats.org/drawingml/2006/main" prst="rect">
-            <a:avLst/>
-          </a:prstGeom>
-          <a:noFill xmlns:a="http://schemas.openxmlformats.org/drawingml/2006/main"/>
-          <a:ln xmlns:a="http://schemas.openxmlformats.org/drawingml/2006/main" w="0">
-            <a:noFill/>
-            <a:prstDash val="solid"/>
-          </a:ln>
-        </p:spPr>
-        <p:txBody>
-          <a:bodyPr xmlns:a="http://schemas.openxmlformats.org/drawingml/2006/main"/>
-          <a:lstStyle xmlns:a="http://schemas.openxmlformats.org/drawingml/2006/main"/>
-          <a:p xmlns:a="http://schemas.openxmlformats.org/drawingml/2006/main">
-            <a:pPr algn="r">
-              <a:defRPr sz="1050" b="1">
-                <a:solidFill>
-                  <a:srgbClr val="59666A"/>
-                </a:solidFill>
-              </a:defRPr>
-            </a:pPr>
-            <a:r>
-              <a:rPr sz="1050" b="1">
-                <a:solidFill>
-                  <a:srgbClr val="59666A"/>
-                </a:solidFill>
-              </a:rPr>
-              <a:t>2</a:t>
+              <a:defRPr sz="2250" b="1">
+                <a:solidFill>
+                  <a:srgbClr val="E4144F"/>
+                </a:solidFill>
+              </a:defRPr>
+            </a:pPr>
+            <a:r>
+              <a:rPr sz="2250" b="1">
+                <a:solidFill>
+                  <a:srgbClr val="E4144F"/>
+                </a:solidFill>
+              </a:rPr>
+              <a:t>TrustTill translates the first list into the second.</a:t>
             </a:r>
           </a:p>
         </p:txBody>
@@ -2972,7 +2921,7 @@
     </p:spTree>
     <p:extLst>
       <p:ext uri="{BB962C8B-B14F-4D97-AF65-F5344CB8AC3E}">
-        <p14:creationId xmlns:p14="http://schemas.microsoft.com/office/powerpoint/2010/main" val="1176199833"/>
+        <p14:creationId xmlns:p14="http://schemas.microsoft.com/office/powerpoint/2010/main" val="1551466634"/>
       </p:ext>
     </p:extLst>
   </p:cSld>
@@ -3003,19 +2952,19 @@
           <p:cNvPr id="1" name="">
             <a:extLst xmlns:a="http://schemas.openxmlformats.org/drawingml/2006/main">
               <a:ext uri="{FF2B5EF4-FFF2-40B4-BE49-F238E27FC236}">
-                <a16:creationId xmlns:a16="http://schemas.microsoft.com/office/drawing/2014/main" id="{BD0DD53D-F275-446B-B697-DF72383AEAD5}"/>
-              </a:ext>
-            </a:extLst>
-          </p:cNvPr>
-          <p:cNvSpPr>
-            <a:spLocks xmlns:a="http://schemas.openxmlformats.org/drawingml/2006/main" noGrp="1"/>
-          </p:cNvSpPr>
-          <p:nvPr/>
-        </p:nvSpPr>
-        <p:spPr>
-          <a:xfrm xmlns:a="http://schemas.openxmlformats.org/drawingml/2006/main">
-            <a:off x="533400" y="514350"/>
-            <a:ext cx="8001000" cy="895350"/>
+                <a16:creationId xmlns:a16="http://schemas.microsoft.com/office/drawing/2014/main" id="{0C7A7B4E-6674-4F6F-8355-10578768CDD0}"/>
+              </a:ext>
+            </a:extLst>
+          </p:cNvPr>
+          <p:cNvSpPr>
+            <a:spLocks xmlns:a="http://schemas.openxmlformats.org/drawingml/2006/main" noGrp="1"/>
+          </p:cNvSpPr>
+          <p:nvPr/>
+        </p:nvSpPr>
+        <p:spPr>
+          <a:xfrm xmlns:a="http://schemas.openxmlformats.org/drawingml/2006/main">
+            <a:off x="533400" y="457200"/>
+            <a:ext cx="10287000" cy="819150"/>
           </a:xfrm>
           <a:prstGeom xmlns:a="http://schemas.openxmlformats.org/drawingml/2006/main" prst="rect">
             <a:avLst/>
@@ -3043,7 +2992,7 @@
                   <a:srgbClr val="101820"/>
                 </a:solidFill>
               </a:rPr>
-              <a:t>The insight is simple: evidence already exists</a:t>
+              <a:t>The AI does extraction and explanation</a:t>
             </a:r>
           </a:p>
         </p:txBody>
@@ -3053,19 +3002,19 @@
           <p:cNvPr id="2" name="">
             <a:extLst xmlns:a="http://schemas.openxmlformats.org/drawingml/2006/main">
               <a:ext uri="{FF2B5EF4-FFF2-40B4-BE49-F238E27FC236}">
-                <a16:creationId xmlns:a16="http://schemas.microsoft.com/office/drawing/2014/main" id="{B854C97F-ECDD-4CB5-96B4-C5A47EB1483A}"/>
-              </a:ext>
-            </a:extLst>
-          </p:cNvPr>
-          <p:cNvSpPr>
-            <a:spLocks xmlns:a="http://schemas.openxmlformats.org/drawingml/2006/main" noGrp="1"/>
-          </p:cNvSpPr>
-          <p:nvPr/>
-        </p:nvSpPr>
-        <p:spPr>
-          <a:xfrm xmlns:a="http://schemas.openxmlformats.org/drawingml/2006/main">
-            <a:off x="552450" y="1352550"/>
-            <a:ext cx="6667500" cy="514350"/>
+                <a16:creationId xmlns:a16="http://schemas.microsoft.com/office/drawing/2014/main" id="{7F51464C-A8D5-4FE6-8A9F-77944DC3EB8F}"/>
+              </a:ext>
+            </a:extLst>
+          </p:cNvPr>
+          <p:cNvSpPr>
+            <a:spLocks xmlns:a="http://schemas.openxmlformats.org/drawingml/2006/main" noGrp="1"/>
+          </p:cNvSpPr>
+          <p:nvPr/>
+        </p:nvSpPr>
+        <p:spPr>
+          <a:xfrm xmlns:a="http://schemas.openxmlformats.org/drawingml/2006/main">
+            <a:off x="552450" y="1333500"/>
+            <a:ext cx="8763000" cy="400050"/>
           </a:xfrm>
           <a:prstGeom xmlns:a="http://schemas.openxmlformats.org/drawingml/2006/main" prst="rect">
             <a:avLst/>
@@ -3081,19 +3030,19 @@
           <a:lstStyle xmlns:a="http://schemas.openxmlformats.org/drawingml/2006/main"/>
           <a:p xmlns:a="http://schemas.openxmlformats.org/drawingml/2006/main">
             <a:pPr>
-              <a:defRPr sz="1650" b="0">
-                <a:solidFill>
-                  <a:srgbClr val="59666A"/>
-                </a:solidFill>
-              </a:defRPr>
-            </a:pPr>
-            <a:r>
-              <a:rPr sz="1650" b="0">
-                <a:solidFill>
-                  <a:srgbClr val="59666A"/>
-                </a:solidFill>
-              </a:rPr>
-              <a:t>TrustTill turns messy traces into a bank-readable merchant profile.</a:t>
+              <a:defRPr sz="1800" b="0">
+                <a:solidFill>
+                  <a:srgbClr val="536267"/>
+                </a:solidFill>
+              </a:defRPr>
+            </a:pPr>
+            <a:r>
+              <a:rPr sz="1800" b="0">
+                <a:solidFill>
+                  <a:srgbClr val="536267"/>
+                </a:solidFill>
+              </a:rPr>
+              <a:t>The verification stays transparent so a human reviewer can trust the output.</a:t>
             </a:r>
           </a:p>
         </p:txBody>
@@ -3103,19 +3052,19 @@
           <p:cNvPr id="3" name="">
             <a:extLst xmlns:a="http://schemas.openxmlformats.org/drawingml/2006/main">
               <a:ext uri="{FF2B5EF4-FFF2-40B4-BE49-F238E27FC236}">
-                <a16:creationId xmlns:a16="http://schemas.microsoft.com/office/drawing/2014/main" id="{F4105ABA-1A97-44CC-A5F7-48485C38BE9F}"/>
-              </a:ext>
-            </a:extLst>
-          </p:cNvPr>
-          <p:cNvSpPr>
-            <a:spLocks xmlns:a="http://schemas.openxmlformats.org/drawingml/2006/main" noGrp="1"/>
-          </p:cNvSpPr>
-          <p:nvPr/>
-        </p:nvSpPr>
-        <p:spPr>
-          <a:xfrm xmlns:a="http://schemas.openxmlformats.org/drawingml/2006/main">
-            <a:off x="533400" y="1943100"/>
-            <a:ext cx="10572750" cy="0"/>
+                <a16:creationId xmlns:a16="http://schemas.microsoft.com/office/drawing/2014/main" id="{9C18D574-F796-4F54-99CA-C920173E438B}"/>
+              </a:ext>
+            </a:extLst>
+          </p:cNvPr>
+          <p:cNvSpPr>
+            <a:spLocks xmlns:a="http://schemas.openxmlformats.org/drawingml/2006/main" noGrp="1"/>
+          </p:cNvSpPr>
+          <p:nvPr/>
+        </p:nvSpPr>
+        <p:spPr>
+          <a:xfrm xmlns:a="http://schemas.openxmlformats.org/drawingml/2006/main">
+            <a:off x="533400" y="2000250"/>
+            <a:ext cx="10591800" cy="0"/>
           </a:xfrm>
           <a:prstGeom xmlns:a="http://schemas.openxmlformats.org/drawingml/2006/main" prst="line">
             <a:avLst/>
@@ -3123,7 +3072,7 @@
           <a:noFill xmlns:a="http://schemas.openxmlformats.org/drawingml/2006/main"/>
           <a:ln xmlns:a="http://schemas.openxmlformats.org/drawingml/2006/main" w="13335">
             <a:solidFill>
-              <a:srgbClr val="C8D1D2"/>
+              <a:srgbClr val="D8DEDF"/>
             </a:solidFill>
             <a:prstDash val="solid"/>
           </a:ln>
@@ -3134,29 +3083,129 @@
           <p:cNvPr id="4" name="">
             <a:extLst xmlns:a="http://schemas.openxmlformats.org/drawingml/2006/main">
               <a:ext uri="{FF2B5EF4-FFF2-40B4-BE49-F238E27FC236}">
-                <a16:creationId xmlns:a16="http://schemas.microsoft.com/office/drawing/2014/main" id="{8DCDA8D7-D096-471F-9940-3D57F310C687}"/>
-              </a:ext>
-            </a:extLst>
-          </p:cNvPr>
-          <p:cNvSpPr>
-            <a:spLocks xmlns:a="http://schemas.openxmlformats.org/drawingml/2006/main" noGrp="1"/>
-          </p:cNvSpPr>
-          <p:nvPr/>
-        </p:nvSpPr>
-        <p:spPr>
-          <a:xfrm xmlns:a="http://schemas.openxmlformats.org/drawingml/2006/main">
-            <a:off x="685800" y="2667000"/>
-            <a:ext cx="2266950" cy="1714500"/>
+                <a16:creationId xmlns:a16="http://schemas.microsoft.com/office/drawing/2014/main" id="{F68775C0-376E-44EA-8A6B-C74039B60E41}"/>
+              </a:ext>
+            </a:extLst>
+          </p:cNvPr>
+          <p:cNvSpPr>
+            <a:spLocks xmlns:a="http://schemas.openxmlformats.org/drawingml/2006/main" noGrp="1"/>
+          </p:cNvSpPr>
+          <p:nvPr/>
+        </p:nvSpPr>
+        <p:spPr>
+          <a:xfrm xmlns:a="http://schemas.openxmlformats.org/drawingml/2006/main">
+            <a:off x="533400" y="6362700"/>
+            <a:ext cx="5334000" cy="228600"/>
+          </a:xfrm>
+          <a:prstGeom xmlns:a="http://schemas.openxmlformats.org/drawingml/2006/main" prst="rect">
+            <a:avLst/>
+          </a:prstGeom>
+          <a:noFill xmlns:a="http://schemas.openxmlformats.org/drawingml/2006/main"/>
+          <a:ln xmlns:a="http://schemas.openxmlformats.org/drawingml/2006/main" w="0">
+            <a:noFill/>
+            <a:prstDash val="solid"/>
+          </a:ln>
+        </p:spPr>
+        <p:txBody>
+          <a:bodyPr xmlns:a="http://schemas.openxmlformats.org/drawingml/2006/main"/>
+          <a:lstStyle xmlns:a="http://schemas.openxmlformats.org/drawingml/2006/main"/>
+          <a:p xmlns:a="http://schemas.openxmlformats.org/drawingml/2006/main">
+            <a:pPr>
+              <a:defRPr sz="1050" b="1">
+                <a:solidFill>
+                  <a:srgbClr val="536267"/>
+                </a:solidFill>
+              </a:defRPr>
+            </a:pPr>
+            <a:r>
+              <a:rPr sz="1050" b="1">
+                <a:solidFill>
+                  <a:srgbClr val="536267"/>
+                </a:solidFill>
+              </a:rPr>
+              <a:t>TrustTill | Hackaholics 7.0 | Financial Inclusion</a:t>
+            </a:r>
+          </a:p>
+        </p:txBody>
+      </p:sp>
+      <p:sp>
+        <p:nvSpPr>
+          <p:cNvPr id="5" name="">
+            <a:extLst xmlns:a="http://schemas.openxmlformats.org/drawingml/2006/main">
+              <a:ext uri="{FF2B5EF4-FFF2-40B4-BE49-F238E27FC236}">
+                <a16:creationId xmlns:a16="http://schemas.microsoft.com/office/drawing/2014/main" id="{6B7C062D-7C62-433C-B73E-CBB8FC85B37E}"/>
+              </a:ext>
+            </a:extLst>
+          </p:cNvPr>
+          <p:cNvSpPr>
+            <a:spLocks xmlns:a="http://schemas.openxmlformats.org/drawingml/2006/main" noGrp="1"/>
+          </p:cNvSpPr>
+          <p:nvPr/>
+        </p:nvSpPr>
+        <p:spPr>
+          <a:xfrm xmlns:a="http://schemas.openxmlformats.org/drawingml/2006/main">
+            <a:off x="11315700" y="6362700"/>
+            <a:ext cx="342900" cy="228600"/>
+          </a:xfrm>
+          <a:prstGeom xmlns:a="http://schemas.openxmlformats.org/drawingml/2006/main" prst="rect">
+            <a:avLst/>
+          </a:prstGeom>
+          <a:noFill xmlns:a="http://schemas.openxmlformats.org/drawingml/2006/main"/>
+          <a:ln xmlns:a="http://schemas.openxmlformats.org/drawingml/2006/main" w="0">
+            <a:noFill/>
+            <a:prstDash val="solid"/>
+          </a:ln>
+        </p:spPr>
+        <p:txBody>
+          <a:bodyPr xmlns:a="http://schemas.openxmlformats.org/drawingml/2006/main"/>
+          <a:lstStyle xmlns:a="http://schemas.openxmlformats.org/drawingml/2006/main"/>
+          <a:p xmlns:a="http://schemas.openxmlformats.org/drawingml/2006/main">
+            <a:pPr algn="r">
+              <a:defRPr sz="1050" b="1">
+                <a:solidFill>
+                  <a:srgbClr val="536267"/>
+                </a:solidFill>
+              </a:defRPr>
+            </a:pPr>
+            <a:r>
+              <a:rPr sz="1050" b="1">
+                <a:solidFill>
+                  <a:srgbClr val="536267"/>
+                </a:solidFill>
+              </a:rPr>
+              <a:t>3</a:t>
+            </a:r>
+          </a:p>
+        </p:txBody>
+      </p:sp>
+      <p:sp>
+        <p:nvSpPr>
+          <p:cNvPr id="6" name="">
+            <a:extLst xmlns:a="http://schemas.openxmlformats.org/drawingml/2006/main">
+              <a:ext uri="{FF2B5EF4-FFF2-40B4-BE49-F238E27FC236}">
+                <a16:creationId xmlns:a16="http://schemas.microsoft.com/office/drawing/2014/main" id="{707A6F1D-F754-415E-AC73-91CB43A0F507}"/>
+              </a:ext>
+            </a:extLst>
+          </p:cNvPr>
+          <p:cNvSpPr>
+            <a:spLocks xmlns:a="http://schemas.openxmlformats.org/drawingml/2006/main" noGrp="1"/>
+          </p:cNvSpPr>
+          <p:nvPr/>
+        </p:nvSpPr>
+        <p:spPr>
+          <a:xfrm xmlns:a="http://schemas.openxmlformats.org/drawingml/2006/main">
+            <a:off x="685800" y="2590800"/>
+            <a:ext cx="2381250" cy="2095500"/>
           </a:xfrm>
           <a:prstGeom xmlns:a="http://schemas.openxmlformats.org/drawingml/2006/main" prst="rect">
             <a:avLst/>
           </a:prstGeom>
           <a:solidFill xmlns:a="http://schemas.openxmlformats.org/drawingml/2006/main">
-            <a:srgbClr val="F8F3EA"/>
+            <a:srgbClr val="F4F7F6"/>
           </a:solidFill>
           <a:ln xmlns:a="http://schemas.openxmlformats.org/drawingml/2006/main" w="9525">
             <a:solidFill>
-              <a:srgbClr val="C8D1D2"/>
+              <a:srgbClr val="D8DEDF"/>
             </a:solidFill>
             <a:prstDash val="solid"/>
           </a:ln>
@@ -3164,22 +3213,72 @@
       </p:sp>
       <p:sp>
         <p:nvSpPr>
-          <p:cNvPr id="5" name="">
-            <a:extLst xmlns:a="http://schemas.openxmlformats.org/drawingml/2006/main">
-              <a:ext uri="{FF2B5EF4-FFF2-40B4-BE49-F238E27FC236}">
-                <a16:creationId xmlns:a16="http://schemas.microsoft.com/office/drawing/2014/main" id="{FA4146B3-B599-461D-92FC-3DF7DF000B01}"/>
-              </a:ext>
-            </a:extLst>
-          </p:cNvPr>
-          <p:cNvSpPr>
-            <a:spLocks xmlns:a="http://schemas.openxmlformats.org/drawingml/2006/main" noGrp="1"/>
-          </p:cNvSpPr>
-          <p:nvPr/>
-        </p:nvSpPr>
-        <p:spPr>
-          <a:xfrm xmlns:a="http://schemas.openxmlformats.org/drawingml/2006/main">
-            <a:off x="876300" y="2857500"/>
-            <a:ext cx="552450" cy="323850"/>
+          <p:cNvPr id="7" name="">
+            <a:extLst xmlns:a="http://schemas.openxmlformats.org/drawingml/2006/main">
+              <a:ext uri="{FF2B5EF4-FFF2-40B4-BE49-F238E27FC236}">
+                <a16:creationId xmlns:a16="http://schemas.microsoft.com/office/drawing/2014/main" id="{AF5DB4C4-9FC1-4B1D-9EE0-389014AB70A5}"/>
+              </a:ext>
+            </a:extLst>
+          </p:cNvPr>
+          <p:cNvSpPr>
+            <a:spLocks xmlns:a="http://schemas.openxmlformats.org/drawingml/2006/main" noGrp="1"/>
+          </p:cNvSpPr>
+          <p:nvPr/>
+        </p:nvSpPr>
+        <p:spPr>
+          <a:xfrm xmlns:a="http://schemas.openxmlformats.org/drawingml/2006/main">
+            <a:off x="895350" y="2800350"/>
+            <a:ext cx="514350" cy="323850"/>
+          </a:xfrm>
+          <a:prstGeom xmlns:a="http://schemas.openxmlformats.org/drawingml/2006/main" prst="rect">
+            <a:avLst/>
+          </a:prstGeom>
+          <a:noFill xmlns:a="http://schemas.openxmlformats.org/drawingml/2006/main"/>
+          <a:ln xmlns:a="http://schemas.openxmlformats.org/drawingml/2006/main" w="0">
+            <a:noFill/>
+            <a:prstDash val="solid"/>
+          </a:ln>
+        </p:spPr>
+        <p:txBody>
+          <a:bodyPr xmlns:a="http://schemas.openxmlformats.org/drawingml/2006/main"/>
+          <a:lstStyle xmlns:a="http://schemas.openxmlformats.org/drawingml/2006/main"/>
+          <a:p xmlns:a="http://schemas.openxmlformats.org/drawingml/2006/main">
+            <a:pPr>
+              <a:defRPr sz="2100" b="1">
+                <a:solidFill>
+                  <a:srgbClr val="E4144F"/>
+                </a:solidFill>
+              </a:defRPr>
+            </a:pPr>
+            <a:r>
+              <a:rPr sz="2100" b="1">
+                <a:solidFill>
+                  <a:srgbClr val="E4144F"/>
+                </a:solidFill>
+              </a:rPr>
+              <a:t>01</a:t>
+            </a:r>
+          </a:p>
+        </p:txBody>
+      </p:sp>
+      <p:sp>
+        <p:nvSpPr>
+          <p:cNvPr id="8" name="">
+            <a:extLst xmlns:a="http://schemas.openxmlformats.org/drawingml/2006/main">
+              <a:ext uri="{FF2B5EF4-FFF2-40B4-BE49-F238E27FC236}">
+                <a16:creationId xmlns:a16="http://schemas.microsoft.com/office/drawing/2014/main" id="{DEC4F940-AE64-4635-BD3B-5A3ABD6A09AC}"/>
+              </a:ext>
+            </a:extLst>
+          </p:cNvPr>
+          <p:cNvSpPr>
+            <a:spLocks xmlns:a="http://schemas.openxmlformats.org/drawingml/2006/main" noGrp="1"/>
+          </p:cNvSpPr>
+          <p:nvPr/>
+        </p:nvSpPr>
+        <p:spPr>
+          <a:xfrm xmlns:a="http://schemas.openxmlformats.org/drawingml/2006/main">
+            <a:off x="1504950" y="2819400"/>
+            <a:ext cx="1257300" cy="323850"/>
           </a:xfrm>
           <a:prstGeom xmlns:a="http://schemas.openxmlformats.org/drawingml/2006/main" prst="rect">
             <a:avLst/>
@@ -3197,89 +3296,39 @@
             <a:pPr>
               <a:defRPr sz="1800" b="1">
                 <a:solidFill>
-                  <a:srgbClr val="DE1A4C"/>
+                  <a:srgbClr val="003D48"/>
                 </a:solidFill>
               </a:defRPr>
             </a:pPr>
             <a:r>
               <a:rPr sz="1800" b="1">
                 <a:solidFill>
-                  <a:srgbClr val="DE1A4C"/>
-                </a:solidFill>
-              </a:rPr>
-              <a:t>01</a:t>
-            </a:r>
-          </a:p>
-        </p:txBody>
-      </p:sp>
-      <p:sp>
-        <p:nvSpPr>
-          <p:cNvPr id="6" name="">
-            <a:extLst xmlns:a="http://schemas.openxmlformats.org/drawingml/2006/main">
-              <a:ext uri="{FF2B5EF4-FFF2-40B4-BE49-F238E27FC236}">
-                <a16:creationId xmlns:a16="http://schemas.microsoft.com/office/drawing/2014/main" id="{9BCE9316-4F49-4B1C-BDAC-6FCC8D6AAE48}"/>
-              </a:ext>
-            </a:extLst>
-          </p:cNvPr>
-          <p:cNvSpPr>
-            <a:spLocks xmlns:a="http://schemas.openxmlformats.org/drawingml/2006/main" noGrp="1"/>
-          </p:cNvSpPr>
-          <p:nvPr/>
-        </p:nvSpPr>
-        <p:spPr>
-          <a:xfrm xmlns:a="http://schemas.openxmlformats.org/drawingml/2006/main">
-            <a:off x="876300" y="3257550"/>
-            <a:ext cx="1762125" cy="400050"/>
-          </a:xfrm>
-          <a:prstGeom xmlns:a="http://schemas.openxmlformats.org/drawingml/2006/main" prst="rect">
-            <a:avLst/>
-          </a:prstGeom>
-          <a:noFill xmlns:a="http://schemas.openxmlformats.org/drawingml/2006/main"/>
-          <a:ln xmlns:a="http://schemas.openxmlformats.org/drawingml/2006/main" w="0">
-            <a:noFill/>
-            <a:prstDash val="solid"/>
-          </a:ln>
-        </p:spPr>
-        <p:txBody>
-          <a:bodyPr xmlns:a="http://schemas.openxmlformats.org/drawingml/2006/main"/>
-          <a:lstStyle xmlns:a="http://schemas.openxmlformats.org/drawingml/2006/main"/>
-          <a:p xmlns:a="http://schemas.openxmlformats.org/drawingml/2006/main">
-            <a:pPr>
-              <a:defRPr sz="1800" b="1">
-                <a:solidFill>
-                  <a:srgbClr val="101820"/>
-                </a:solidFill>
-              </a:defRPr>
-            </a:pPr>
-            <a:r>
-              <a:rPr sz="1800" b="1">
-                <a:solidFill>
-                  <a:srgbClr val="101820"/>
-                </a:solidFill>
-              </a:rPr>
-              <a:t>Payment alert</a:t>
-            </a:r>
-          </a:p>
-        </p:txBody>
-      </p:sp>
-      <p:sp>
-        <p:nvSpPr>
-          <p:cNvPr id="7" name="">
-            <a:extLst xmlns:a="http://schemas.openxmlformats.org/drawingml/2006/main">
-              <a:ext uri="{FF2B5EF4-FFF2-40B4-BE49-F238E27FC236}">
-                <a16:creationId xmlns:a16="http://schemas.microsoft.com/office/drawing/2014/main" id="{4C36C23F-1D73-472C-B7B5-C359E94DC5F7}"/>
-              </a:ext>
-            </a:extLst>
-          </p:cNvPr>
-          <p:cNvSpPr>
-            <a:spLocks xmlns:a="http://schemas.openxmlformats.org/drawingml/2006/main" noGrp="1"/>
-          </p:cNvSpPr>
-          <p:nvPr/>
-        </p:nvSpPr>
-        <p:spPr>
-          <a:xfrm xmlns:a="http://schemas.openxmlformats.org/drawingml/2006/main">
-            <a:off x="876300" y="3848100"/>
-            <a:ext cx="1809750" cy="457200"/>
+                  <a:srgbClr val="003D48"/>
+                </a:solidFill>
+              </a:rPr>
+              <a:t>Extract</a:t>
+            </a:r>
+          </a:p>
+        </p:txBody>
+      </p:sp>
+      <p:sp>
+        <p:nvSpPr>
+          <p:cNvPr id="9" name="">
+            <a:extLst xmlns:a="http://schemas.openxmlformats.org/drawingml/2006/main">
+              <a:ext uri="{FF2B5EF4-FFF2-40B4-BE49-F238E27FC236}">
+                <a16:creationId xmlns:a16="http://schemas.microsoft.com/office/drawing/2014/main" id="{37F350F9-C1AE-4741-B2E3-17A3580B39BB}"/>
+              </a:ext>
+            </a:extLst>
+          </p:cNvPr>
+          <p:cNvSpPr>
+            <a:spLocks xmlns:a="http://schemas.openxmlformats.org/drawingml/2006/main" noGrp="1"/>
+          </p:cNvSpPr>
+          <p:nvPr/>
+        </p:nvSpPr>
+        <p:spPr>
+          <a:xfrm xmlns:a="http://schemas.openxmlformats.org/drawingml/2006/main">
+            <a:off x="1504950" y="3333750"/>
+            <a:ext cx="1257300" cy="990600"/>
           </a:xfrm>
           <a:prstGeom xmlns:a="http://schemas.openxmlformats.org/drawingml/2006/main" prst="rect">
             <a:avLst/>
@@ -3297,80 +3346,49 @@
             <a:pPr>
               <a:defRPr sz="1350" b="0">
                 <a:solidFill>
-                  <a:srgbClr val="59666A"/>
+                  <a:srgbClr val="101820"/>
                 </a:solidFill>
               </a:defRPr>
             </a:pPr>
             <a:r>
               <a:rPr sz="1350" b="0">
                 <a:solidFill>
-                  <a:srgbClr val="59666A"/>
-                </a:solidFill>
-              </a:rPr>
-              <a:t>CR 12,500 from ADEWALE SUNDAY</a:t>
-            </a:r>
-          </a:p>
-        </p:txBody>
-      </p:sp>
-      <p:sp>
-        <p:nvSpPr>
-          <p:cNvPr id="8" name="">
-            <a:extLst xmlns:a="http://schemas.openxmlformats.org/drawingml/2006/main">
-              <a:ext uri="{FF2B5EF4-FFF2-40B4-BE49-F238E27FC236}">
-                <a16:creationId xmlns:a16="http://schemas.microsoft.com/office/drawing/2014/main" id="{08C6B4D1-0F2A-48BE-9119-5307E75B3265}"/>
-              </a:ext>
-            </a:extLst>
-          </p:cNvPr>
-          <p:cNvSpPr>
-            <a:spLocks xmlns:a="http://schemas.openxmlformats.org/drawingml/2006/main" noGrp="1"/>
-          </p:cNvSpPr>
-          <p:nvPr/>
-        </p:nvSpPr>
-        <p:spPr>
-          <a:xfrm xmlns:a="http://schemas.openxmlformats.org/drawingml/2006/main">
-            <a:off x="3028950" y="3524250"/>
-            <a:ext cx="285750" cy="0"/>
-          </a:xfrm>
-          <a:prstGeom xmlns:a="http://schemas.openxmlformats.org/drawingml/2006/main" prst="line">
-            <a:avLst/>
-          </a:prstGeom>
-          <a:noFill xmlns:a="http://schemas.openxmlformats.org/drawingml/2006/main"/>
-          <a:ln xmlns:a="http://schemas.openxmlformats.org/drawingml/2006/main" w="13335">
-            <a:solidFill>
-              <a:srgbClr val="003D48"/>
-            </a:solidFill>
-            <a:prstDash val="solid"/>
-          </a:ln>
-        </p:spPr>
-      </p:sp>
-      <p:sp>
-        <p:nvSpPr>
-          <p:cNvPr id="9" name="">
-            <a:extLst xmlns:a="http://schemas.openxmlformats.org/drawingml/2006/main">
-              <a:ext uri="{FF2B5EF4-FFF2-40B4-BE49-F238E27FC236}">
-                <a16:creationId xmlns:a16="http://schemas.microsoft.com/office/drawing/2014/main" id="{6A544676-2A60-4C16-8DE8-81335E1962E7}"/>
-              </a:ext>
-            </a:extLst>
-          </p:cNvPr>
-          <p:cNvSpPr>
-            <a:spLocks xmlns:a="http://schemas.openxmlformats.org/drawingml/2006/main" noGrp="1"/>
-          </p:cNvSpPr>
-          <p:nvPr/>
-        </p:nvSpPr>
-        <p:spPr>
-          <a:xfrm xmlns:a="http://schemas.openxmlformats.org/drawingml/2006/main">
-            <a:off x="3409950" y="2667000"/>
-            <a:ext cx="2266950" cy="1714500"/>
+                  <a:srgbClr val="101820"/>
+                </a:solidFill>
+              </a:rPr>
+              <a:t>Amount, date, customer, channel, memo.</a:t>
+            </a:r>
+          </a:p>
+        </p:txBody>
+      </p:sp>
+      <p:sp>
+        <p:nvSpPr>
+          <p:cNvPr id="10" name="">
+            <a:extLst xmlns:a="http://schemas.openxmlformats.org/drawingml/2006/main">
+              <a:ext uri="{FF2B5EF4-FFF2-40B4-BE49-F238E27FC236}">
+                <a16:creationId xmlns:a16="http://schemas.microsoft.com/office/drawing/2014/main" id="{7C52988C-709E-4F1E-97FE-76AD85027E68}"/>
+              </a:ext>
+            </a:extLst>
+          </p:cNvPr>
+          <p:cNvSpPr>
+            <a:spLocks xmlns:a="http://schemas.openxmlformats.org/drawingml/2006/main" noGrp="1"/>
+          </p:cNvSpPr>
+          <p:nvPr/>
+        </p:nvSpPr>
+        <p:spPr>
+          <a:xfrm xmlns:a="http://schemas.openxmlformats.org/drawingml/2006/main">
+            <a:off x="3467100" y="2590800"/>
+            <a:ext cx="2381250" cy="2095500"/>
           </a:xfrm>
           <a:prstGeom xmlns:a="http://schemas.openxmlformats.org/drawingml/2006/main" prst="rect">
             <a:avLst/>
           </a:prstGeom>
           <a:solidFill xmlns:a="http://schemas.openxmlformats.org/drawingml/2006/main">
-            <a:srgbClr val="F2F5F4"/>
+            <a:srgbClr val="FBF5EA"/>
           </a:solidFill>
           <a:ln xmlns:a="http://schemas.openxmlformats.org/drawingml/2006/main" w="9525">
             <a:solidFill>
-              <a:srgbClr val="C8D1D2"/>
+              <a:srgbClr val="D8DEDF"/>
             </a:solidFill>
             <a:prstDash val="solid"/>
           </a:ln>
@@ -3378,22 +3396,72 @@
       </p:sp>
       <p:sp>
         <p:nvSpPr>
-          <p:cNvPr id="10" name="">
-            <a:extLst xmlns:a="http://schemas.openxmlformats.org/drawingml/2006/main">
-              <a:ext uri="{FF2B5EF4-FFF2-40B4-BE49-F238E27FC236}">
-                <a16:creationId xmlns:a16="http://schemas.microsoft.com/office/drawing/2014/main" id="{86B6C938-7F0C-40F4-B9BB-14B799434319}"/>
-              </a:ext>
-            </a:extLst>
-          </p:cNvPr>
-          <p:cNvSpPr>
-            <a:spLocks xmlns:a="http://schemas.openxmlformats.org/drawingml/2006/main" noGrp="1"/>
-          </p:cNvSpPr>
-          <p:nvPr/>
-        </p:nvSpPr>
-        <p:spPr>
-          <a:xfrm xmlns:a="http://schemas.openxmlformats.org/drawingml/2006/main">
-            <a:off x="3600450" y="2857500"/>
-            <a:ext cx="552450" cy="323850"/>
+          <p:cNvPr id="11" name="">
+            <a:extLst xmlns:a="http://schemas.openxmlformats.org/drawingml/2006/main">
+              <a:ext uri="{FF2B5EF4-FFF2-40B4-BE49-F238E27FC236}">
+                <a16:creationId xmlns:a16="http://schemas.microsoft.com/office/drawing/2014/main" id="{0B834993-F0EC-4F46-93CA-F01AEFB62942}"/>
+              </a:ext>
+            </a:extLst>
+          </p:cNvPr>
+          <p:cNvSpPr>
+            <a:spLocks xmlns:a="http://schemas.openxmlformats.org/drawingml/2006/main" noGrp="1"/>
+          </p:cNvSpPr>
+          <p:nvPr/>
+        </p:nvSpPr>
+        <p:spPr>
+          <a:xfrm xmlns:a="http://schemas.openxmlformats.org/drawingml/2006/main">
+            <a:off x="3676650" y="2800350"/>
+            <a:ext cx="514350" cy="323850"/>
+          </a:xfrm>
+          <a:prstGeom xmlns:a="http://schemas.openxmlformats.org/drawingml/2006/main" prst="rect">
+            <a:avLst/>
+          </a:prstGeom>
+          <a:noFill xmlns:a="http://schemas.openxmlformats.org/drawingml/2006/main"/>
+          <a:ln xmlns:a="http://schemas.openxmlformats.org/drawingml/2006/main" w="0">
+            <a:noFill/>
+            <a:prstDash val="solid"/>
+          </a:ln>
+        </p:spPr>
+        <p:txBody>
+          <a:bodyPr xmlns:a="http://schemas.openxmlformats.org/drawingml/2006/main"/>
+          <a:lstStyle xmlns:a="http://schemas.openxmlformats.org/drawingml/2006/main"/>
+          <a:p xmlns:a="http://schemas.openxmlformats.org/drawingml/2006/main">
+            <a:pPr>
+              <a:defRPr sz="2100" b="1">
+                <a:solidFill>
+                  <a:srgbClr val="E4144F"/>
+                </a:solidFill>
+              </a:defRPr>
+            </a:pPr>
+            <a:r>
+              <a:rPr sz="2100" b="1">
+                <a:solidFill>
+                  <a:srgbClr val="E4144F"/>
+                </a:solidFill>
+              </a:rPr>
+              <a:t>02</a:t>
+            </a:r>
+          </a:p>
+        </p:txBody>
+      </p:sp>
+      <p:sp>
+        <p:nvSpPr>
+          <p:cNvPr id="12" name="">
+            <a:extLst xmlns:a="http://schemas.openxmlformats.org/drawingml/2006/main">
+              <a:ext uri="{FF2B5EF4-FFF2-40B4-BE49-F238E27FC236}">
+                <a16:creationId xmlns:a16="http://schemas.microsoft.com/office/drawing/2014/main" id="{106CCE93-156C-492B-A4DC-2EC4BF61E2F2}"/>
+              </a:ext>
+            </a:extLst>
+          </p:cNvPr>
+          <p:cNvSpPr>
+            <a:spLocks xmlns:a="http://schemas.openxmlformats.org/drawingml/2006/main" noGrp="1"/>
+          </p:cNvSpPr>
+          <p:nvPr/>
+        </p:nvSpPr>
+        <p:spPr>
+          <a:xfrm xmlns:a="http://schemas.openxmlformats.org/drawingml/2006/main">
+            <a:off x="4286250" y="2819400"/>
+            <a:ext cx="1257300" cy="323850"/>
           </a:xfrm>
           <a:prstGeom xmlns:a="http://schemas.openxmlformats.org/drawingml/2006/main" prst="rect">
             <a:avLst/>
@@ -3411,89 +3479,39 @@
             <a:pPr>
               <a:defRPr sz="1800" b="1">
                 <a:solidFill>
-                  <a:srgbClr val="DE1A4C"/>
+                  <a:srgbClr val="003D48"/>
                 </a:solidFill>
               </a:defRPr>
             </a:pPr>
             <a:r>
               <a:rPr sz="1800" b="1">
                 <a:solidFill>
-                  <a:srgbClr val="DE1A4C"/>
-                </a:solidFill>
-              </a:rPr>
-              <a:t>02</a:t>
-            </a:r>
-          </a:p>
-        </p:txBody>
-      </p:sp>
-      <p:sp>
-        <p:nvSpPr>
-          <p:cNvPr id="11" name="">
-            <a:extLst xmlns:a="http://schemas.openxmlformats.org/drawingml/2006/main">
-              <a:ext uri="{FF2B5EF4-FFF2-40B4-BE49-F238E27FC236}">
-                <a16:creationId xmlns:a16="http://schemas.microsoft.com/office/drawing/2014/main" id="{48C5F838-DE7E-412E-9A2D-AF2BD51F9B43}"/>
-              </a:ext>
-            </a:extLst>
-          </p:cNvPr>
-          <p:cNvSpPr>
-            <a:spLocks xmlns:a="http://schemas.openxmlformats.org/drawingml/2006/main" noGrp="1"/>
-          </p:cNvSpPr>
-          <p:nvPr/>
-        </p:nvSpPr>
-        <p:spPr>
-          <a:xfrm xmlns:a="http://schemas.openxmlformats.org/drawingml/2006/main">
-            <a:off x="3600450" y="3257550"/>
-            <a:ext cx="1762125" cy="400050"/>
-          </a:xfrm>
-          <a:prstGeom xmlns:a="http://schemas.openxmlformats.org/drawingml/2006/main" prst="rect">
-            <a:avLst/>
-          </a:prstGeom>
-          <a:noFill xmlns:a="http://schemas.openxmlformats.org/drawingml/2006/main"/>
-          <a:ln xmlns:a="http://schemas.openxmlformats.org/drawingml/2006/main" w="0">
-            <a:noFill/>
-            <a:prstDash val="solid"/>
-          </a:ln>
-        </p:spPr>
-        <p:txBody>
-          <a:bodyPr xmlns:a="http://schemas.openxmlformats.org/drawingml/2006/main"/>
-          <a:lstStyle xmlns:a="http://schemas.openxmlformats.org/drawingml/2006/main"/>
-          <a:p xmlns:a="http://schemas.openxmlformats.org/drawingml/2006/main">
-            <a:pPr>
-              <a:defRPr sz="1800" b="1">
-                <a:solidFill>
-                  <a:srgbClr val="101820"/>
-                </a:solidFill>
-              </a:defRPr>
-            </a:pPr>
-            <a:r>
-              <a:rPr sz="1800" b="1">
-                <a:solidFill>
-                  <a:srgbClr val="101820"/>
-                </a:solidFill>
-              </a:rPr>
-              <a:t>Structured record</a:t>
-            </a:r>
-          </a:p>
-        </p:txBody>
-      </p:sp>
-      <p:sp>
-        <p:nvSpPr>
-          <p:cNvPr id="12" name="">
-            <a:extLst xmlns:a="http://schemas.openxmlformats.org/drawingml/2006/main">
-              <a:ext uri="{FF2B5EF4-FFF2-40B4-BE49-F238E27FC236}">
-                <a16:creationId xmlns:a16="http://schemas.microsoft.com/office/drawing/2014/main" id="{1D6A0174-0E56-485C-BC61-7916E55ADE33}"/>
-              </a:ext>
-            </a:extLst>
-          </p:cNvPr>
-          <p:cNvSpPr>
-            <a:spLocks xmlns:a="http://schemas.openxmlformats.org/drawingml/2006/main" noGrp="1"/>
-          </p:cNvSpPr>
-          <p:nvPr/>
-        </p:nvSpPr>
-        <p:spPr>
-          <a:xfrm xmlns:a="http://schemas.openxmlformats.org/drawingml/2006/main">
-            <a:off x="3600450" y="3848100"/>
-            <a:ext cx="1809750" cy="457200"/>
+                  <a:srgbClr val="003D48"/>
+                </a:solidFill>
+              </a:rPr>
+              <a:t>Link</a:t>
+            </a:r>
+          </a:p>
+        </p:txBody>
+      </p:sp>
+      <p:sp>
+        <p:nvSpPr>
+          <p:cNvPr id="13" name="">
+            <a:extLst xmlns:a="http://schemas.openxmlformats.org/drawingml/2006/main">
+              <a:ext uri="{FF2B5EF4-FFF2-40B4-BE49-F238E27FC236}">
+                <a16:creationId xmlns:a16="http://schemas.microsoft.com/office/drawing/2014/main" id="{662A4343-8443-40B4-86F2-8B11DBCEA1B7}"/>
+              </a:ext>
+            </a:extLst>
+          </p:cNvPr>
+          <p:cNvSpPr>
+            <a:spLocks xmlns:a="http://schemas.openxmlformats.org/drawingml/2006/main" noGrp="1"/>
+          </p:cNvSpPr>
+          <p:nvPr/>
+        </p:nvSpPr>
+        <p:spPr>
+          <a:xfrm xmlns:a="http://schemas.openxmlformats.org/drawingml/2006/main">
+            <a:off x="4286250" y="3333750"/>
+            <a:ext cx="1257300" cy="990600"/>
           </a:xfrm>
           <a:prstGeom xmlns:a="http://schemas.openxmlformats.org/drawingml/2006/main" prst="rect">
             <a:avLst/>
@@ -3511,80 +3529,49 @@
             <a:pPr>
               <a:defRPr sz="1350" b="0">
                 <a:solidFill>
-                  <a:srgbClr val="59666A"/>
+                  <a:srgbClr val="101820"/>
                 </a:solidFill>
               </a:defRPr>
             </a:pPr>
             <a:r>
               <a:rPr sz="1350" b="0">
                 <a:solidFill>
-                  <a:srgbClr val="59666A"/>
-                </a:solidFill>
-              </a:rPr>
-              <a:t>amount, customer, memo, source</a:t>
-            </a:r>
-          </a:p>
-        </p:txBody>
-      </p:sp>
-      <p:sp>
-        <p:nvSpPr>
-          <p:cNvPr id="13" name="">
-            <a:extLst xmlns:a="http://schemas.openxmlformats.org/drawingml/2006/main">
-              <a:ext uri="{FF2B5EF4-FFF2-40B4-BE49-F238E27FC236}">
-                <a16:creationId xmlns:a16="http://schemas.microsoft.com/office/drawing/2014/main" id="{98CB2E33-295E-4F2C-BFC9-8E00789F79BE}"/>
-              </a:ext>
-            </a:extLst>
-          </p:cNvPr>
-          <p:cNvSpPr>
-            <a:spLocks xmlns:a="http://schemas.openxmlformats.org/drawingml/2006/main" noGrp="1"/>
-          </p:cNvSpPr>
-          <p:nvPr/>
-        </p:nvSpPr>
-        <p:spPr>
-          <a:xfrm xmlns:a="http://schemas.openxmlformats.org/drawingml/2006/main">
-            <a:off x="5753100" y="3524250"/>
-            <a:ext cx="285750" cy="0"/>
-          </a:xfrm>
-          <a:prstGeom xmlns:a="http://schemas.openxmlformats.org/drawingml/2006/main" prst="line">
-            <a:avLst/>
-          </a:prstGeom>
-          <a:noFill xmlns:a="http://schemas.openxmlformats.org/drawingml/2006/main"/>
-          <a:ln xmlns:a="http://schemas.openxmlformats.org/drawingml/2006/main" w="13335">
-            <a:solidFill>
-              <a:srgbClr val="003D48"/>
-            </a:solidFill>
-            <a:prstDash val="solid"/>
-          </a:ln>
-        </p:spPr>
+                  <a:srgbClr val="101820"/>
+                </a:solidFill>
+              </a:rPr>
+              <a:t>Match sales to receipts, deposits, and notes.</a:t>
+            </a:r>
+          </a:p>
+        </p:txBody>
       </p:sp>
       <p:sp>
         <p:nvSpPr>
           <p:cNvPr id="14" name="">
             <a:extLst xmlns:a="http://schemas.openxmlformats.org/drawingml/2006/main">
               <a:ext uri="{FF2B5EF4-FFF2-40B4-BE49-F238E27FC236}">
-                <a16:creationId xmlns:a16="http://schemas.microsoft.com/office/drawing/2014/main" id="{A2DED8A6-0914-41E3-8583-828308A81F68}"/>
-              </a:ext>
-            </a:extLst>
-          </p:cNvPr>
-          <p:cNvSpPr>
-            <a:spLocks xmlns:a="http://schemas.openxmlformats.org/drawingml/2006/main" noGrp="1"/>
-          </p:cNvSpPr>
-          <p:nvPr/>
-        </p:nvSpPr>
-        <p:spPr>
-          <a:xfrm xmlns:a="http://schemas.openxmlformats.org/drawingml/2006/main">
-            <a:off x="6134100" y="2667000"/>
-            <a:ext cx="2266950" cy="1714500"/>
+                <a16:creationId xmlns:a16="http://schemas.microsoft.com/office/drawing/2014/main" id="{2FCC7986-916F-4043-AAAB-B718630B320A}"/>
+              </a:ext>
+            </a:extLst>
+          </p:cNvPr>
+          <p:cNvSpPr>
+            <a:spLocks xmlns:a="http://schemas.openxmlformats.org/drawingml/2006/main" noGrp="1"/>
+          </p:cNvSpPr>
+          <p:nvPr/>
+        </p:nvSpPr>
+        <p:spPr>
+          <a:xfrm xmlns:a="http://schemas.openxmlformats.org/drawingml/2006/main">
+            <a:off x="6248400" y="2590800"/>
+            <a:ext cx="2381250" cy="2095500"/>
           </a:xfrm>
           <a:prstGeom xmlns:a="http://schemas.openxmlformats.org/drawingml/2006/main" prst="rect">
             <a:avLst/>
           </a:prstGeom>
           <a:solidFill xmlns:a="http://schemas.openxmlformats.org/drawingml/2006/main">
-            <a:srgbClr val="F2F5F4"/>
+            <a:srgbClr val="F4F7F6"/>
           </a:solidFill>
           <a:ln xmlns:a="http://schemas.openxmlformats.org/drawingml/2006/main" w="9525">
             <a:solidFill>
-              <a:srgbClr val="C8D1D2"/>
+              <a:srgbClr val="D8DEDF"/>
             </a:solidFill>
             <a:prstDash val="solid"/>
           </a:ln>
@@ -3595,19 +3582,69 @@
           <p:cNvPr id="15" name="">
             <a:extLst xmlns:a="http://schemas.openxmlformats.org/drawingml/2006/main">
               <a:ext uri="{FF2B5EF4-FFF2-40B4-BE49-F238E27FC236}">
-                <a16:creationId xmlns:a16="http://schemas.microsoft.com/office/drawing/2014/main" id="{1E40F3DD-4432-4EC2-817B-0932CD00AD2B}"/>
-              </a:ext>
-            </a:extLst>
-          </p:cNvPr>
-          <p:cNvSpPr>
-            <a:spLocks xmlns:a="http://schemas.openxmlformats.org/drawingml/2006/main" noGrp="1"/>
-          </p:cNvSpPr>
-          <p:nvPr/>
-        </p:nvSpPr>
-        <p:spPr>
-          <a:xfrm xmlns:a="http://schemas.openxmlformats.org/drawingml/2006/main">
-            <a:off x="6324600" y="2857500"/>
-            <a:ext cx="552450" cy="323850"/>
+                <a16:creationId xmlns:a16="http://schemas.microsoft.com/office/drawing/2014/main" id="{B7B8C80E-74D0-431F-8318-02ED08DE4A49}"/>
+              </a:ext>
+            </a:extLst>
+          </p:cNvPr>
+          <p:cNvSpPr>
+            <a:spLocks xmlns:a="http://schemas.openxmlformats.org/drawingml/2006/main" noGrp="1"/>
+          </p:cNvSpPr>
+          <p:nvPr/>
+        </p:nvSpPr>
+        <p:spPr>
+          <a:xfrm xmlns:a="http://schemas.openxmlformats.org/drawingml/2006/main">
+            <a:off x="6457950" y="2800350"/>
+            <a:ext cx="514350" cy="323850"/>
+          </a:xfrm>
+          <a:prstGeom xmlns:a="http://schemas.openxmlformats.org/drawingml/2006/main" prst="rect">
+            <a:avLst/>
+          </a:prstGeom>
+          <a:noFill xmlns:a="http://schemas.openxmlformats.org/drawingml/2006/main"/>
+          <a:ln xmlns:a="http://schemas.openxmlformats.org/drawingml/2006/main" w="0">
+            <a:noFill/>
+            <a:prstDash val="solid"/>
+          </a:ln>
+        </p:spPr>
+        <p:txBody>
+          <a:bodyPr xmlns:a="http://schemas.openxmlformats.org/drawingml/2006/main"/>
+          <a:lstStyle xmlns:a="http://schemas.openxmlformats.org/drawingml/2006/main"/>
+          <a:p xmlns:a="http://schemas.openxmlformats.org/drawingml/2006/main">
+            <a:pPr>
+              <a:defRPr sz="2100" b="1">
+                <a:solidFill>
+                  <a:srgbClr val="E4144F"/>
+                </a:solidFill>
+              </a:defRPr>
+            </a:pPr>
+            <a:r>
+              <a:rPr sz="2100" b="1">
+                <a:solidFill>
+                  <a:srgbClr val="E4144F"/>
+                </a:solidFill>
+              </a:rPr>
+              <a:t>03</a:t>
+            </a:r>
+          </a:p>
+        </p:txBody>
+      </p:sp>
+      <p:sp>
+        <p:nvSpPr>
+          <p:cNvPr id="16" name="">
+            <a:extLst xmlns:a="http://schemas.openxmlformats.org/drawingml/2006/main">
+              <a:ext uri="{FF2B5EF4-FFF2-40B4-BE49-F238E27FC236}">
+                <a16:creationId xmlns:a16="http://schemas.microsoft.com/office/drawing/2014/main" id="{F389AE17-C09C-48C6-B7A4-8595D7EEF9D1}"/>
+              </a:ext>
+            </a:extLst>
+          </p:cNvPr>
+          <p:cNvSpPr>
+            <a:spLocks xmlns:a="http://schemas.openxmlformats.org/drawingml/2006/main" noGrp="1"/>
+          </p:cNvSpPr>
+          <p:nvPr/>
+        </p:nvSpPr>
+        <p:spPr>
+          <a:xfrm xmlns:a="http://schemas.openxmlformats.org/drawingml/2006/main">
+            <a:off x="7067550" y="2819400"/>
+            <a:ext cx="1257300" cy="323850"/>
           </a:xfrm>
           <a:prstGeom xmlns:a="http://schemas.openxmlformats.org/drawingml/2006/main" prst="rect">
             <a:avLst/>
@@ -3625,67 +3662,17 @@
             <a:pPr>
               <a:defRPr sz="1800" b="1">
                 <a:solidFill>
-                  <a:srgbClr val="DE1A4C"/>
+                  <a:srgbClr val="003D48"/>
                 </a:solidFill>
               </a:defRPr>
             </a:pPr>
             <a:r>
               <a:rPr sz="1800" b="1">
                 <a:solidFill>
-                  <a:srgbClr val="DE1A4C"/>
-                </a:solidFill>
-              </a:rPr>
-              <a:t>03</a:t>
-            </a:r>
-          </a:p>
-        </p:txBody>
-      </p:sp>
-      <p:sp>
-        <p:nvSpPr>
-          <p:cNvPr id="16" name="">
-            <a:extLst xmlns:a="http://schemas.openxmlformats.org/drawingml/2006/main">
-              <a:ext uri="{FF2B5EF4-FFF2-40B4-BE49-F238E27FC236}">
-                <a16:creationId xmlns:a16="http://schemas.microsoft.com/office/drawing/2014/main" id="{20448A51-4A6D-4113-8717-A392F9979BCD}"/>
-              </a:ext>
-            </a:extLst>
-          </p:cNvPr>
-          <p:cNvSpPr>
-            <a:spLocks xmlns:a="http://schemas.openxmlformats.org/drawingml/2006/main" noGrp="1"/>
-          </p:cNvSpPr>
-          <p:nvPr/>
-        </p:nvSpPr>
-        <p:spPr>
-          <a:xfrm xmlns:a="http://schemas.openxmlformats.org/drawingml/2006/main">
-            <a:off x="6324600" y="3257550"/>
-            <a:ext cx="1762125" cy="400050"/>
-          </a:xfrm>
-          <a:prstGeom xmlns:a="http://schemas.openxmlformats.org/drawingml/2006/main" prst="rect">
-            <a:avLst/>
-          </a:prstGeom>
-          <a:noFill xmlns:a="http://schemas.openxmlformats.org/drawingml/2006/main"/>
-          <a:ln xmlns:a="http://schemas.openxmlformats.org/drawingml/2006/main" w="0">
-            <a:noFill/>
-            <a:prstDash val="solid"/>
-          </a:ln>
-        </p:spPr>
-        <p:txBody>
-          <a:bodyPr xmlns:a="http://schemas.openxmlformats.org/drawingml/2006/main"/>
-          <a:lstStyle xmlns:a="http://schemas.openxmlformats.org/drawingml/2006/main"/>
-          <a:p xmlns:a="http://schemas.openxmlformats.org/drawingml/2006/main">
-            <a:pPr>
-              <a:defRPr sz="1800" b="1">
-                <a:solidFill>
-                  <a:srgbClr val="101820"/>
-                </a:solidFill>
-              </a:defRPr>
-            </a:pPr>
-            <a:r>
-              <a:rPr sz="1800" b="1">
-                <a:solidFill>
-                  <a:srgbClr val="101820"/>
-                </a:solidFill>
-              </a:rPr>
-              <a:t>Risk check</a:t>
+                  <a:srgbClr val="003D48"/>
+                </a:solidFill>
+              </a:rPr>
+              <a:t>Score</a:t>
             </a:r>
           </a:p>
         </p:txBody>
@@ -3695,19 +3682,19 @@
           <p:cNvPr id="17" name="">
             <a:extLst xmlns:a="http://schemas.openxmlformats.org/drawingml/2006/main">
               <a:ext uri="{FF2B5EF4-FFF2-40B4-BE49-F238E27FC236}">
-                <a16:creationId xmlns:a16="http://schemas.microsoft.com/office/drawing/2014/main" id="{CBE8FEA6-D67E-4551-B8EE-E07E744AD3A5}"/>
-              </a:ext>
-            </a:extLst>
-          </p:cNvPr>
-          <p:cNvSpPr>
-            <a:spLocks xmlns:a="http://schemas.openxmlformats.org/drawingml/2006/main" noGrp="1"/>
-          </p:cNvSpPr>
-          <p:nvPr/>
-        </p:nvSpPr>
-        <p:spPr>
-          <a:xfrm xmlns:a="http://schemas.openxmlformats.org/drawingml/2006/main">
-            <a:off x="6324600" y="3848100"/>
-            <a:ext cx="1809750" cy="457200"/>
+                <a16:creationId xmlns:a16="http://schemas.microsoft.com/office/drawing/2014/main" id="{1E310376-7788-4102-B487-DB11332840F7}"/>
+              </a:ext>
+            </a:extLst>
+          </p:cNvPr>
+          <p:cNvSpPr>
+            <a:spLocks xmlns:a="http://schemas.openxmlformats.org/drawingml/2006/main" noGrp="1"/>
+          </p:cNvSpPr>
+          <p:nvPr/>
+        </p:nvSpPr>
+        <p:spPr>
+          <a:xfrm xmlns:a="http://schemas.openxmlformats.org/drawingml/2006/main">
+            <a:off x="7067550" y="3333750"/>
+            <a:ext cx="1257300" cy="990600"/>
           </a:xfrm>
           <a:prstGeom xmlns:a="http://schemas.openxmlformats.org/drawingml/2006/main" prst="rect">
             <a:avLst/>
@@ -3725,17 +3712,17 @@
             <a:pPr>
               <a:defRPr sz="1350" b="0">
                 <a:solidFill>
-                  <a:srgbClr val="59666A"/>
+                  <a:srgbClr val="101820"/>
                 </a:solidFill>
               </a:defRPr>
             </a:pPr>
             <a:r>
               <a:rPr sz="1350" b="0">
                 <a:solidFill>
-                  <a:srgbClr val="59666A"/>
-                </a:solidFill>
-              </a:rPr>
-              <a:t>duplicate, reversal, unusual amount</a:t>
+                  <a:srgbClr val="101820"/>
+                </a:solidFill>
+              </a:rPr>
+              <a:t>Separate verified, supported, manual, and flagged entries.</a:t>
             </a:r>
           </a:p>
         </p:txBody>
@@ -3745,60 +3732,29 @@
           <p:cNvPr id="18" name="">
             <a:extLst xmlns:a="http://schemas.openxmlformats.org/drawingml/2006/main">
               <a:ext uri="{FF2B5EF4-FFF2-40B4-BE49-F238E27FC236}">
-                <a16:creationId xmlns:a16="http://schemas.microsoft.com/office/drawing/2014/main" id="{52A70DE9-538A-40D1-9962-774C5B4A4E28}"/>
-              </a:ext>
-            </a:extLst>
-          </p:cNvPr>
-          <p:cNvSpPr>
-            <a:spLocks xmlns:a="http://schemas.openxmlformats.org/drawingml/2006/main" noGrp="1"/>
-          </p:cNvSpPr>
-          <p:nvPr/>
-        </p:nvSpPr>
-        <p:spPr>
-          <a:xfrm xmlns:a="http://schemas.openxmlformats.org/drawingml/2006/main">
-            <a:off x="8477250" y="3524250"/>
-            <a:ext cx="285750" cy="0"/>
-          </a:xfrm>
-          <a:prstGeom xmlns:a="http://schemas.openxmlformats.org/drawingml/2006/main" prst="line">
-            <a:avLst/>
-          </a:prstGeom>
-          <a:noFill xmlns:a="http://schemas.openxmlformats.org/drawingml/2006/main"/>
-          <a:ln xmlns:a="http://schemas.openxmlformats.org/drawingml/2006/main" w="13335">
-            <a:solidFill>
-              <a:srgbClr val="003D48"/>
-            </a:solidFill>
-            <a:prstDash val="solid"/>
-          </a:ln>
-        </p:spPr>
-      </p:sp>
-      <p:sp>
-        <p:nvSpPr>
-          <p:cNvPr id="19" name="">
-            <a:extLst xmlns:a="http://schemas.openxmlformats.org/drawingml/2006/main">
-              <a:ext uri="{FF2B5EF4-FFF2-40B4-BE49-F238E27FC236}">
-                <a16:creationId xmlns:a16="http://schemas.microsoft.com/office/drawing/2014/main" id="{49C10502-A45C-4CD5-82F3-9BE6B96E5811}"/>
-              </a:ext>
-            </a:extLst>
-          </p:cNvPr>
-          <p:cNvSpPr>
-            <a:spLocks xmlns:a="http://schemas.openxmlformats.org/drawingml/2006/main" noGrp="1"/>
-          </p:cNvSpPr>
-          <p:nvPr/>
-        </p:nvSpPr>
-        <p:spPr>
-          <a:xfrm xmlns:a="http://schemas.openxmlformats.org/drawingml/2006/main">
-            <a:off x="8858250" y="2667000"/>
-            <a:ext cx="2266950" cy="1714500"/>
+                <a16:creationId xmlns:a16="http://schemas.microsoft.com/office/drawing/2014/main" id="{0EB45870-349E-4A45-B10D-E743E8A7B92D}"/>
+              </a:ext>
+            </a:extLst>
+          </p:cNvPr>
+          <p:cNvSpPr>
+            <a:spLocks xmlns:a="http://schemas.openxmlformats.org/drawingml/2006/main" noGrp="1"/>
+          </p:cNvSpPr>
+          <p:nvPr/>
+        </p:nvSpPr>
+        <p:spPr>
+          <a:xfrm xmlns:a="http://schemas.openxmlformats.org/drawingml/2006/main">
+            <a:off x="9029700" y="2590800"/>
+            <a:ext cx="2381250" cy="2095500"/>
           </a:xfrm>
           <a:prstGeom xmlns:a="http://schemas.openxmlformats.org/drawingml/2006/main" prst="rect">
             <a:avLst/>
           </a:prstGeom>
           <a:solidFill xmlns:a="http://schemas.openxmlformats.org/drawingml/2006/main">
-            <a:srgbClr val="F2F5F4"/>
+            <a:srgbClr val="F4F7F6"/>
           </a:solidFill>
           <a:ln xmlns:a="http://schemas.openxmlformats.org/drawingml/2006/main" w="9525">
             <a:solidFill>
-              <a:srgbClr val="C8D1D2"/>
+              <a:srgbClr val="D8DEDF"/>
             </a:solidFill>
             <a:prstDash val="solid"/>
           </a:ln>
@@ -3806,22 +3762,72 @@
       </p:sp>
       <p:sp>
         <p:nvSpPr>
+          <p:cNvPr id="19" name="">
+            <a:extLst xmlns:a="http://schemas.openxmlformats.org/drawingml/2006/main">
+              <a:ext uri="{FF2B5EF4-FFF2-40B4-BE49-F238E27FC236}">
+                <a16:creationId xmlns:a16="http://schemas.microsoft.com/office/drawing/2014/main" id="{25538A95-F759-4E58-A2C3-4326EC0092A0}"/>
+              </a:ext>
+            </a:extLst>
+          </p:cNvPr>
+          <p:cNvSpPr>
+            <a:spLocks xmlns:a="http://schemas.openxmlformats.org/drawingml/2006/main" noGrp="1"/>
+          </p:cNvSpPr>
+          <p:nvPr/>
+        </p:nvSpPr>
+        <p:spPr>
+          <a:xfrm xmlns:a="http://schemas.openxmlformats.org/drawingml/2006/main">
+            <a:off x="9239250" y="2800350"/>
+            <a:ext cx="514350" cy="323850"/>
+          </a:xfrm>
+          <a:prstGeom xmlns:a="http://schemas.openxmlformats.org/drawingml/2006/main" prst="rect">
+            <a:avLst/>
+          </a:prstGeom>
+          <a:noFill xmlns:a="http://schemas.openxmlformats.org/drawingml/2006/main"/>
+          <a:ln xmlns:a="http://schemas.openxmlformats.org/drawingml/2006/main" w="0">
+            <a:noFill/>
+            <a:prstDash val="solid"/>
+          </a:ln>
+        </p:spPr>
+        <p:txBody>
+          <a:bodyPr xmlns:a="http://schemas.openxmlformats.org/drawingml/2006/main"/>
+          <a:lstStyle xmlns:a="http://schemas.openxmlformats.org/drawingml/2006/main"/>
+          <a:p xmlns:a="http://schemas.openxmlformats.org/drawingml/2006/main">
+            <a:pPr>
+              <a:defRPr sz="2100" b="1">
+                <a:solidFill>
+                  <a:srgbClr val="E4144F"/>
+                </a:solidFill>
+              </a:defRPr>
+            </a:pPr>
+            <a:r>
+              <a:rPr sz="2100" b="1">
+                <a:solidFill>
+                  <a:srgbClr val="E4144F"/>
+                </a:solidFill>
+              </a:rPr>
+              <a:t>04</a:t>
+            </a:r>
+          </a:p>
+        </p:txBody>
+      </p:sp>
+      <p:sp>
+        <p:nvSpPr>
           <p:cNvPr id="20" name="">
             <a:extLst xmlns:a="http://schemas.openxmlformats.org/drawingml/2006/main">
               <a:ext uri="{FF2B5EF4-FFF2-40B4-BE49-F238E27FC236}">
-                <a16:creationId xmlns:a16="http://schemas.microsoft.com/office/drawing/2014/main" id="{EB2EB293-3A43-445E-A1FA-5FDA90836925}"/>
-              </a:ext>
-            </a:extLst>
-          </p:cNvPr>
-          <p:cNvSpPr>
-            <a:spLocks xmlns:a="http://schemas.openxmlformats.org/drawingml/2006/main" noGrp="1"/>
-          </p:cNvSpPr>
-          <p:nvPr/>
-        </p:nvSpPr>
-        <p:spPr>
-          <a:xfrm xmlns:a="http://schemas.openxmlformats.org/drawingml/2006/main">
-            <a:off x="9048750" y="2857500"/>
-            <a:ext cx="552450" cy="323850"/>
+                <a16:creationId xmlns:a16="http://schemas.microsoft.com/office/drawing/2014/main" id="{CC0F3F30-83A9-4AA7-BEEF-FA161444BC85}"/>
+              </a:ext>
+            </a:extLst>
+          </p:cNvPr>
+          <p:cNvSpPr>
+            <a:spLocks xmlns:a="http://schemas.openxmlformats.org/drawingml/2006/main" noGrp="1"/>
+          </p:cNvSpPr>
+          <p:nvPr/>
+        </p:nvSpPr>
+        <p:spPr>
+          <a:xfrm xmlns:a="http://schemas.openxmlformats.org/drawingml/2006/main">
+            <a:off x="9848850" y="2819400"/>
+            <a:ext cx="1257300" cy="323850"/>
           </a:xfrm>
           <a:prstGeom xmlns:a="http://schemas.openxmlformats.org/drawingml/2006/main" prst="rect">
             <a:avLst/>
@@ -3839,17 +3845,17 @@
             <a:pPr>
               <a:defRPr sz="1800" b="1">
                 <a:solidFill>
-                  <a:srgbClr val="DE1A4C"/>
+                  <a:srgbClr val="003D48"/>
                 </a:solidFill>
               </a:defRPr>
             </a:pPr>
             <a:r>
               <a:rPr sz="1800" b="1">
                 <a:solidFill>
-                  <a:srgbClr val="DE1A4C"/>
-                </a:solidFill>
-              </a:rPr>
-              <a:t>04</a:t>
+                  <a:srgbClr val="003D48"/>
+                </a:solidFill>
+              </a:rPr>
+              <a:t>Explain</a:t>
             </a:r>
           </a:p>
         </p:txBody>
@@ -3859,69 +3865,19 @@
           <p:cNvPr id="21" name="">
             <a:extLst xmlns:a="http://schemas.openxmlformats.org/drawingml/2006/main">
               <a:ext uri="{FF2B5EF4-FFF2-40B4-BE49-F238E27FC236}">
-                <a16:creationId xmlns:a16="http://schemas.microsoft.com/office/drawing/2014/main" id="{3E20E05A-5179-4BF6-B116-8F7B02DEB4B9}"/>
-              </a:ext>
-            </a:extLst>
-          </p:cNvPr>
-          <p:cNvSpPr>
-            <a:spLocks xmlns:a="http://schemas.openxmlformats.org/drawingml/2006/main" noGrp="1"/>
-          </p:cNvSpPr>
-          <p:nvPr/>
-        </p:nvSpPr>
-        <p:spPr>
-          <a:xfrm xmlns:a="http://schemas.openxmlformats.org/drawingml/2006/main">
-            <a:off x="9048750" y="3257550"/>
-            <a:ext cx="1762125" cy="400050"/>
-          </a:xfrm>
-          <a:prstGeom xmlns:a="http://schemas.openxmlformats.org/drawingml/2006/main" prst="rect">
-            <a:avLst/>
-          </a:prstGeom>
-          <a:noFill xmlns:a="http://schemas.openxmlformats.org/drawingml/2006/main"/>
-          <a:ln xmlns:a="http://schemas.openxmlformats.org/drawingml/2006/main" w="0">
-            <a:noFill/>
-            <a:prstDash val="solid"/>
-          </a:ln>
-        </p:spPr>
-        <p:txBody>
-          <a:bodyPr xmlns:a="http://schemas.openxmlformats.org/drawingml/2006/main"/>
-          <a:lstStyle xmlns:a="http://schemas.openxmlformats.org/drawingml/2006/main"/>
-          <a:p xmlns:a="http://schemas.openxmlformats.org/drawingml/2006/main">
-            <a:pPr>
-              <a:defRPr sz="1800" b="1">
-                <a:solidFill>
-                  <a:srgbClr val="101820"/>
-                </a:solidFill>
-              </a:defRPr>
-            </a:pPr>
-            <a:r>
-              <a:rPr sz="1800" b="1">
-                <a:solidFill>
-                  <a:srgbClr val="101820"/>
-                </a:solidFill>
-              </a:rPr>
-              <a:t>Readiness profile</a:t>
-            </a:r>
-          </a:p>
-        </p:txBody>
-      </p:sp>
-      <p:sp>
-        <p:nvSpPr>
-          <p:cNvPr id="22" name="">
-            <a:extLst xmlns:a="http://schemas.openxmlformats.org/drawingml/2006/main">
-              <a:ext uri="{FF2B5EF4-FFF2-40B4-BE49-F238E27FC236}">
-                <a16:creationId xmlns:a16="http://schemas.microsoft.com/office/drawing/2014/main" id="{1E669BC1-3D20-4BB9-88D3-5796A1D82D87}"/>
-              </a:ext>
-            </a:extLst>
-          </p:cNvPr>
-          <p:cNvSpPr>
-            <a:spLocks xmlns:a="http://schemas.openxmlformats.org/drawingml/2006/main" noGrp="1"/>
-          </p:cNvSpPr>
-          <p:nvPr/>
-        </p:nvSpPr>
-        <p:spPr>
-          <a:xfrm xmlns:a="http://schemas.openxmlformats.org/drawingml/2006/main">
-            <a:off x="9048750" y="3848100"/>
-            <a:ext cx="1809750" cy="457200"/>
+                <a16:creationId xmlns:a16="http://schemas.microsoft.com/office/drawing/2014/main" id="{7017A694-0CF4-4F8D-A641-EB54DD91C6A9}"/>
+              </a:ext>
+            </a:extLst>
+          </p:cNvPr>
+          <p:cNvSpPr>
+            <a:spLocks xmlns:a="http://schemas.openxmlformats.org/drawingml/2006/main" noGrp="1"/>
+          </p:cNvSpPr>
+          <p:nvPr/>
+        </p:nvSpPr>
+        <p:spPr>
+          <a:xfrm xmlns:a="http://schemas.openxmlformats.org/drawingml/2006/main">
+            <a:off x="9848850" y="3333750"/>
+            <a:ext cx="1257300" cy="990600"/>
           </a:xfrm>
           <a:prstGeom xmlns:a="http://schemas.openxmlformats.org/drawingml/2006/main" prst="rect">
             <a:avLst/>
@@ -3939,39 +3895,39 @@
             <a:pPr>
               <a:defRPr sz="1350" b="0">
                 <a:solidFill>
-                  <a:srgbClr val="59666A"/>
+                  <a:srgbClr val="101820"/>
                 </a:solidFill>
               </a:defRPr>
             </a:pPr>
             <a:r>
               <a:rPr sz="1350" b="0">
                 <a:solidFill>
-                  <a:srgbClr val="59666A"/>
-                </a:solidFill>
-              </a:rPr>
-              <a:t>cashflow, consistency, record quality</a:t>
-            </a:r>
-          </a:p>
-        </p:txBody>
-      </p:sp>
-      <p:sp>
-        <p:nvSpPr>
-          <p:cNvPr id="23" name="">
-            <a:extLst xmlns:a="http://schemas.openxmlformats.org/drawingml/2006/main">
-              <a:ext uri="{FF2B5EF4-FFF2-40B4-BE49-F238E27FC236}">
-                <a16:creationId xmlns:a16="http://schemas.microsoft.com/office/drawing/2014/main" id="{37AD58CB-5ADC-46D2-9808-083AF9690EEA}"/>
-              </a:ext>
-            </a:extLst>
-          </p:cNvPr>
-          <p:cNvSpPr>
-            <a:spLocks xmlns:a="http://schemas.openxmlformats.org/drawingml/2006/main" noGrp="1"/>
-          </p:cNvSpPr>
-          <p:nvPr/>
-        </p:nvSpPr>
-        <p:spPr>
-          <a:xfrm xmlns:a="http://schemas.openxmlformats.org/drawingml/2006/main">
-            <a:off x="685800" y="5219700"/>
-            <a:ext cx="8477250" cy="590550"/>
+                  <a:srgbClr val="101820"/>
+                </a:solidFill>
+              </a:rPr>
+              <a:t>Show why each record is trusted or needs review.</a:t>
+            </a:r>
+          </a:p>
+        </p:txBody>
+      </p:sp>
+      <p:sp>
+        <p:nvSpPr>
+          <p:cNvPr id="22" name="">
+            <a:extLst xmlns:a="http://schemas.openxmlformats.org/drawingml/2006/main">
+              <a:ext uri="{FF2B5EF4-FFF2-40B4-BE49-F238E27FC236}">
+                <a16:creationId xmlns:a16="http://schemas.microsoft.com/office/drawing/2014/main" id="{CD98D7EC-855A-47F0-8DA4-D65D5647C9DB}"/>
+              </a:ext>
+            </a:extLst>
+          </p:cNvPr>
+          <p:cNvSpPr>
+            <a:spLocks xmlns:a="http://schemas.openxmlformats.org/drawingml/2006/main" noGrp="1"/>
+          </p:cNvSpPr>
+          <p:nvPr/>
+        </p:nvSpPr>
+        <p:spPr>
+          <a:xfrm xmlns:a="http://schemas.openxmlformats.org/drawingml/2006/main">
+            <a:off x="685800" y="5314950"/>
+            <a:ext cx="8953500" cy="495300"/>
           </a:xfrm>
           <a:prstGeom xmlns:a="http://schemas.openxmlformats.org/drawingml/2006/main" prst="rect">
             <a:avLst/>
@@ -3987,119 +3943,19 @@
           <a:lstStyle xmlns:a="http://schemas.openxmlformats.org/drawingml/2006/main"/>
           <a:p xmlns:a="http://schemas.openxmlformats.org/drawingml/2006/main">
             <a:pPr>
-              <a:defRPr sz="2100" b="1">
+              <a:defRPr sz="2400" b="1">
                 <a:solidFill>
                   <a:srgbClr val="003D48"/>
                 </a:solidFill>
               </a:defRPr>
             </a:pPr>
             <a:r>
-              <a:rPr sz="2100" b="1">
+              <a:rPr sz="2400" b="1">
                 <a:solidFill>
                   <a:srgbClr val="003D48"/>
                 </a:solidFill>
               </a:rPr>
-              <a:t>The product does not ask merchants to change behavior first. It makes current behavior count.</a:t>
-            </a:r>
-          </a:p>
-        </p:txBody>
-      </p:sp>
-      <p:sp>
-        <p:nvSpPr>
-          <p:cNvPr id="24" name="">
-            <a:extLst xmlns:a="http://schemas.openxmlformats.org/drawingml/2006/main">
-              <a:ext uri="{FF2B5EF4-FFF2-40B4-BE49-F238E27FC236}">
-                <a16:creationId xmlns:a16="http://schemas.microsoft.com/office/drawing/2014/main" id="{858C7D4B-59B8-4849-87AD-3D10055E13D1}"/>
-              </a:ext>
-            </a:extLst>
-          </p:cNvPr>
-          <p:cNvSpPr>
-            <a:spLocks xmlns:a="http://schemas.openxmlformats.org/drawingml/2006/main" noGrp="1"/>
-          </p:cNvSpPr>
-          <p:nvPr/>
-        </p:nvSpPr>
-        <p:spPr>
-          <a:xfrm xmlns:a="http://schemas.openxmlformats.org/drawingml/2006/main">
-            <a:off x="400050" y="6362700"/>
-            <a:ext cx="5905500" cy="228600"/>
-          </a:xfrm>
-          <a:prstGeom xmlns:a="http://schemas.openxmlformats.org/drawingml/2006/main" prst="rect">
-            <a:avLst/>
-          </a:prstGeom>
-          <a:noFill xmlns:a="http://schemas.openxmlformats.org/drawingml/2006/main"/>
-          <a:ln xmlns:a="http://schemas.openxmlformats.org/drawingml/2006/main" w="0">
-            <a:noFill/>
-            <a:prstDash val="solid"/>
-          </a:ln>
-        </p:spPr>
-        <p:txBody>
-          <a:bodyPr xmlns:a="http://schemas.openxmlformats.org/drawingml/2006/main"/>
-          <a:lstStyle xmlns:a="http://schemas.openxmlformats.org/drawingml/2006/main"/>
-          <a:p xmlns:a="http://schemas.openxmlformats.org/drawingml/2006/main">
-            <a:pPr>
-              <a:defRPr sz="1050" b="1">
-                <a:solidFill>
-                  <a:srgbClr val="59666A"/>
-                </a:solidFill>
-              </a:defRPr>
-            </a:pPr>
-            <a:r>
-              <a:rPr sz="1050" b="1">
-                <a:solidFill>
-                  <a:srgbClr val="59666A"/>
-                </a:solidFill>
-              </a:rPr>
-              <a:t>TrustTill | Hackaholics 7.0 | Financial Inclusion</a:t>
-            </a:r>
-          </a:p>
-        </p:txBody>
-      </p:sp>
-      <p:sp>
-        <p:nvSpPr>
-          <p:cNvPr id="25" name="">
-            <a:extLst xmlns:a="http://schemas.openxmlformats.org/drawingml/2006/main">
-              <a:ext uri="{FF2B5EF4-FFF2-40B4-BE49-F238E27FC236}">
-                <a16:creationId xmlns:a16="http://schemas.microsoft.com/office/drawing/2014/main" id="{122FBD26-808D-4335-A49C-6C094268A265}"/>
-              </a:ext>
-            </a:extLst>
-          </p:cNvPr>
-          <p:cNvSpPr>
-            <a:spLocks xmlns:a="http://schemas.openxmlformats.org/drawingml/2006/main" noGrp="1"/>
-          </p:cNvSpPr>
-          <p:nvPr/>
-        </p:nvSpPr>
-        <p:spPr>
-          <a:xfrm xmlns:a="http://schemas.openxmlformats.org/drawingml/2006/main">
-            <a:off x="11468100" y="6362700"/>
-            <a:ext cx="323850" cy="228600"/>
-          </a:xfrm>
-          <a:prstGeom xmlns:a="http://schemas.openxmlformats.org/drawingml/2006/main" prst="rect">
-            <a:avLst/>
-          </a:prstGeom>
-          <a:noFill xmlns:a="http://schemas.openxmlformats.org/drawingml/2006/main"/>
-          <a:ln xmlns:a="http://schemas.openxmlformats.org/drawingml/2006/main" w="0">
-            <a:noFill/>
-            <a:prstDash val="solid"/>
-          </a:ln>
-        </p:spPr>
-        <p:txBody>
-          <a:bodyPr xmlns:a="http://schemas.openxmlformats.org/drawingml/2006/main"/>
-          <a:lstStyle xmlns:a="http://schemas.openxmlformats.org/drawingml/2006/main"/>
-          <a:p xmlns:a="http://schemas.openxmlformats.org/drawingml/2006/main">
-            <a:pPr algn="r">
-              <a:defRPr sz="1050" b="1">
-                <a:solidFill>
-                  <a:srgbClr val="59666A"/>
-                </a:solidFill>
-              </a:defRPr>
-            </a:pPr>
-            <a:r>
-              <a:rPr sz="1050" b="1">
-                <a:solidFill>
-                  <a:srgbClr val="59666A"/>
-                </a:solidFill>
-              </a:rPr>
-              <a:t>3</a:t>
+              <a:t>AI organizes the mess. Rules keep the trust logic explainable.</a:t>
             </a:r>
           </a:p>
         </p:txBody>
@@ -4107,7 +3963,7 @@
     </p:spTree>
     <p:extLst>
       <p:ext uri="{BB962C8B-B14F-4D97-AF65-F5344CB8AC3E}">
-        <p14:creationId xmlns:p14="http://schemas.microsoft.com/office/powerpoint/2010/main" val="172359100"/>
+        <p14:creationId xmlns:p14="http://schemas.microsoft.com/office/powerpoint/2010/main" val="1831093006"/>
       </p:ext>
     </p:extLst>
   </p:cSld>
@@ -4138,19 +3994,19 @@
           <p:cNvPr id="1" name="">
             <a:extLst xmlns:a="http://schemas.openxmlformats.org/drawingml/2006/main">
               <a:ext uri="{FF2B5EF4-FFF2-40B4-BE49-F238E27FC236}">
-                <a16:creationId xmlns:a16="http://schemas.microsoft.com/office/drawing/2014/main" id="{BDFCD742-CEC4-4181-9E6C-A0885843060B}"/>
-              </a:ext>
-            </a:extLst>
-          </p:cNvPr>
-          <p:cNvSpPr>
-            <a:spLocks xmlns:a="http://schemas.openxmlformats.org/drawingml/2006/main" noGrp="1"/>
-          </p:cNvSpPr>
-          <p:nvPr/>
-        </p:nvSpPr>
-        <p:spPr>
-          <a:xfrm xmlns:a="http://schemas.openxmlformats.org/drawingml/2006/main">
-            <a:off x="533400" y="514350"/>
-            <a:ext cx="8001000" cy="895350"/>
+                <a16:creationId xmlns:a16="http://schemas.microsoft.com/office/drawing/2014/main" id="{403FDF6A-28BB-41A9-8DF8-9A41228E0374}"/>
+              </a:ext>
+            </a:extLst>
+          </p:cNvPr>
+          <p:cNvSpPr>
+            <a:spLocks xmlns:a="http://schemas.openxmlformats.org/drawingml/2006/main" noGrp="1"/>
+          </p:cNvSpPr>
+          <p:nvPr/>
+        </p:nvSpPr>
+        <p:spPr>
+          <a:xfrm xmlns:a="http://schemas.openxmlformats.org/drawingml/2006/main">
+            <a:off x="533400" y="457200"/>
+            <a:ext cx="10287000" cy="819150"/>
           </a:xfrm>
           <a:prstGeom xmlns:a="http://schemas.openxmlformats.org/drawingml/2006/main" prst="rect">
             <a:avLst/>
@@ -4178,7 +4034,7 @@
                   <a:srgbClr val="101820"/>
                 </a:solidFill>
               </a:rPr>
-              <a:t>The prototype makes the merchant journey visible</a:t>
+              <a:t>The prototype already shows the workflow</a:t>
             </a:r>
           </a:p>
         </p:txBody>
@@ -4188,19 +4044,19 @@
           <p:cNvPr id="2" name="">
             <a:extLst xmlns:a="http://schemas.openxmlformats.org/drawingml/2006/main">
               <a:ext uri="{FF2B5EF4-FFF2-40B4-BE49-F238E27FC236}">
-                <a16:creationId xmlns:a16="http://schemas.microsoft.com/office/drawing/2014/main" id="{16B56E20-D5FF-46B4-A06D-D64153E6C459}"/>
-              </a:ext>
-            </a:extLst>
-          </p:cNvPr>
-          <p:cNvSpPr>
-            <a:spLocks xmlns:a="http://schemas.openxmlformats.org/drawingml/2006/main" noGrp="1"/>
-          </p:cNvSpPr>
-          <p:nvPr/>
-        </p:nvSpPr>
-        <p:spPr>
-          <a:xfrm xmlns:a="http://schemas.openxmlformats.org/drawingml/2006/main">
-            <a:off x="552450" y="1352550"/>
-            <a:ext cx="6667500" cy="514350"/>
+                <a16:creationId xmlns:a16="http://schemas.microsoft.com/office/drawing/2014/main" id="{0EEF849B-BEE4-41BD-8B84-95E008B29184}"/>
+              </a:ext>
+            </a:extLst>
+          </p:cNvPr>
+          <p:cNvSpPr>
+            <a:spLocks xmlns:a="http://schemas.openxmlformats.org/drawingml/2006/main" noGrp="1"/>
+          </p:cNvSpPr>
+          <p:nvPr/>
+        </p:nvSpPr>
+        <p:spPr>
+          <a:xfrm xmlns:a="http://schemas.openxmlformats.org/drawingml/2006/main">
+            <a:off x="552450" y="1333500"/>
+            <a:ext cx="8763000" cy="400050"/>
           </a:xfrm>
           <a:prstGeom xmlns:a="http://schemas.openxmlformats.org/drawingml/2006/main" prst="rect">
             <a:avLst/>
@@ -4216,19 +4072,19 @@
           <a:lstStyle xmlns:a="http://schemas.openxmlformats.org/drawingml/2006/main"/>
           <a:p xmlns:a="http://schemas.openxmlformats.org/drawingml/2006/main">
             <a:pPr>
-              <a:defRPr sz="1650" b="0">
-                <a:solidFill>
-                  <a:srgbClr val="59666A"/>
-                </a:solidFill>
-              </a:defRPr>
-            </a:pPr>
-            <a:r>
-              <a:rPr sz="1650" b="0">
-                <a:solidFill>
-                  <a:srgbClr val="59666A"/>
-                </a:solidFill>
-              </a:rPr>
-              <a:t>The demo shows profile, parser, risk review, readiness, and Wema Desk in one flow.</a:t>
+              <a:defRPr sz="1800" b="0">
+                <a:solidFill>
+                  <a:srgbClr val="536267"/>
+                </a:solidFill>
+              </a:defRPr>
+            </a:pPr>
+            <a:r>
+              <a:rPr sz="1800" b="0">
+                <a:solidFill>
+                  <a:srgbClr val="536267"/>
+                </a:solidFill>
+              </a:rPr>
+              <a:t>A judge can see messy evidence become a profile, score, and review queue.</a:t>
             </a:r>
           </a:p>
         </p:txBody>
@@ -4238,19 +4094,19 @@
           <p:cNvPr id="3" name="">
             <a:extLst xmlns:a="http://schemas.openxmlformats.org/drawingml/2006/main">
               <a:ext uri="{FF2B5EF4-FFF2-40B4-BE49-F238E27FC236}">
-                <a16:creationId xmlns:a16="http://schemas.microsoft.com/office/drawing/2014/main" id="{7BBA2C83-44D0-44C5-AB27-FBA81AEECB19}"/>
-              </a:ext>
-            </a:extLst>
-          </p:cNvPr>
-          <p:cNvSpPr>
-            <a:spLocks xmlns:a="http://schemas.openxmlformats.org/drawingml/2006/main" noGrp="1"/>
-          </p:cNvSpPr>
-          <p:nvPr/>
-        </p:nvSpPr>
-        <p:spPr>
-          <a:xfrm xmlns:a="http://schemas.openxmlformats.org/drawingml/2006/main">
-            <a:off x="533400" y="1943100"/>
-            <a:ext cx="10572750" cy="0"/>
+                <a16:creationId xmlns:a16="http://schemas.microsoft.com/office/drawing/2014/main" id="{2EF93A66-49A0-4068-8095-1E364FDD329F}"/>
+              </a:ext>
+            </a:extLst>
+          </p:cNvPr>
+          <p:cNvSpPr>
+            <a:spLocks xmlns:a="http://schemas.openxmlformats.org/drawingml/2006/main" noGrp="1"/>
+          </p:cNvSpPr>
+          <p:nvPr/>
+        </p:nvSpPr>
+        <p:spPr>
+          <a:xfrm xmlns:a="http://schemas.openxmlformats.org/drawingml/2006/main">
+            <a:off x="533400" y="2000250"/>
+            <a:ext cx="10591800" cy="0"/>
           </a:xfrm>
           <a:prstGeom xmlns:a="http://schemas.openxmlformats.org/drawingml/2006/main" prst="line">
             <a:avLst/>
@@ -4258,31 +4114,131 @@
           <a:noFill xmlns:a="http://schemas.openxmlformats.org/drawingml/2006/main"/>
           <a:ln xmlns:a="http://schemas.openxmlformats.org/drawingml/2006/main" w="13335">
             <a:solidFill>
-              <a:srgbClr val="C8D1D2"/>
+              <a:srgbClr val="D8DEDF"/>
             </a:solidFill>
             <a:prstDash val="solid"/>
           </a:ln>
         </p:spPr>
+      </p:sp>
+      <p:sp>
+        <p:nvSpPr>
+          <p:cNvPr id="4" name="">
+            <a:extLst xmlns:a="http://schemas.openxmlformats.org/drawingml/2006/main">
+              <a:ext uri="{FF2B5EF4-FFF2-40B4-BE49-F238E27FC236}">
+                <a16:creationId xmlns:a16="http://schemas.microsoft.com/office/drawing/2014/main" id="{CB1CECF4-79B8-4432-A1DA-16D57D2F62E3}"/>
+              </a:ext>
+            </a:extLst>
+          </p:cNvPr>
+          <p:cNvSpPr>
+            <a:spLocks xmlns:a="http://schemas.openxmlformats.org/drawingml/2006/main" noGrp="1"/>
+          </p:cNvSpPr>
+          <p:nvPr/>
+        </p:nvSpPr>
+        <p:spPr>
+          <a:xfrm xmlns:a="http://schemas.openxmlformats.org/drawingml/2006/main">
+            <a:off x="533400" y="6362700"/>
+            <a:ext cx="5334000" cy="228600"/>
+          </a:xfrm>
+          <a:prstGeom xmlns:a="http://schemas.openxmlformats.org/drawingml/2006/main" prst="rect">
+            <a:avLst/>
+          </a:prstGeom>
+          <a:noFill xmlns:a="http://schemas.openxmlformats.org/drawingml/2006/main"/>
+          <a:ln xmlns:a="http://schemas.openxmlformats.org/drawingml/2006/main" w="0">
+            <a:noFill/>
+            <a:prstDash val="solid"/>
+          </a:ln>
+        </p:spPr>
+        <p:txBody>
+          <a:bodyPr xmlns:a="http://schemas.openxmlformats.org/drawingml/2006/main"/>
+          <a:lstStyle xmlns:a="http://schemas.openxmlformats.org/drawingml/2006/main"/>
+          <a:p xmlns:a="http://schemas.openxmlformats.org/drawingml/2006/main">
+            <a:pPr>
+              <a:defRPr sz="1050" b="1">
+                <a:solidFill>
+                  <a:srgbClr val="536267"/>
+                </a:solidFill>
+              </a:defRPr>
+            </a:pPr>
+            <a:r>
+              <a:rPr sz="1050" b="1">
+                <a:solidFill>
+                  <a:srgbClr val="536267"/>
+                </a:solidFill>
+              </a:rPr>
+              <a:t>TrustTill | Hackaholics 7.0 | Financial Inclusion</a:t>
+            </a:r>
+          </a:p>
+        </p:txBody>
+      </p:sp>
+      <p:sp>
+        <p:nvSpPr>
+          <p:cNvPr id="5" name="">
+            <a:extLst xmlns:a="http://schemas.openxmlformats.org/drawingml/2006/main">
+              <a:ext uri="{FF2B5EF4-FFF2-40B4-BE49-F238E27FC236}">
+                <a16:creationId xmlns:a16="http://schemas.microsoft.com/office/drawing/2014/main" id="{2A9125AA-BCA7-40F6-B222-AC5D641E8F6E}"/>
+              </a:ext>
+            </a:extLst>
+          </p:cNvPr>
+          <p:cNvSpPr>
+            <a:spLocks xmlns:a="http://schemas.openxmlformats.org/drawingml/2006/main" noGrp="1"/>
+          </p:cNvSpPr>
+          <p:nvPr/>
+        </p:nvSpPr>
+        <p:spPr>
+          <a:xfrm xmlns:a="http://schemas.openxmlformats.org/drawingml/2006/main">
+            <a:off x="11315700" y="6362700"/>
+            <a:ext cx="342900" cy="228600"/>
+          </a:xfrm>
+          <a:prstGeom xmlns:a="http://schemas.openxmlformats.org/drawingml/2006/main" prst="rect">
+            <a:avLst/>
+          </a:prstGeom>
+          <a:noFill xmlns:a="http://schemas.openxmlformats.org/drawingml/2006/main"/>
+          <a:ln xmlns:a="http://schemas.openxmlformats.org/drawingml/2006/main" w="0">
+            <a:noFill/>
+            <a:prstDash val="solid"/>
+          </a:ln>
+        </p:spPr>
+        <p:txBody>
+          <a:bodyPr xmlns:a="http://schemas.openxmlformats.org/drawingml/2006/main"/>
+          <a:lstStyle xmlns:a="http://schemas.openxmlformats.org/drawingml/2006/main"/>
+          <a:p xmlns:a="http://schemas.openxmlformats.org/drawingml/2006/main">
+            <a:pPr algn="r">
+              <a:defRPr sz="1050" b="1">
+                <a:solidFill>
+                  <a:srgbClr val="536267"/>
+                </a:solidFill>
+              </a:defRPr>
+            </a:pPr>
+            <a:r>
+              <a:rPr sz="1050" b="1">
+                <a:solidFill>
+                  <a:srgbClr val="536267"/>
+                </a:solidFill>
+              </a:rPr>
+              <a:t>4</a:t>
+            </a:r>
+          </a:p>
+        </p:txBody>
       </p:sp>
       <p:pic>
         <p:nvPicPr>
-          <p:cNvPr id="13" name=""/>
+          <p:cNvPr id="16" name=""/>
           <p:cNvPicPr>
             <a:picLocks xmlns:a="http://schemas.openxmlformats.org/drawingml/2006/main" noChangeAspect="1"/>
           </p:cNvPicPr>
           <p:nvPr/>
         </p:nvPicPr>
         <p:blipFill>
-          <a:blip xmlns:r="http://schemas.openxmlformats.org/officeDocument/2006/relationships" xmlns:a="http://schemas.openxmlformats.org/drawingml/2006/main" r:embed="R1b42e7a0622247cb"/>
-          <a:srcRect xmlns:a="http://schemas.openxmlformats.org/drawingml/2006/main" l="0" t="33719" r="0" b="33719"/>
+          <a:blip xmlns:r="http://schemas.openxmlformats.org/officeDocument/2006/relationships" xmlns:a="http://schemas.openxmlformats.org/drawingml/2006/main" r:embed="R36682cbaa6b04666"/>
+          <a:srcRect xmlns:a="http://schemas.openxmlformats.org/drawingml/2006/main" l="0" t="25053" r="0" b="25053"/>
           <a:stretch xmlns:a="http://schemas.openxmlformats.org/drawingml/2006/main">
             <a:fillRect l="0" t="0" r="0" b="0"/>
           </a:stretch>
         </p:blipFill>
         <p:spPr>
           <a:xfrm xmlns:a="http://schemas.openxmlformats.org/drawingml/2006/main">
-            <a:off x="609600" y="2324100"/>
-            <a:ext cx="7239000" cy="3429000"/>
+            <a:off x="876300" y="2266950"/>
+            <a:ext cx="6572250" cy="3543300"/>
           </a:xfrm>
           <a:prstGeom xmlns:a="http://schemas.openxmlformats.org/drawingml/2006/main" prst="rect">
             <a:avLst/>
@@ -4291,22 +4247,22 @@
       </p:pic>
       <p:sp>
         <p:nvSpPr>
-          <p:cNvPr id="5" name="">
-            <a:extLst xmlns:a="http://schemas.openxmlformats.org/drawingml/2006/main">
-              <a:ext uri="{FF2B5EF4-FFF2-40B4-BE49-F238E27FC236}">
-                <a16:creationId xmlns:a16="http://schemas.microsoft.com/office/drawing/2014/main" id="{0DA5E637-FFB5-4C6B-9F8A-5187D00E1695}"/>
-              </a:ext>
-            </a:extLst>
-          </p:cNvPr>
-          <p:cNvSpPr>
-            <a:spLocks xmlns:a="http://schemas.openxmlformats.org/drawingml/2006/main" noGrp="1"/>
-          </p:cNvSpPr>
-          <p:nvPr/>
-        </p:nvSpPr>
-        <p:spPr>
-          <a:xfrm xmlns:a="http://schemas.openxmlformats.org/drawingml/2006/main">
-            <a:off x="8305800" y="2324100"/>
-            <a:ext cx="3105150" cy="3429000"/>
+          <p:cNvPr id="7" name="">
+            <a:extLst xmlns:a="http://schemas.openxmlformats.org/drawingml/2006/main">
+              <a:ext uri="{FF2B5EF4-FFF2-40B4-BE49-F238E27FC236}">
+                <a16:creationId xmlns:a16="http://schemas.microsoft.com/office/drawing/2014/main" id="{AB3D4990-1498-4DF8-AE42-559617501D42}"/>
+              </a:ext>
+            </a:extLst>
+          </p:cNvPr>
+          <p:cNvSpPr>
+            <a:spLocks xmlns:a="http://schemas.openxmlformats.org/drawingml/2006/main" noGrp="1"/>
+          </p:cNvSpPr>
+          <p:nvPr/>
+        </p:nvSpPr>
+        <p:spPr>
+          <a:xfrm xmlns:a="http://schemas.openxmlformats.org/drawingml/2006/main">
+            <a:off x="7943850" y="2266950"/>
+            <a:ext cx="3143250" cy="3543300"/>
           </a:xfrm>
           <a:prstGeom xmlns:a="http://schemas.openxmlformats.org/drawingml/2006/main" prst="rect">
             <a:avLst/>
@@ -4324,72 +4280,22 @@
       </p:sp>
       <p:sp>
         <p:nvSpPr>
-          <p:cNvPr id="6" name="">
-            <a:extLst xmlns:a="http://schemas.openxmlformats.org/drawingml/2006/main">
-              <a:ext uri="{FF2B5EF4-FFF2-40B4-BE49-F238E27FC236}">
-                <a16:creationId xmlns:a16="http://schemas.microsoft.com/office/drawing/2014/main" id="{ED919FC3-F98C-440E-B4E5-F443C7FAB6F0}"/>
-              </a:ext>
-            </a:extLst>
-          </p:cNvPr>
-          <p:cNvSpPr>
-            <a:spLocks xmlns:a="http://schemas.openxmlformats.org/drawingml/2006/main" noGrp="1"/>
-          </p:cNvSpPr>
-          <p:nvPr/>
-        </p:nvSpPr>
-        <p:spPr>
-          <a:xfrm xmlns:a="http://schemas.openxmlformats.org/drawingml/2006/main">
-            <a:off x="8591550" y="2628900"/>
-            <a:ext cx="2095500" cy="323850"/>
-          </a:xfrm>
-          <a:prstGeom xmlns:a="http://schemas.openxmlformats.org/drawingml/2006/main" prst="rect">
-            <a:avLst/>
-          </a:prstGeom>
-          <a:noFill xmlns:a="http://schemas.openxmlformats.org/drawingml/2006/main"/>
-          <a:ln xmlns:a="http://schemas.openxmlformats.org/drawingml/2006/main" w="0">
-            <a:noFill/>
-            <a:prstDash val="solid"/>
-          </a:ln>
-        </p:spPr>
-        <p:txBody>
-          <a:bodyPr xmlns:a="http://schemas.openxmlformats.org/drawingml/2006/main"/>
-          <a:lstStyle xmlns:a="http://schemas.openxmlformats.org/drawingml/2006/main"/>
-          <a:p xmlns:a="http://schemas.openxmlformats.org/drawingml/2006/main">
-            <a:pPr>
-              <a:defRPr sz="1500" b="1">
-                <a:solidFill>
-                  <a:srgbClr val="FFFFFF"/>
-                </a:solidFill>
-              </a:defRPr>
-            </a:pPr>
-            <a:r>
-              <a:rPr sz="1500" b="1">
-                <a:solidFill>
-                  <a:srgbClr val="FFFFFF"/>
-                </a:solidFill>
-              </a:rPr>
-              <a:t>Live demo proof</a:t>
-            </a:r>
-          </a:p>
-        </p:txBody>
-      </p:sp>
-      <p:sp>
-        <p:nvSpPr>
-          <p:cNvPr id="7" name="">
-            <a:extLst xmlns:a="http://schemas.openxmlformats.org/drawingml/2006/main">
-              <a:ext uri="{FF2B5EF4-FFF2-40B4-BE49-F238E27FC236}">
-                <a16:creationId xmlns:a16="http://schemas.microsoft.com/office/drawing/2014/main" id="{1AF99B13-A223-4BD2-82F0-3FA05F33EB81}"/>
-              </a:ext>
-            </a:extLst>
-          </p:cNvPr>
-          <p:cNvSpPr>
-            <a:spLocks xmlns:a="http://schemas.openxmlformats.org/drawingml/2006/main" noGrp="1"/>
-          </p:cNvSpPr>
-          <p:nvPr/>
-        </p:nvSpPr>
-        <p:spPr>
-          <a:xfrm xmlns:a="http://schemas.openxmlformats.org/drawingml/2006/main">
-            <a:off x="8591550" y="3219450"/>
-            <a:ext cx="2324100" cy="2000250"/>
+          <p:cNvPr id="8" name="">
+            <a:extLst xmlns:a="http://schemas.openxmlformats.org/drawingml/2006/main">
+              <a:ext uri="{FF2B5EF4-FFF2-40B4-BE49-F238E27FC236}">
+                <a16:creationId xmlns:a16="http://schemas.microsoft.com/office/drawing/2014/main" id="{36545B87-E663-4473-8E5A-32BBE9702B43}"/>
+              </a:ext>
+            </a:extLst>
+          </p:cNvPr>
+          <p:cNvSpPr>
+            <a:spLocks xmlns:a="http://schemas.openxmlformats.org/drawingml/2006/main" noGrp="1"/>
+          </p:cNvSpPr>
+          <p:nvPr/>
+        </p:nvSpPr>
+        <p:spPr>
+          <a:xfrm xmlns:a="http://schemas.openxmlformats.org/drawingml/2006/main">
+            <a:off x="8248650" y="2628900"/>
+            <a:ext cx="1905000" cy="323850"/>
           </a:xfrm>
           <a:prstGeom xmlns:a="http://schemas.openxmlformats.org/drawingml/2006/main" prst="rect">
             <a:avLst/>
@@ -4417,151 +4323,158 @@
                   <a:srgbClr val="FFFFFF"/>
                 </a:solidFill>
               </a:rPr>
-              <a:t>Paste a messy alert.</a:t>
-            </a:r>
-          </a:p>
-          <a:p xmlns:a="http://schemas.openxmlformats.org/drawingml/2006/main">
-            <a:r>
-              <a:t/>
-            </a:r>
-          </a:p>
+              <a:t>Demo loop</a:t>
+            </a:r>
+          </a:p>
+        </p:txBody>
+      </p:sp>
+      <p:sp>
+        <p:nvSpPr>
+          <p:cNvPr id="9" name="">
+            <a:extLst xmlns:a="http://schemas.openxmlformats.org/drawingml/2006/main">
+              <a:ext uri="{FF2B5EF4-FFF2-40B4-BE49-F238E27FC236}">
+                <a16:creationId xmlns:a16="http://schemas.microsoft.com/office/drawing/2014/main" id="{57B2CEF0-87D3-4D44-BE07-54D97E8578FF}"/>
+              </a:ext>
+            </a:extLst>
+          </p:cNvPr>
+          <p:cNvSpPr>
+            <a:spLocks xmlns:a="http://schemas.openxmlformats.org/drawingml/2006/main" noGrp="1"/>
+          </p:cNvSpPr>
+          <p:nvPr/>
+        </p:nvSpPr>
+        <p:spPr>
+          <a:xfrm xmlns:a="http://schemas.openxmlformats.org/drawingml/2006/main">
+            <a:off x="8267700" y="3276600"/>
+            <a:ext cx="2286000" cy="1695450"/>
+          </a:xfrm>
+          <a:prstGeom xmlns:a="http://schemas.openxmlformats.org/drawingml/2006/main" prst="rect">
+            <a:avLst/>
+          </a:prstGeom>
+          <a:noFill xmlns:a="http://schemas.openxmlformats.org/drawingml/2006/main"/>
+          <a:ln xmlns:a="http://schemas.openxmlformats.org/drawingml/2006/main" w="0">
+            <a:noFill/>
+            <a:prstDash val="solid"/>
+          </a:ln>
+        </p:spPr>
+        <p:txBody>
+          <a:bodyPr xmlns:a="http://schemas.openxmlformats.org/drawingml/2006/main"/>
+          <a:lstStyle xmlns:a="http://schemas.openxmlformats.org/drawingml/2006/main"/>
           <a:p xmlns:a="http://schemas.openxmlformats.org/drawingml/2006/main">
             <a:pPr>
-              <a:defRPr sz="1800" b="1">
+              <a:defRPr sz="2100" b="1">
                 <a:solidFill>
                   <a:srgbClr val="FFFFFF"/>
                 </a:solidFill>
               </a:defRPr>
             </a:pPr>
             <a:r>
-              <a:rPr sz="1800" b="1">
+              <a:rPr sz="2100" b="1">
                 <a:solidFill>
                   <a:srgbClr val="FFFFFF"/>
                 </a:solidFill>
               </a:rPr>
-              <a:t>TrustTill extracts the amount, customer, memo, and source.</a:t>
-            </a:r>
-          </a:p>
-          <a:p xmlns:a="http://schemas.openxmlformats.org/drawingml/2006/main">
-            <a:r>
-              <a:t/>
+              <a:t>Paste evidence</a:t>
             </a:r>
           </a:p>
           <a:p xmlns:a="http://schemas.openxmlformats.org/drawingml/2006/main">
             <a:pPr>
-              <a:defRPr sz="1800" b="1">
+              <a:defRPr sz="2100" b="1">
                 <a:solidFill>
                   <a:srgbClr val="FFFFFF"/>
                 </a:solidFill>
               </a:defRPr>
             </a:pPr>
             <a:r>
-              <a:rPr sz="1800" b="1">
+              <a:rPr sz="2100" b="1">
                 <a:solidFill>
                   <a:srgbClr val="FFFFFF"/>
                 </a:solidFill>
               </a:rPr>
-              <a:t>The risk engine updates review count and readiness.</a:t>
-            </a:r>
-          </a:p>
-        </p:txBody>
-      </p:sp>
-      <p:sp>
-        <p:nvSpPr>
-          <p:cNvPr id="8" name="">
-            <a:extLst xmlns:a="http://schemas.openxmlformats.org/drawingml/2006/main">
-              <a:ext uri="{FF2B5EF4-FFF2-40B4-BE49-F238E27FC236}">
-                <a16:creationId xmlns:a16="http://schemas.microsoft.com/office/drawing/2014/main" id="{DABA2BFF-C5B5-4665-A574-47726002C4B8}"/>
-              </a:ext>
-            </a:extLst>
-          </p:cNvPr>
-          <p:cNvSpPr>
-            <a:spLocks xmlns:a="http://schemas.openxmlformats.org/drawingml/2006/main" noGrp="1"/>
-          </p:cNvSpPr>
-          <p:nvPr/>
-        </p:nvSpPr>
-        <p:spPr>
-          <a:xfrm xmlns:a="http://schemas.openxmlformats.org/drawingml/2006/main">
-            <a:off x="400050" y="6362700"/>
-            <a:ext cx="5905500" cy="228600"/>
-          </a:xfrm>
-          <a:prstGeom xmlns:a="http://schemas.openxmlformats.org/drawingml/2006/main" prst="rect">
-            <a:avLst/>
-          </a:prstGeom>
-          <a:noFill xmlns:a="http://schemas.openxmlformats.org/drawingml/2006/main"/>
-          <a:ln xmlns:a="http://schemas.openxmlformats.org/drawingml/2006/main" w="0">
-            <a:noFill/>
-            <a:prstDash val="solid"/>
-          </a:ln>
-        </p:spPr>
-        <p:txBody>
-          <a:bodyPr xmlns:a="http://schemas.openxmlformats.org/drawingml/2006/main"/>
-          <a:lstStyle xmlns:a="http://schemas.openxmlformats.org/drawingml/2006/main"/>
+              <a:t>Parse record</a:t>
+            </a:r>
+          </a:p>
           <a:p xmlns:a="http://schemas.openxmlformats.org/drawingml/2006/main">
             <a:pPr>
-              <a:defRPr sz="1050" b="1">
-                <a:solidFill>
-                  <a:srgbClr val="59666A"/>
-                </a:solidFill>
-              </a:defRPr>
-            </a:pPr>
-            <a:r>
-              <a:rPr sz="1050" b="1">
-                <a:solidFill>
-                  <a:srgbClr val="59666A"/>
-                </a:solidFill>
-              </a:rPr>
-              <a:t>TrustTill | Hackaholics 7.0 | Financial Inclusion</a:t>
-            </a:r>
-          </a:p>
-        </p:txBody>
-      </p:sp>
-      <p:sp>
-        <p:nvSpPr>
-          <p:cNvPr id="9" name="">
-            <a:extLst xmlns:a="http://schemas.openxmlformats.org/drawingml/2006/main">
-              <a:ext uri="{FF2B5EF4-FFF2-40B4-BE49-F238E27FC236}">
-                <a16:creationId xmlns:a16="http://schemas.microsoft.com/office/drawing/2014/main" id="{5E049ACC-D642-4EA9-8D52-8937082CED4B}"/>
-              </a:ext>
-            </a:extLst>
-          </p:cNvPr>
-          <p:cNvSpPr>
-            <a:spLocks xmlns:a="http://schemas.openxmlformats.org/drawingml/2006/main" noGrp="1"/>
-          </p:cNvSpPr>
-          <p:nvPr/>
-        </p:nvSpPr>
-        <p:spPr>
-          <a:xfrm xmlns:a="http://schemas.openxmlformats.org/drawingml/2006/main">
-            <a:off x="11468100" y="6362700"/>
-            <a:ext cx="323850" cy="228600"/>
-          </a:xfrm>
-          <a:prstGeom xmlns:a="http://schemas.openxmlformats.org/drawingml/2006/main" prst="rect">
-            <a:avLst/>
-          </a:prstGeom>
-          <a:noFill xmlns:a="http://schemas.openxmlformats.org/drawingml/2006/main"/>
-          <a:ln xmlns:a="http://schemas.openxmlformats.org/drawingml/2006/main" w="0">
-            <a:noFill/>
-            <a:prstDash val="solid"/>
-          </a:ln>
-        </p:spPr>
-        <p:txBody>
-          <a:bodyPr xmlns:a="http://schemas.openxmlformats.org/drawingml/2006/main"/>
-          <a:lstStyle xmlns:a="http://schemas.openxmlformats.org/drawingml/2006/main"/>
-          <a:p xmlns:a="http://schemas.openxmlformats.org/drawingml/2006/main">
-            <a:pPr algn="r">
-              <a:defRPr sz="1050" b="1">
-                <a:solidFill>
-                  <a:srgbClr val="59666A"/>
-                </a:solidFill>
-              </a:defRPr>
-            </a:pPr>
-            <a:r>
-              <a:rPr sz="1050" b="1">
-                <a:solidFill>
-                  <a:srgbClr val="59666A"/>
-                </a:solidFill>
-              </a:rPr>
-              <a:t>4</a:t>
+              <a:defRPr sz="2100" b="1">
+                <a:solidFill>
+                  <a:srgbClr val="FFFFFF"/>
+                </a:solidFill>
+              </a:defRPr>
+            </a:pPr>
+            <a:r>
+              <a:rPr sz="2100" b="1">
+                <a:solidFill>
+                  <a:srgbClr val="FFFFFF"/>
+                </a:solidFill>
+              </a:rPr>
+              <a:t>Review flags</a:t>
+            </a:r>
+          </a:p>
+          <a:p xmlns:a="http://schemas.openxmlformats.org/drawingml/2006/main">
+            <a:pPr>
+              <a:defRPr sz="2100" b="1">
+                <a:solidFill>
+                  <a:srgbClr val="FFFFFF"/>
+                </a:solidFill>
+              </a:defRPr>
+            </a:pPr>
+            <a:r>
+              <a:rPr sz="2100" b="1">
+                <a:solidFill>
+                  <a:srgbClr val="FFFFFF"/>
+                </a:solidFill>
+              </a:rPr>
+              <a:t>Open Wema Desk</a:t>
+            </a:r>
+          </a:p>
+        </p:txBody>
+      </p:sp>
+      <p:sp>
+        <p:nvSpPr>
+          <p:cNvPr id="10" name="">
+            <a:extLst xmlns:a="http://schemas.openxmlformats.org/drawingml/2006/main">
+              <a:ext uri="{FF2B5EF4-FFF2-40B4-BE49-F238E27FC236}">
+                <a16:creationId xmlns:a16="http://schemas.microsoft.com/office/drawing/2014/main" id="{F3AD2657-545C-4811-9624-E70EA43793A2}"/>
+              </a:ext>
+            </a:extLst>
+          </p:cNvPr>
+          <p:cNvSpPr>
+            <a:spLocks xmlns:a="http://schemas.openxmlformats.org/drawingml/2006/main" noGrp="1"/>
+          </p:cNvSpPr>
+          <p:nvPr/>
+        </p:nvSpPr>
+        <p:spPr>
+          <a:xfrm xmlns:a="http://schemas.openxmlformats.org/drawingml/2006/main">
+            <a:off x="8267700" y="5334000"/>
+            <a:ext cx="2286000" cy="323850"/>
+          </a:xfrm>
+          <a:prstGeom xmlns:a="http://schemas.openxmlformats.org/drawingml/2006/main" prst="rect">
+            <a:avLst/>
+          </a:prstGeom>
+          <a:noFill xmlns:a="http://schemas.openxmlformats.org/drawingml/2006/main"/>
+          <a:ln xmlns:a="http://schemas.openxmlformats.org/drawingml/2006/main" w="0">
+            <a:noFill/>
+            <a:prstDash val="solid"/>
+          </a:ln>
+        </p:spPr>
+        <p:txBody>
+          <a:bodyPr xmlns:a="http://schemas.openxmlformats.org/drawingml/2006/main"/>
+          <a:lstStyle xmlns:a="http://schemas.openxmlformats.org/drawingml/2006/main"/>
+          <a:p xmlns:a="http://schemas.openxmlformats.org/drawingml/2006/main">
+            <a:pPr>
+              <a:defRPr sz="1425" b="0">
+                <a:solidFill>
+                  <a:srgbClr val="DCECED"/>
+                </a:solidFill>
+              </a:defRPr>
+            </a:pPr>
+            <a:r>
+              <a:rPr sz="1425" b="0">
+                <a:solidFill>
+                  <a:srgbClr val="DCECED"/>
+                </a:solidFill>
+              </a:rPr>
+              <a:t>Static now. API-first next.</a:t>
             </a:r>
           </a:p>
         </p:txBody>
@@ -4569,7 +4482,7 @@
     </p:spTree>
     <p:extLst>
       <p:ext uri="{BB962C8B-B14F-4D97-AF65-F5344CB8AC3E}">
-        <p14:creationId xmlns:p14="http://schemas.microsoft.com/office/powerpoint/2010/main" val="1688180560"/>
+        <p14:creationId xmlns:p14="http://schemas.microsoft.com/office/powerpoint/2010/main" val="1406344388"/>
       </p:ext>
     </p:extLst>
   </p:cSld>
@@ -4600,19 +4513,19 @@
           <p:cNvPr id="1" name="">
             <a:extLst xmlns:a="http://schemas.openxmlformats.org/drawingml/2006/main">
               <a:ext uri="{FF2B5EF4-FFF2-40B4-BE49-F238E27FC236}">
-                <a16:creationId xmlns:a16="http://schemas.microsoft.com/office/drawing/2014/main" id="{7D00FDF6-C19C-4FB4-99B4-F270C3097E01}"/>
-              </a:ext>
-            </a:extLst>
-          </p:cNvPr>
-          <p:cNvSpPr>
-            <a:spLocks xmlns:a="http://schemas.openxmlformats.org/drawingml/2006/main" noGrp="1"/>
-          </p:cNvSpPr>
-          <p:nvPr/>
-        </p:nvSpPr>
-        <p:spPr>
-          <a:xfrm xmlns:a="http://schemas.openxmlformats.org/drawingml/2006/main">
-            <a:off x="533400" y="514350"/>
-            <a:ext cx="8001000" cy="895350"/>
+                <a16:creationId xmlns:a16="http://schemas.microsoft.com/office/drawing/2014/main" id="{3F95FAEA-50FF-45CF-B2BE-71852A0B95F4}"/>
+              </a:ext>
+            </a:extLst>
+          </p:cNvPr>
+          <p:cNvSpPr>
+            <a:spLocks xmlns:a="http://schemas.openxmlformats.org/drawingml/2006/main" noGrp="1"/>
+          </p:cNvSpPr>
+          <p:nvPr/>
+        </p:nvSpPr>
+        <p:spPr>
+          <a:xfrm xmlns:a="http://schemas.openxmlformats.org/drawingml/2006/main">
+            <a:off x="533400" y="457200"/>
+            <a:ext cx="10287000" cy="819150"/>
           </a:xfrm>
           <a:prstGeom xmlns:a="http://schemas.openxmlformats.org/drawingml/2006/main" prst="rect">
             <a:avLst/>
@@ -4640,7 +4553,7 @@
                   <a:srgbClr val="101820"/>
                 </a:solidFill>
               </a:rPr>
-              <a:t>Wema gets a practical merchant pipeline</a:t>
+              <a:t>Wema gets a practical inclusion pipeline</a:t>
             </a:r>
           </a:p>
         </p:txBody>
@@ -4650,19 +4563,19 @@
           <p:cNvPr id="2" name="">
             <a:extLst xmlns:a="http://schemas.openxmlformats.org/drawingml/2006/main">
               <a:ext uri="{FF2B5EF4-FFF2-40B4-BE49-F238E27FC236}">
-                <a16:creationId xmlns:a16="http://schemas.microsoft.com/office/drawing/2014/main" id="{202BAD16-92E7-4E4B-B2FC-6FB85D7F673B}"/>
-              </a:ext>
-            </a:extLst>
-          </p:cNvPr>
-          <p:cNvSpPr>
-            <a:spLocks xmlns:a="http://schemas.openxmlformats.org/drawingml/2006/main" noGrp="1"/>
-          </p:cNvSpPr>
-          <p:nvPr/>
-        </p:nvSpPr>
-        <p:spPr>
-          <a:xfrm xmlns:a="http://schemas.openxmlformats.org/drawingml/2006/main">
-            <a:off x="552450" y="1352550"/>
-            <a:ext cx="6667500" cy="514350"/>
+                <a16:creationId xmlns:a16="http://schemas.microsoft.com/office/drawing/2014/main" id="{92EABD2B-D66A-40A0-A731-4F7FA4086D50}"/>
+              </a:ext>
+            </a:extLst>
+          </p:cNvPr>
+          <p:cNvSpPr>
+            <a:spLocks xmlns:a="http://schemas.openxmlformats.org/drawingml/2006/main" noGrp="1"/>
+          </p:cNvSpPr>
+          <p:nvPr/>
+        </p:nvSpPr>
+        <p:spPr>
+          <a:xfrm xmlns:a="http://schemas.openxmlformats.org/drawingml/2006/main">
+            <a:off x="552450" y="1333500"/>
+            <a:ext cx="8763000" cy="400050"/>
           </a:xfrm>
           <a:prstGeom xmlns:a="http://schemas.openxmlformats.org/drawingml/2006/main" prst="rect">
             <a:avLst/>
@@ -4678,19 +4591,19 @@
           <a:lstStyle xmlns:a="http://schemas.openxmlformats.org/drawingml/2006/main"/>
           <a:p xmlns:a="http://schemas.openxmlformats.org/drawingml/2006/main">
             <a:pPr>
-              <a:defRPr sz="1650" b="0">
-                <a:solidFill>
-                  <a:srgbClr val="59666A"/>
-                </a:solidFill>
-              </a:defRPr>
-            </a:pPr>
-            <a:r>
-              <a:rPr sz="1650" b="0">
-                <a:solidFill>
-                  <a:srgbClr val="59666A"/>
-                </a:solidFill>
-              </a:rPr>
-              <a:t>The same evidence that helps a merchant also helps Wema decide what support comes next.</a:t>
+              <a:defRPr sz="1800" b="0">
+                <a:solidFill>
+                  <a:srgbClr val="536267"/>
+                </a:solidFill>
+              </a:defRPr>
+            </a:pPr>
+            <a:r>
+              <a:rPr sz="1800" b="0">
+                <a:solidFill>
+                  <a:srgbClr val="536267"/>
+                </a:solidFill>
+              </a:rPr>
+              <a:t>TrustTill connects social impact to a bankable SME acquisition path.</a:t>
             </a:r>
           </a:p>
         </p:txBody>
@@ -4700,19 +4613,19 @@
           <p:cNvPr id="3" name="">
             <a:extLst xmlns:a="http://schemas.openxmlformats.org/drawingml/2006/main">
               <a:ext uri="{FF2B5EF4-FFF2-40B4-BE49-F238E27FC236}">
-                <a16:creationId xmlns:a16="http://schemas.microsoft.com/office/drawing/2014/main" id="{F89648F9-BBDF-4988-97A4-C9D794FBDD1C}"/>
-              </a:ext>
-            </a:extLst>
-          </p:cNvPr>
-          <p:cNvSpPr>
-            <a:spLocks xmlns:a="http://schemas.openxmlformats.org/drawingml/2006/main" noGrp="1"/>
-          </p:cNvSpPr>
-          <p:nvPr/>
-        </p:nvSpPr>
-        <p:spPr>
-          <a:xfrm xmlns:a="http://schemas.openxmlformats.org/drawingml/2006/main">
-            <a:off x="533400" y="1943100"/>
-            <a:ext cx="10572750" cy="0"/>
+                <a16:creationId xmlns:a16="http://schemas.microsoft.com/office/drawing/2014/main" id="{F56EA71A-57FA-453F-B0FD-C661BD9E0FD4}"/>
+              </a:ext>
+            </a:extLst>
+          </p:cNvPr>
+          <p:cNvSpPr>
+            <a:spLocks xmlns:a="http://schemas.openxmlformats.org/drawingml/2006/main" noGrp="1"/>
+          </p:cNvSpPr>
+          <p:nvPr/>
+        </p:nvSpPr>
+        <p:spPr>
+          <a:xfrm xmlns:a="http://schemas.openxmlformats.org/drawingml/2006/main">
+            <a:off x="533400" y="2000250"/>
+            <a:ext cx="10591800" cy="0"/>
           </a:xfrm>
           <a:prstGeom xmlns:a="http://schemas.openxmlformats.org/drawingml/2006/main" prst="line">
             <a:avLst/>
@@ -4720,7 +4633,7 @@
           <a:noFill xmlns:a="http://schemas.openxmlformats.org/drawingml/2006/main"/>
           <a:ln xmlns:a="http://schemas.openxmlformats.org/drawingml/2006/main" w="13335">
             <a:solidFill>
-              <a:srgbClr val="C8D1D2"/>
+              <a:srgbClr val="D8DEDF"/>
             </a:solidFill>
             <a:prstDash val="solid"/>
           </a:ln>
@@ -4731,19 +4644,19 @@
           <p:cNvPr id="4" name="">
             <a:extLst xmlns:a="http://schemas.openxmlformats.org/drawingml/2006/main">
               <a:ext uri="{FF2B5EF4-FFF2-40B4-BE49-F238E27FC236}">
-                <a16:creationId xmlns:a16="http://schemas.microsoft.com/office/drawing/2014/main" id="{AF4B4446-8181-465D-9A50-6F64BD89C68E}"/>
-              </a:ext>
-            </a:extLst>
-          </p:cNvPr>
-          <p:cNvSpPr>
-            <a:spLocks xmlns:a="http://schemas.openxmlformats.org/drawingml/2006/main" noGrp="1"/>
-          </p:cNvSpPr>
-          <p:nvPr/>
-        </p:nvSpPr>
-        <p:spPr>
-          <a:xfrm xmlns:a="http://schemas.openxmlformats.org/drawingml/2006/main">
-            <a:off x="838200" y="2305050"/>
-            <a:ext cx="1524000" cy="323850"/>
+                <a16:creationId xmlns:a16="http://schemas.microsoft.com/office/drawing/2014/main" id="{DD4E468A-464F-4850-86E3-1F119E321F14}"/>
+              </a:ext>
+            </a:extLst>
+          </p:cNvPr>
+          <p:cNvSpPr>
+            <a:spLocks xmlns:a="http://schemas.openxmlformats.org/drawingml/2006/main" noGrp="1"/>
+          </p:cNvSpPr>
+          <p:nvPr/>
+        </p:nvSpPr>
+        <p:spPr>
+          <a:xfrm xmlns:a="http://schemas.openxmlformats.org/drawingml/2006/main">
+            <a:off x="533400" y="6362700"/>
+            <a:ext cx="5334000" cy="228600"/>
           </a:xfrm>
           <a:prstGeom xmlns:a="http://schemas.openxmlformats.org/drawingml/2006/main" prst="rect">
             <a:avLst/>
@@ -4759,19 +4672,19 @@
           <a:lstStyle xmlns:a="http://schemas.openxmlformats.org/drawingml/2006/main"/>
           <a:p xmlns:a="http://schemas.openxmlformats.org/drawingml/2006/main">
             <a:pPr>
-              <a:defRPr sz="2100" b="1">
-                <a:solidFill>
-                  <a:srgbClr val="DE1A4C"/>
-                </a:solidFill>
-              </a:defRPr>
-            </a:pPr>
-            <a:r>
-              <a:rPr sz="2100" b="1">
-                <a:solidFill>
-                  <a:srgbClr val="DE1A4C"/>
-                </a:solidFill>
-              </a:rPr>
-              <a:t>Onboard</a:t>
+              <a:defRPr sz="1050" b="1">
+                <a:solidFill>
+                  <a:srgbClr val="536267"/>
+                </a:solidFill>
+              </a:defRPr>
+            </a:pPr>
+            <a:r>
+              <a:rPr sz="1050" b="1">
+                <a:solidFill>
+                  <a:srgbClr val="536267"/>
+                </a:solidFill>
+              </a:rPr>
+              <a:t>TrustTill | Hackaholics 7.0 | Financial Inclusion</a:t>
             </a:r>
           </a:p>
         </p:txBody>
@@ -4781,503 +4694,79 @@
           <p:cNvPr id="5" name="">
             <a:extLst xmlns:a="http://schemas.openxmlformats.org/drawingml/2006/main">
               <a:ext uri="{FF2B5EF4-FFF2-40B4-BE49-F238E27FC236}">
-                <a16:creationId xmlns:a16="http://schemas.microsoft.com/office/drawing/2014/main" id="{3A1CD04C-68BD-48DA-A7AF-0FF673047221}"/>
-              </a:ext>
-            </a:extLst>
-          </p:cNvPr>
-          <p:cNvSpPr>
-            <a:spLocks xmlns:a="http://schemas.openxmlformats.org/drawingml/2006/main" noGrp="1"/>
-          </p:cNvSpPr>
-          <p:nvPr/>
-        </p:nvSpPr>
-        <p:spPr>
-          <a:xfrm xmlns:a="http://schemas.openxmlformats.org/drawingml/2006/main">
-            <a:off x="2514600" y="2466975"/>
-            <a:ext cx="666750" cy="0"/>
-          </a:xfrm>
-          <a:prstGeom xmlns:a="http://schemas.openxmlformats.org/drawingml/2006/main" prst="line">
-            <a:avLst/>
-          </a:prstGeom>
-          <a:noFill xmlns:a="http://schemas.openxmlformats.org/drawingml/2006/main"/>
-          <a:ln xmlns:a="http://schemas.openxmlformats.org/drawingml/2006/main" w="13335">
-            <a:solidFill>
-              <a:srgbClr val="C8D1D2"/>
-            </a:solidFill>
-            <a:prstDash val="solid"/>
-          </a:ln>
-        </p:spPr>
+                <a16:creationId xmlns:a16="http://schemas.microsoft.com/office/drawing/2014/main" id="{995051D6-F465-4B72-98DA-17408ED7689B}"/>
+              </a:ext>
+            </a:extLst>
+          </p:cNvPr>
+          <p:cNvSpPr>
+            <a:spLocks xmlns:a="http://schemas.openxmlformats.org/drawingml/2006/main" noGrp="1"/>
+          </p:cNvSpPr>
+          <p:nvPr/>
+        </p:nvSpPr>
+        <p:spPr>
+          <a:xfrm xmlns:a="http://schemas.openxmlformats.org/drawingml/2006/main">
+            <a:off x="11315700" y="6362700"/>
+            <a:ext cx="342900" cy="228600"/>
+          </a:xfrm>
+          <a:prstGeom xmlns:a="http://schemas.openxmlformats.org/drawingml/2006/main" prst="rect">
+            <a:avLst/>
+          </a:prstGeom>
+          <a:noFill xmlns:a="http://schemas.openxmlformats.org/drawingml/2006/main"/>
+          <a:ln xmlns:a="http://schemas.openxmlformats.org/drawingml/2006/main" w="0">
+            <a:noFill/>
+            <a:prstDash val="solid"/>
+          </a:ln>
+        </p:spPr>
+        <p:txBody>
+          <a:bodyPr xmlns:a="http://schemas.openxmlformats.org/drawingml/2006/main"/>
+          <a:lstStyle xmlns:a="http://schemas.openxmlformats.org/drawingml/2006/main"/>
+          <a:p xmlns:a="http://schemas.openxmlformats.org/drawingml/2006/main">
+            <a:pPr algn="r">
+              <a:defRPr sz="1050" b="1">
+                <a:solidFill>
+                  <a:srgbClr val="536267"/>
+                </a:solidFill>
+              </a:defRPr>
+            </a:pPr>
+            <a:r>
+              <a:rPr sz="1050" b="1">
+                <a:solidFill>
+                  <a:srgbClr val="536267"/>
+                </a:solidFill>
+              </a:rPr>
+              <a:t>5</a:t>
+            </a:r>
+          </a:p>
+        </p:txBody>
       </p:sp>
       <p:sp>
         <p:nvSpPr>
           <p:cNvPr id="6" name="">
             <a:extLst xmlns:a="http://schemas.openxmlformats.org/drawingml/2006/main">
               <a:ext uri="{FF2B5EF4-FFF2-40B4-BE49-F238E27FC236}">
-                <a16:creationId xmlns:a16="http://schemas.microsoft.com/office/drawing/2014/main" id="{86C1EC15-5F70-4A11-8E7A-6C67981F475C}"/>
-              </a:ext>
-            </a:extLst>
-          </p:cNvPr>
-          <p:cNvSpPr>
-            <a:spLocks xmlns:a="http://schemas.openxmlformats.org/drawingml/2006/main" noGrp="1"/>
-          </p:cNvSpPr>
-          <p:nvPr/>
-        </p:nvSpPr>
-        <p:spPr>
-          <a:xfrm xmlns:a="http://schemas.openxmlformats.org/drawingml/2006/main">
-            <a:off x="3429000" y="2286000"/>
-            <a:ext cx="6191250" cy="419100"/>
-          </a:xfrm>
-          <a:prstGeom xmlns:a="http://schemas.openxmlformats.org/drawingml/2006/main" prst="rect">
-            <a:avLst/>
-          </a:prstGeom>
-          <a:noFill xmlns:a="http://schemas.openxmlformats.org/drawingml/2006/main"/>
-          <a:ln xmlns:a="http://schemas.openxmlformats.org/drawingml/2006/main" w="0">
-            <a:noFill/>
-            <a:prstDash val="solid"/>
-          </a:ln>
-        </p:spPr>
-        <p:txBody>
-          <a:bodyPr xmlns:a="http://schemas.openxmlformats.org/drawingml/2006/main"/>
-          <a:lstStyle xmlns:a="http://schemas.openxmlformats.org/drawingml/2006/main"/>
-          <a:p xmlns:a="http://schemas.openxmlformats.org/drawingml/2006/main">
-            <a:pPr>
-              <a:defRPr sz="1875" b="0">
-                <a:solidFill>
-                  <a:srgbClr val="101820"/>
-                </a:solidFill>
-              </a:defRPr>
-            </a:pPr>
-            <a:r>
-              <a:rPr sz="1875" b="0">
-                <a:solidFill>
-                  <a:srgbClr val="101820"/>
-                </a:solidFill>
-              </a:rPr>
-              <a:t>Invite promising merchants into ALAT or SME banking.</a:t>
-            </a:r>
-          </a:p>
-        </p:txBody>
-      </p:sp>
-      <p:sp>
-        <p:nvSpPr>
-          <p:cNvPr id="7" name="">
-            <a:extLst xmlns:a="http://schemas.openxmlformats.org/drawingml/2006/main">
-              <a:ext uri="{FF2B5EF4-FFF2-40B4-BE49-F238E27FC236}">
-                <a16:creationId xmlns:a16="http://schemas.microsoft.com/office/drawing/2014/main" id="{E521486B-D93C-4F2F-BDD1-EC998E1D343C}"/>
-              </a:ext>
-            </a:extLst>
-          </p:cNvPr>
-          <p:cNvSpPr>
-            <a:spLocks xmlns:a="http://schemas.openxmlformats.org/drawingml/2006/main" noGrp="1"/>
-          </p:cNvSpPr>
-          <p:nvPr/>
-        </p:nvSpPr>
-        <p:spPr>
-          <a:xfrm xmlns:a="http://schemas.openxmlformats.org/drawingml/2006/main">
-            <a:off x="838200" y="3105150"/>
-            <a:ext cx="1524000" cy="323850"/>
-          </a:xfrm>
-          <a:prstGeom xmlns:a="http://schemas.openxmlformats.org/drawingml/2006/main" prst="rect">
-            <a:avLst/>
-          </a:prstGeom>
-          <a:noFill xmlns:a="http://schemas.openxmlformats.org/drawingml/2006/main"/>
-          <a:ln xmlns:a="http://schemas.openxmlformats.org/drawingml/2006/main" w="0">
-            <a:noFill/>
-            <a:prstDash val="solid"/>
-          </a:ln>
-        </p:spPr>
-        <p:txBody>
-          <a:bodyPr xmlns:a="http://schemas.openxmlformats.org/drawingml/2006/main"/>
-          <a:lstStyle xmlns:a="http://schemas.openxmlformats.org/drawingml/2006/main"/>
-          <a:p xmlns:a="http://schemas.openxmlformats.org/drawingml/2006/main">
-            <a:pPr>
-              <a:defRPr sz="2100" b="1">
-                <a:solidFill>
-                  <a:srgbClr val="003D48"/>
-                </a:solidFill>
-              </a:defRPr>
-            </a:pPr>
-            <a:r>
-              <a:rPr sz="2100" b="1">
-                <a:solidFill>
-                  <a:srgbClr val="003D48"/>
-                </a:solidFill>
-              </a:rPr>
-              <a:t>Support</a:t>
-            </a:r>
-          </a:p>
-        </p:txBody>
-      </p:sp>
-      <p:sp>
-        <p:nvSpPr>
-          <p:cNvPr id="8" name="">
-            <a:extLst xmlns:a="http://schemas.openxmlformats.org/drawingml/2006/main">
-              <a:ext uri="{FF2B5EF4-FFF2-40B4-BE49-F238E27FC236}">
-                <a16:creationId xmlns:a16="http://schemas.microsoft.com/office/drawing/2014/main" id="{472F8B19-A1F1-4BD2-9EE7-222ABBA153D4}"/>
-              </a:ext>
-            </a:extLst>
-          </p:cNvPr>
-          <p:cNvSpPr>
-            <a:spLocks xmlns:a="http://schemas.openxmlformats.org/drawingml/2006/main" noGrp="1"/>
-          </p:cNvSpPr>
-          <p:nvPr/>
-        </p:nvSpPr>
-        <p:spPr>
-          <a:xfrm xmlns:a="http://schemas.openxmlformats.org/drawingml/2006/main">
-            <a:off x="2514600" y="3267075"/>
-            <a:ext cx="666750" cy="0"/>
-          </a:xfrm>
-          <a:prstGeom xmlns:a="http://schemas.openxmlformats.org/drawingml/2006/main" prst="line">
-            <a:avLst/>
-          </a:prstGeom>
-          <a:noFill xmlns:a="http://schemas.openxmlformats.org/drawingml/2006/main"/>
-          <a:ln xmlns:a="http://schemas.openxmlformats.org/drawingml/2006/main" w="13335">
-            <a:solidFill>
-              <a:srgbClr val="C8D1D2"/>
-            </a:solidFill>
-            <a:prstDash val="solid"/>
-          </a:ln>
-        </p:spPr>
-      </p:sp>
-      <p:sp>
-        <p:nvSpPr>
-          <p:cNvPr id="9" name="">
-            <a:extLst xmlns:a="http://schemas.openxmlformats.org/drawingml/2006/main">
-              <a:ext uri="{FF2B5EF4-FFF2-40B4-BE49-F238E27FC236}">
-                <a16:creationId xmlns:a16="http://schemas.microsoft.com/office/drawing/2014/main" id="{27CEE192-3D33-4D29-BE7D-F012992FC13F}"/>
-              </a:ext>
-            </a:extLst>
-          </p:cNvPr>
-          <p:cNvSpPr>
-            <a:spLocks xmlns:a="http://schemas.openxmlformats.org/drawingml/2006/main" noGrp="1"/>
-          </p:cNvSpPr>
-          <p:nvPr/>
-        </p:nvSpPr>
-        <p:spPr>
-          <a:xfrm xmlns:a="http://schemas.openxmlformats.org/drawingml/2006/main">
-            <a:off x="3429000" y="3086100"/>
-            <a:ext cx="6191250" cy="419100"/>
-          </a:xfrm>
-          <a:prstGeom xmlns:a="http://schemas.openxmlformats.org/drawingml/2006/main" prst="rect">
-            <a:avLst/>
-          </a:prstGeom>
-          <a:noFill xmlns:a="http://schemas.openxmlformats.org/drawingml/2006/main"/>
-          <a:ln xmlns:a="http://schemas.openxmlformats.org/drawingml/2006/main" w="0">
-            <a:noFill/>
-            <a:prstDash val="solid"/>
-          </a:ln>
-        </p:spPr>
-        <p:txBody>
-          <a:bodyPr xmlns:a="http://schemas.openxmlformats.org/drawingml/2006/main"/>
-          <a:lstStyle xmlns:a="http://schemas.openxmlformats.org/drawingml/2006/main"/>
-          <a:p xmlns:a="http://schemas.openxmlformats.org/drawingml/2006/main">
-            <a:pPr>
-              <a:defRPr sz="1875" b="0">
-                <a:solidFill>
-                  <a:srgbClr val="101820"/>
-                </a:solidFill>
-              </a:defRPr>
-            </a:pPr>
-            <a:r>
-              <a:rPr sz="1875" b="0">
-                <a:solidFill>
-                  <a:srgbClr val="101820"/>
-                </a:solidFill>
-              </a:rPr>
-              <a:t>Recommend savings discipline and cleaner business records.</a:t>
-            </a:r>
-          </a:p>
-        </p:txBody>
-      </p:sp>
-      <p:sp>
-        <p:nvSpPr>
-          <p:cNvPr id="10" name="">
-            <a:extLst xmlns:a="http://schemas.openxmlformats.org/drawingml/2006/main">
-              <a:ext uri="{FF2B5EF4-FFF2-40B4-BE49-F238E27FC236}">
-                <a16:creationId xmlns:a16="http://schemas.microsoft.com/office/drawing/2014/main" id="{FCC4D643-4E79-4609-8119-FF45B34227FA}"/>
-              </a:ext>
-            </a:extLst>
-          </p:cNvPr>
-          <p:cNvSpPr>
-            <a:spLocks xmlns:a="http://schemas.openxmlformats.org/drawingml/2006/main" noGrp="1"/>
-          </p:cNvSpPr>
-          <p:nvPr/>
-        </p:nvSpPr>
-        <p:spPr>
-          <a:xfrm xmlns:a="http://schemas.openxmlformats.org/drawingml/2006/main">
-            <a:off x="838200" y="3905250"/>
-            <a:ext cx="1524000" cy="323850"/>
-          </a:xfrm>
-          <a:prstGeom xmlns:a="http://schemas.openxmlformats.org/drawingml/2006/main" prst="rect">
-            <a:avLst/>
-          </a:prstGeom>
-          <a:noFill xmlns:a="http://schemas.openxmlformats.org/drawingml/2006/main"/>
-          <a:ln xmlns:a="http://schemas.openxmlformats.org/drawingml/2006/main" w="0">
-            <a:noFill/>
-            <a:prstDash val="solid"/>
-          </a:ln>
-        </p:spPr>
-        <p:txBody>
-          <a:bodyPr xmlns:a="http://schemas.openxmlformats.org/drawingml/2006/main"/>
-          <a:lstStyle xmlns:a="http://schemas.openxmlformats.org/drawingml/2006/main"/>
-          <a:p xmlns:a="http://schemas.openxmlformats.org/drawingml/2006/main">
-            <a:pPr>
-              <a:defRPr sz="2100" b="1">
-                <a:solidFill>
-                  <a:srgbClr val="003D48"/>
-                </a:solidFill>
-              </a:defRPr>
-            </a:pPr>
-            <a:r>
-              <a:rPr sz="2100" b="1">
-                <a:solidFill>
-                  <a:srgbClr val="003D48"/>
-                </a:solidFill>
-              </a:rPr>
-              <a:t>Review</a:t>
-            </a:r>
-          </a:p>
-        </p:txBody>
-      </p:sp>
-      <p:sp>
-        <p:nvSpPr>
-          <p:cNvPr id="11" name="">
-            <a:extLst xmlns:a="http://schemas.openxmlformats.org/drawingml/2006/main">
-              <a:ext uri="{FF2B5EF4-FFF2-40B4-BE49-F238E27FC236}">
-                <a16:creationId xmlns:a16="http://schemas.microsoft.com/office/drawing/2014/main" id="{80487433-CD29-4FAD-B345-5278DAA378A9}"/>
-              </a:ext>
-            </a:extLst>
-          </p:cNvPr>
-          <p:cNvSpPr>
-            <a:spLocks xmlns:a="http://schemas.openxmlformats.org/drawingml/2006/main" noGrp="1"/>
-          </p:cNvSpPr>
-          <p:nvPr/>
-        </p:nvSpPr>
-        <p:spPr>
-          <a:xfrm xmlns:a="http://schemas.openxmlformats.org/drawingml/2006/main">
-            <a:off x="2514600" y="4067175"/>
-            <a:ext cx="666750" cy="0"/>
-          </a:xfrm>
-          <a:prstGeom xmlns:a="http://schemas.openxmlformats.org/drawingml/2006/main" prst="line">
-            <a:avLst/>
-          </a:prstGeom>
-          <a:noFill xmlns:a="http://schemas.openxmlformats.org/drawingml/2006/main"/>
-          <a:ln xmlns:a="http://schemas.openxmlformats.org/drawingml/2006/main" w="13335">
-            <a:solidFill>
-              <a:srgbClr val="C8D1D2"/>
-            </a:solidFill>
-            <a:prstDash val="solid"/>
-          </a:ln>
-        </p:spPr>
-      </p:sp>
-      <p:sp>
-        <p:nvSpPr>
-          <p:cNvPr id="12" name="">
-            <a:extLst xmlns:a="http://schemas.openxmlformats.org/drawingml/2006/main">
-              <a:ext uri="{FF2B5EF4-FFF2-40B4-BE49-F238E27FC236}">
-                <a16:creationId xmlns:a16="http://schemas.microsoft.com/office/drawing/2014/main" id="{B1E2A92A-13E0-4D1C-B382-8EBB9345AEE4}"/>
-              </a:ext>
-            </a:extLst>
-          </p:cNvPr>
-          <p:cNvSpPr>
-            <a:spLocks xmlns:a="http://schemas.openxmlformats.org/drawingml/2006/main" noGrp="1"/>
-          </p:cNvSpPr>
-          <p:nvPr/>
-        </p:nvSpPr>
-        <p:spPr>
-          <a:xfrm xmlns:a="http://schemas.openxmlformats.org/drawingml/2006/main">
-            <a:off x="3429000" y="3886200"/>
-            <a:ext cx="6191250" cy="419100"/>
-          </a:xfrm>
-          <a:prstGeom xmlns:a="http://schemas.openxmlformats.org/drawingml/2006/main" prst="rect">
-            <a:avLst/>
-          </a:prstGeom>
-          <a:noFill xmlns:a="http://schemas.openxmlformats.org/drawingml/2006/main"/>
-          <a:ln xmlns:a="http://schemas.openxmlformats.org/drawingml/2006/main" w="0">
-            <a:noFill/>
-            <a:prstDash val="solid"/>
-          </a:ln>
-        </p:spPr>
-        <p:txBody>
-          <a:bodyPr xmlns:a="http://schemas.openxmlformats.org/drawingml/2006/main"/>
-          <a:lstStyle xmlns:a="http://schemas.openxmlformats.org/drawingml/2006/main"/>
-          <a:p xmlns:a="http://schemas.openxmlformats.org/drawingml/2006/main">
-            <a:pPr>
-              <a:defRPr sz="1875" b="0">
-                <a:solidFill>
-                  <a:srgbClr val="101820"/>
-                </a:solidFill>
-              </a:defRPr>
-            </a:pPr>
-            <a:r>
-              <a:rPr sz="1875" b="0">
-                <a:solidFill>
-                  <a:srgbClr val="101820"/>
-                </a:solidFill>
-              </a:rPr>
-              <a:t>Use transparent risk flags before any credit conversation.</a:t>
-            </a:r>
-          </a:p>
-        </p:txBody>
-      </p:sp>
-      <p:sp>
-        <p:nvSpPr>
-          <p:cNvPr id="13" name="">
-            <a:extLst xmlns:a="http://schemas.openxmlformats.org/drawingml/2006/main">
-              <a:ext uri="{FF2B5EF4-FFF2-40B4-BE49-F238E27FC236}">
-                <a16:creationId xmlns:a16="http://schemas.microsoft.com/office/drawing/2014/main" id="{800A6759-AE81-4A8F-9C22-DFD9CC20E8D6}"/>
-              </a:ext>
-            </a:extLst>
-          </p:cNvPr>
-          <p:cNvSpPr>
-            <a:spLocks xmlns:a="http://schemas.openxmlformats.org/drawingml/2006/main" noGrp="1"/>
-          </p:cNvSpPr>
-          <p:nvPr/>
-        </p:nvSpPr>
-        <p:spPr>
-          <a:xfrm xmlns:a="http://schemas.openxmlformats.org/drawingml/2006/main">
-            <a:off x="838200" y="4705350"/>
-            <a:ext cx="1524000" cy="323850"/>
-          </a:xfrm>
-          <a:prstGeom xmlns:a="http://schemas.openxmlformats.org/drawingml/2006/main" prst="rect">
-            <a:avLst/>
-          </a:prstGeom>
-          <a:noFill xmlns:a="http://schemas.openxmlformats.org/drawingml/2006/main"/>
-          <a:ln xmlns:a="http://schemas.openxmlformats.org/drawingml/2006/main" w="0">
-            <a:noFill/>
-            <a:prstDash val="solid"/>
-          </a:ln>
-        </p:spPr>
-        <p:txBody>
-          <a:bodyPr xmlns:a="http://schemas.openxmlformats.org/drawingml/2006/main"/>
-          <a:lstStyle xmlns:a="http://schemas.openxmlformats.org/drawingml/2006/main"/>
-          <a:p xmlns:a="http://schemas.openxmlformats.org/drawingml/2006/main">
-            <a:pPr>
-              <a:defRPr sz="2100" b="1">
-                <a:solidFill>
-                  <a:srgbClr val="003D48"/>
-                </a:solidFill>
-              </a:defRPr>
-            </a:pPr>
-            <a:r>
-              <a:rPr sz="2100" b="1">
-                <a:solidFill>
-                  <a:srgbClr val="003D48"/>
-                </a:solidFill>
-              </a:rPr>
-              <a:t>Pilot</a:t>
-            </a:r>
-          </a:p>
-        </p:txBody>
-      </p:sp>
-      <p:sp>
-        <p:nvSpPr>
-          <p:cNvPr id="14" name="">
-            <a:extLst xmlns:a="http://schemas.openxmlformats.org/drawingml/2006/main">
-              <a:ext uri="{FF2B5EF4-FFF2-40B4-BE49-F238E27FC236}">
-                <a16:creationId xmlns:a16="http://schemas.microsoft.com/office/drawing/2014/main" id="{3359F5F5-C336-4C6C-97D8-8A16C2ACE624}"/>
-              </a:ext>
-            </a:extLst>
-          </p:cNvPr>
-          <p:cNvSpPr>
-            <a:spLocks xmlns:a="http://schemas.openxmlformats.org/drawingml/2006/main" noGrp="1"/>
-          </p:cNvSpPr>
-          <p:nvPr/>
-        </p:nvSpPr>
-        <p:spPr>
-          <a:xfrm xmlns:a="http://schemas.openxmlformats.org/drawingml/2006/main">
-            <a:off x="2514600" y="4867275"/>
-            <a:ext cx="666750" cy="0"/>
-          </a:xfrm>
-          <a:prstGeom xmlns:a="http://schemas.openxmlformats.org/drawingml/2006/main" prst="line">
-            <a:avLst/>
-          </a:prstGeom>
-          <a:noFill xmlns:a="http://schemas.openxmlformats.org/drawingml/2006/main"/>
-          <a:ln xmlns:a="http://schemas.openxmlformats.org/drawingml/2006/main" w="13335">
-            <a:solidFill>
-              <a:srgbClr val="C8D1D2"/>
-            </a:solidFill>
-            <a:prstDash val="solid"/>
-          </a:ln>
-        </p:spPr>
-      </p:sp>
-      <p:sp>
-        <p:nvSpPr>
-          <p:cNvPr id="15" name="">
-            <a:extLst xmlns:a="http://schemas.openxmlformats.org/drawingml/2006/main">
-              <a:ext uri="{FF2B5EF4-FFF2-40B4-BE49-F238E27FC236}">
-                <a16:creationId xmlns:a16="http://schemas.microsoft.com/office/drawing/2014/main" id="{42A21E65-4D58-4FFF-BD7B-E97E9D51018A}"/>
-              </a:ext>
-            </a:extLst>
-          </p:cNvPr>
-          <p:cNvSpPr>
-            <a:spLocks xmlns:a="http://schemas.openxmlformats.org/drawingml/2006/main" noGrp="1"/>
-          </p:cNvSpPr>
-          <p:nvPr/>
-        </p:nvSpPr>
-        <p:spPr>
-          <a:xfrm xmlns:a="http://schemas.openxmlformats.org/drawingml/2006/main">
-            <a:off x="3429000" y="4686300"/>
-            <a:ext cx="6191250" cy="419100"/>
-          </a:xfrm>
-          <a:prstGeom xmlns:a="http://schemas.openxmlformats.org/drawingml/2006/main" prst="rect">
-            <a:avLst/>
-          </a:prstGeom>
-          <a:noFill xmlns:a="http://schemas.openxmlformats.org/drawingml/2006/main"/>
-          <a:ln xmlns:a="http://schemas.openxmlformats.org/drawingml/2006/main" w="0">
-            <a:noFill/>
-            <a:prstDash val="solid"/>
-          </a:ln>
-        </p:spPr>
-        <p:txBody>
-          <a:bodyPr xmlns:a="http://schemas.openxmlformats.org/drawingml/2006/main"/>
-          <a:lstStyle xmlns:a="http://schemas.openxmlformats.org/drawingml/2006/main"/>
-          <a:p xmlns:a="http://schemas.openxmlformats.org/drawingml/2006/main">
-            <a:pPr>
-              <a:defRPr sz="1875" b="0">
-                <a:solidFill>
-                  <a:srgbClr val="101820"/>
-                </a:solidFill>
-              </a:defRPr>
-            </a:pPr>
-            <a:r>
-              <a:rPr sz="1875" b="0">
-                <a:solidFill>
-                  <a:srgbClr val="101820"/>
-                </a:solidFill>
-              </a:rPr>
-              <a:t>Start with campus and market merchants where evidence is frequent.</a:t>
-            </a:r>
-          </a:p>
-        </p:txBody>
-      </p:sp>
-      <p:sp>
-        <p:nvSpPr>
-          <p:cNvPr id="16" name="">
-            <a:extLst xmlns:a="http://schemas.openxmlformats.org/drawingml/2006/main">
-              <a:ext uri="{FF2B5EF4-FFF2-40B4-BE49-F238E27FC236}">
-                <a16:creationId xmlns:a16="http://schemas.microsoft.com/office/drawing/2014/main" id="{E8C8AF35-E2A1-4198-BAA0-6A2EDD2707DD}"/>
-              </a:ext>
-            </a:extLst>
-          </p:cNvPr>
-          <p:cNvSpPr>
-            <a:spLocks xmlns:a="http://schemas.openxmlformats.org/drawingml/2006/main" noGrp="1"/>
-          </p:cNvSpPr>
-          <p:nvPr/>
-        </p:nvSpPr>
-        <p:spPr>
-          <a:xfrm xmlns:a="http://schemas.openxmlformats.org/drawingml/2006/main">
-            <a:off x="9677400" y="2400300"/>
-            <a:ext cx="1619250" cy="2400300"/>
+                <a16:creationId xmlns:a16="http://schemas.microsoft.com/office/drawing/2014/main" id="{EB385B6E-FDE0-4458-9B6B-B5A6220A3BC4}"/>
+              </a:ext>
+            </a:extLst>
+          </p:cNvPr>
+          <p:cNvSpPr>
+            <a:spLocks xmlns:a="http://schemas.openxmlformats.org/drawingml/2006/main" noGrp="1"/>
+          </p:cNvSpPr>
+          <p:nvPr/>
+        </p:nvSpPr>
+        <p:spPr>
+          <a:xfrm xmlns:a="http://schemas.openxmlformats.org/drawingml/2006/main">
+            <a:off x="819150" y="2628900"/>
+            <a:ext cx="3028950" cy="2095500"/>
           </a:xfrm>
           <a:prstGeom xmlns:a="http://schemas.openxmlformats.org/drawingml/2006/main" prst="rect">
             <a:avLst/>
           </a:prstGeom>
           <a:solidFill xmlns:a="http://schemas.openxmlformats.org/drawingml/2006/main">
-            <a:srgbClr val="F8F3EA"/>
+            <a:srgbClr val="F4F7F6"/>
           </a:solidFill>
           <a:ln xmlns:a="http://schemas.openxmlformats.org/drawingml/2006/main" w="9525">
             <a:solidFill>
-              <a:srgbClr val="C8D1D2"/>
+              <a:srgbClr val="D8DEDF"/>
             </a:solidFill>
             <a:prstDash val="solid"/>
           </a:ln>
@@ -5285,89 +4774,22 @@
       </p:sp>
       <p:sp>
         <p:nvSpPr>
-          <p:cNvPr id="17" name="">
-            <a:extLst xmlns:a="http://schemas.openxmlformats.org/drawingml/2006/main">
-              <a:ext uri="{FF2B5EF4-FFF2-40B4-BE49-F238E27FC236}">
-                <a16:creationId xmlns:a16="http://schemas.microsoft.com/office/drawing/2014/main" id="{582B8450-FC57-4D40-887E-54490033B68F}"/>
-              </a:ext>
-            </a:extLst>
-          </p:cNvPr>
-          <p:cNvSpPr>
-            <a:spLocks xmlns:a="http://schemas.openxmlformats.org/drawingml/2006/main" noGrp="1"/>
-          </p:cNvSpPr>
-          <p:nvPr/>
-        </p:nvSpPr>
-        <p:spPr>
-          <a:xfrm xmlns:a="http://schemas.openxmlformats.org/drawingml/2006/main">
-            <a:off x="9906000" y="3219450"/>
-            <a:ext cx="1162050" cy="800100"/>
-          </a:xfrm>
-          <a:prstGeom xmlns:a="http://schemas.openxmlformats.org/drawingml/2006/main" prst="rect">
-            <a:avLst/>
-          </a:prstGeom>
-          <a:noFill xmlns:a="http://schemas.openxmlformats.org/drawingml/2006/main"/>
-          <a:ln xmlns:a="http://schemas.openxmlformats.org/drawingml/2006/main" w="0">
-            <a:noFill/>
-            <a:prstDash val="solid"/>
-          </a:ln>
-        </p:spPr>
-        <p:txBody>
-          <a:bodyPr xmlns:a="http://schemas.openxmlformats.org/drawingml/2006/main"/>
-          <a:lstStyle xmlns:a="http://schemas.openxmlformats.org/drawingml/2006/main"/>
-          <a:p xmlns:a="http://schemas.openxmlformats.org/drawingml/2006/main">
-            <a:pPr algn="ctr">
-              <a:defRPr sz="1650" b="1">
-                <a:solidFill>
-                  <a:srgbClr val="DE1A4C"/>
-                </a:solidFill>
-              </a:defRPr>
-            </a:pPr>
-            <a:r>
-              <a:rPr sz="1650" b="1">
-                <a:solidFill>
-                  <a:srgbClr val="DE1A4C"/>
-                </a:solidFill>
-              </a:rPr>
-              <a:t>Evidence</a:t>
-            </a:r>
-          </a:p>
-          <a:p xmlns:a="http://schemas.openxmlformats.org/drawingml/2006/main">
-            <a:pPr algn="ctr">
-              <a:defRPr sz="1650" b="1">
-                <a:solidFill>
-                  <a:srgbClr val="DE1A4C"/>
-                </a:solidFill>
-              </a:defRPr>
-            </a:pPr>
-            <a:r>
-              <a:rPr sz="1650" b="1">
-                <a:solidFill>
-                  <a:srgbClr val="DE1A4C"/>
-                </a:solidFill>
-              </a:rPr>
-              <a:t>layer</a:t>
-            </a:r>
-          </a:p>
-        </p:txBody>
-      </p:sp>
-      <p:sp>
-        <p:nvSpPr>
-          <p:cNvPr id="18" name="">
-            <a:extLst xmlns:a="http://schemas.openxmlformats.org/drawingml/2006/main">
-              <a:ext uri="{FF2B5EF4-FFF2-40B4-BE49-F238E27FC236}">
-                <a16:creationId xmlns:a16="http://schemas.microsoft.com/office/drawing/2014/main" id="{C9708AC7-5EE8-4D65-AE27-C5EC78AF9EE5}"/>
-              </a:ext>
-            </a:extLst>
-          </p:cNvPr>
-          <p:cNvSpPr>
-            <a:spLocks xmlns:a="http://schemas.openxmlformats.org/drawingml/2006/main" noGrp="1"/>
-          </p:cNvSpPr>
-          <p:nvPr/>
-        </p:nvSpPr>
-        <p:spPr>
-          <a:xfrm xmlns:a="http://schemas.openxmlformats.org/drawingml/2006/main">
-            <a:off x="400050" y="6362700"/>
-            <a:ext cx="5905500" cy="228600"/>
+          <p:cNvPr id="7" name="">
+            <a:extLst xmlns:a="http://schemas.openxmlformats.org/drawingml/2006/main">
+              <a:ext uri="{FF2B5EF4-FFF2-40B4-BE49-F238E27FC236}">
+                <a16:creationId xmlns:a16="http://schemas.microsoft.com/office/drawing/2014/main" id="{86D5B556-C11F-43A0-B447-AEE24B1D8204}"/>
+              </a:ext>
+            </a:extLst>
+          </p:cNvPr>
+          <p:cNvSpPr>
+            <a:spLocks xmlns:a="http://schemas.openxmlformats.org/drawingml/2006/main" noGrp="1"/>
+          </p:cNvSpPr>
+          <p:nvPr/>
+        </p:nvSpPr>
+        <p:spPr>
+          <a:xfrm xmlns:a="http://schemas.openxmlformats.org/drawingml/2006/main">
+            <a:off x="1085850" y="2990850"/>
+            <a:ext cx="2286000" cy="381000"/>
           </a:xfrm>
           <a:prstGeom xmlns:a="http://schemas.openxmlformats.org/drawingml/2006/main" prst="rect">
             <a:avLst/>
@@ -5383,69 +4805,385 @@
           <a:lstStyle xmlns:a="http://schemas.openxmlformats.org/drawingml/2006/main"/>
           <a:p xmlns:a="http://schemas.openxmlformats.org/drawingml/2006/main">
             <a:pPr>
-              <a:defRPr sz="1050" b="1">
-                <a:solidFill>
-                  <a:srgbClr val="59666A"/>
-                </a:solidFill>
-              </a:defRPr>
-            </a:pPr>
-            <a:r>
-              <a:rPr sz="1050" b="1">
-                <a:solidFill>
-                  <a:srgbClr val="59666A"/>
-                </a:solidFill>
-              </a:rPr>
-              <a:t>TrustTill | Hackaholics 7.0 | Financial Inclusion</a:t>
-            </a:r>
-          </a:p>
-        </p:txBody>
-      </p:sp>
-      <p:sp>
-        <p:nvSpPr>
-          <p:cNvPr id="19" name="">
-            <a:extLst xmlns:a="http://schemas.openxmlformats.org/drawingml/2006/main">
-              <a:ext uri="{FF2B5EF4-FFF2-40B4-BE49-F238E27FC236}">
-                <a16:creationId xmlns:a16="http://schemas.microsoft.com/office/drawing/2014/main" id="{B594B3DC-A44D-472C-8A17-1B597B79827E}"/>
-              </a:ext>
-            </a:extLst>
-          </p:cNvPr>
-          <p:cNvSpPr>
-            <a:spLocks xmlns:a="http://schemas.openxmlformats.org/drawingml/2006/main" noGrp="1"/>
-          </p:cNvSpPr>
-          <p:nvPr/>
-        </p:nvSpPr>
-        <p:spPr>
-          <a:xfrm xmlns:a="http://schemas.openxmlformats.org/drawingml/2006/main">
-            <a:off x="11468100" y="6362700"/>
-            <a:ext cx="323850" cy="228600"/>
-          </a:xfrm>
-          <a:prstGeom xmlns:a="http://schemas.openxmlformats.org/drawingml/2006/main" prst="rect">
-            <a:avLst/>
-          </a:prstGeom>
-          <a:noFill xmlns:a="http://schemas.openxmlformats.org/drawingml/2006/main"/>
-          <a:ln xmlns:a="http://schemas.openxmlformats.org/drawingml/2006/main" w="0">
-            <a:noFill/>
-            <a:prstDash val="solid"/>
-          </a:ln>
-        </p:spPr>
-        <p:txBody>
-          <a:bodyPr xmlns:a="http://schemas.openxmlformats.org/drawingml/2006/main"/>
-          <a:lstStyle xmlns:a="http://schemas.openxmlformats.org/drawingml/2006/main"/>
-          <a:p xmlns:a="http://schemas.openxmlformats.org/drawingml/2006/main">
-            <a:pPr algn="r">
-              <a:defRPr sz="1050" b="1">
-                <a:solidFill>
-                  <a:srgbClr val="59666A"/>
-                </a:solidFill>
-              </a:defRPr>
-            </a:pPr>
-            <a:r>
-              <a:rPr sz="1050" b="1">
-                <a:solidFill>
-                  <a:srgbClr val="59666A"/>
-                </a:solidFill>
-              </a:rPr>
-              <a:t>5</a:t>
+              <a:defRPr sz="2550" b="1">
+                <a:solidFill>
+                  <a:srgbClr val="003D48"/>
+                </a:solidFill>
+              </a:defRPr>
+            </a:pPr>
+            <a:r>
+              <a:rPr sz="2550" b="1">
+                <a:solidFill>
+                  <a:srgbClr val="003D48"/>
+                </a:solidFill>
+              </a:rPr>
+              <a:t>Acquire</a:t>
+            </a:r>
+          </a:p>
+        </p:txBody>
+      </p:sp>
+      <p:sp>
+        <p:nvSpPr>
+          <p:cNvPr id="8" name="">
+            <a:extLst xmlns:a="http://schemas.openxmlformats.org/drawingml/2006/main">
+              <a:ext uri="{FF2B5EF4-FFF2-40B4-BE49-F238E27FC236}">
+                <a16:creationId xmlns:a16="http://schemas.microsoft.com/office/drawing/2014/main" id="{CFF75235-F84A-4985-8E39-37F798082E3B}"/>
+              </a:ext>
+            </a:extLst>
+          </p:cNvPr>
+          <p:cNvSpPr>
+            <a:spLocks xmlns:a="http://schemas.openxmlformats.org/drawingml/2006/main" noGrp="1"/>
+          </p:cNvSpPr>
+          <p:nvPr/>
+        </p:nvSpPr>
+        <p:spPr>
+          <a:xfrm xmlns:a="http://schemas.openxmlformats.org/drawingml/2006/main">
+            <a:off x="1085850" y="3676650"/>
+            <a:ext cx="2266950" cy="723900"/>
+          </a:xfrm>
+          <a:prstGeom xmlns:a="http://schemas.openxmlformats.org/drawingml/2006/main" prst="rect">
+            <a:avLst/>
+          </a:prstGeom>
+          <a:noFill xmlns:a="http://schemas.openxmlformats.org/drawingml/2006/main"/>
+          <a:ln xmlns:a="http://schemas.openxmlformats.org/drawingml/2006/main" w="0">
+            <a:noFill/>
+            <a:prstDash val="solid"/>
+          </a:ln>
+        </p:spPr>
+        <p:txBody>
+          <a:bodyPr xmlns:a="http://schemas.openxmlformats.org/drawingml/2006/main"/>
+          <a:lstStyle xmlns:a="http://schemas.openxmlformats.org/drawingml/2006/main"/>
+          <a:p xmlns:a="http://schemas.openxmlformats.org/drawingml/2006/main">
+            <a:pPr>
+              <a:defRPr sz="1575" b="0">
+                <a:solidFill>
+                  <a:srgbClr val="101820"/>
+                </a:solidFill>
+              </a:defRPr>
+            </a:pPr>
+            <a:r>
+              <a:rPr sz="1575" b="0">
+                <a:solidFill>
+                  <a:srgbClr val="101820"/>
+                </a:solidFill>
+              </a:rPr>
+              <a:t>Identify active merchants who are ready for ALAT or SME banking.</a:t>
+            </a:r>
+          </a:p>
+        </p:txBody>
+      </p:sp>
+      <p:sp>
+        <p:nvSpPr>
+          <p:cNvPr id="9" name="">
+            <a:extLst xmlns:a="http://schemas.openxmlformats.org/drawingml/2006/main">
+              <a:ext uri="{FF2B5EF4-FFF2-40B4-BE49-F238E27FC236}">
+                <a16:creationId xmlns:a16="http://schemas.microsoft.com/office/drawing/2014/main" id="{120BAFB9-7FE8-4108-A0DB-1EC2BD9EA7C9}"/>
+              </a:ext>
+            </a:extLst>
+          </p:cNvPr>
+          <p:cNvSpPr>
+            <a:spLocks xmlns:a="http://schemas.openxmlformats.org/drawingml/2006/main" noGrp="1"/>
+          </p:cNvSpPr>
+          <p:nvPr/>
+        </p:nvSpPr>
+        <p:spPr>
+          <a:xfrm xmlns:a="http://schemas.openxmlformats.org/drawingml/2006/main">
+            <a:off x="4438650" y="2628900"/>
+            <a:ext cx="3028950" cy="2095500"/>
+          </a:xfrm>
+          <a:prstGeom xmlns:a="http://schemas.openxmlformats.org/drawingml/2006/main" prst="rect">
+            <a:avLst/>
+          </a:prstGeom>
+          <a:solidFill xmlns:a="http://schemas.openxmlformats.org/drawingml/2006/main">
+            <a:srgbClr val="FBF5EA"/>
+          </a:solidFill>
+          <a:ln xmlns:a="http://schemas.openxmlformats.org/drawingml/2006/main" w="9525">
+            <a:solidFill>
+              <a:srgbClr val="D8DEDF"/>
+            </a:solidFill>
+            <a:prstDash val="solid"/>
+          </a:ln>
+        </p:spPr>
+      </p:sp>
+      <p:sp>
+        <p:nvSpPr>
+          <p:cNvPr id="10" name="">
+            <a:extLst xmlns:a="http://schemas.openxmlformats.org/drawingml/2006/main">
+              <a:ext uri="{FF2B5EF4-FFF2-40B4-BE49-F238E27FC236}">
+                <a16:creationId xmlns:a16="http://schemas.microsoft.com/office/drawing/2014/main" id="{C671AC56-3B48-4F98-84B2-59E5B9DCC101}"/>
+              </a:ext>
+            </a:extLst>
+          </p:cNvPr>
+          <p:cNvSpPr>
+            <a:spLocks xmlns:a="http://schemas.openxmlformats.org/drawingml/2006/main" noGrp="1"/>
+          </p:cNvSpPr>
+          <p:nvPr/>
+        </p:nvSpPr>
+        <p:spPr>
+          <a:xfrm xmlns:a="http://schemas.openxmlformats.org/drawingml/2006/main">
+            <a:off x="4705350" y="2990850"/>
+            <a:ext cx="2286000" cy="381000"/>
+          </a:xfrm>
+          <a:prstGeom xmlns:a="http://schemas.openxmlformats.org/drawingml/2006/main" prst="rect">
+            <a:avLst/>
+          </a:prstGeom>
+          <a:noFill xmlns:a="http://schemas.openxmlformats.org/drawingml/2006/main"/>
+          <a:ln xmlns:a="http://schemas.openxmlformats.org/drawingml/2006/main" w="0">
+            <a:noFill/>
+            <a:prstDash val="solid"/>
+          </a:ln>
+        </p:spPr>
+        <p:txBody>
+          <a:bodyPr xmlns:a="http://schemas.openxmlformats.org/drawingml/2006/main"/>
+          <a:lstStyle xmlns:a="http://schemas.openxmlformats.org/drawingml/2006/main"/>
+          <a:p xmlns:a="http://schemas.openxmlformats.org/drawingml/2006/main">
+            <a:pPr>
+              <a:defRPr sz="2550" b="1">
+                <a:solidFill>
+                  <a:srgbClr val="003D48"/>
+                </a:solidFill>
+              </a:defRPr>
+            </a:pPr>
+            <a:r>
+              <a:rPr sz="2550" b="1">
+                <a:solidFill>
+                  <a:srgbClr val="003D48"/>
+                </a:solidFill>
+              </a:rPr>
+              <a:t>Improve</a:t>
+            </a:r>
+          </a:p>
+        </p:txBody>
+      </p:sp>
+      <p:sp>
+        <p:nvSpPr>
+          <p:cNvPr id="11" name="">
+            <a:extLst xmlns:a="http://schemas.openxmlformats.org/drawingml/2006/main">
+              <a:ext uri="{FF2B5EF4-FFF2-40B4-BE49-F238E27FC236}">
+                <a16:creationId xmlns:a16="http://schemas.microsoft.com/office/drawing/2014/main" id="{36A8FDD2-D0C7-4EE1-9254-F7A575D48EB1}"/>
+              </a:ext>
+            </a:extLst>
+          </p:cNvPr>
+          <p:cNvSpPr>
+            <a:spLocks xmlns:a="http://schemas.openxmlformats.org/drawingml/2006/main" noGrp="1"/>
+          </p:cNvSpPr>
+          <p:nvPr/>
+        </p:nvSpPr>
+        <p:spPr>
+          <a:xfrm xmlns:a="http://schemas.openxmlformats.org/drawingml/2006/main">
+            <a:off x="4705350" y="3676650"/>
+            <a:ext cx="2266950" cy="723900"/>
+          </a:xfrm>
+          <a:prstGeom xmlns:a="http://schemas.openxmlformats.org/drawingml/2006/main" prst="rect">
+            <a:avLst/>
+          </a:prstGeom>
+          <a:noFill xmlns:a="http://schemas.openxmlformats.org/drawingml/2006/main"/>
+          <a:ln xmlns:a="http://schemas.openxmlformats.org/drawingml/2006/main" w="0">
+            <a:noFill/>
+            <a:prstDash val="solid"/>
+          </a:ln>
+        </p:spPr>
+        <p:txBody>
+          <a:bodyPr xmlns:a="http://schemas.openxmlformats.org/drawingml/2006/main"/>
+          <a:lstStyle xmlns:a="http://schemas.openxmlformats.org/drawingml/2006/main"/>
+          <a:p xmlns:a="http://schemas.openxmlformats.org/drawingml/2006/main">
+            <a:pPr>
+              <a:defRPr sz="1575" b="0">
+                <a:solidFill>
+                  <a:srgbClr val="101820"/>
+                </a:solidFill>
+              </a:defRPr>
+            </a:pPr>
+            <a:r>
+              <a:rPr sz="1575" b="0">
+                <a:solidFill>
+                  <a:srgbClr val="101820"/>
+                </a:solidFill>
+              </a:rPr>
+              <a:t>Help merchants build cleaner records without becoming accountants.</a:t>
+            </a:r>
+          </a:p>
+        </p:txBody>
+      </p:sp>
+      <p:sp>
+        <p:nvSpPr>
+          <p:cNvPr id="12" name="">
+            <a:extLst xmlns:a="http://schemas.openxmlformats.org/drawingml/2006/main">
+              <a:ext uri="{FF2B5EF4-FFF2-40B4-BE49-F238E27FC236}">
+                <a16:creationId xmlns:a16="http://schemas.microsoft.com/office/drawing/2014/main" id="{193520D1-B8DE-407F-9E77-8F1FA4068624}"/>
+              </a:ext>
+            </a:extLst>
+          </p:cNvPr>
+          <p:cNvSpPr>
+            <a:spLocks xmlns:a="http://schemas.openxmlformats.org/drawingml/2006/main" noGrp="1"/>
+          </p:cNvSpPr>
+          <p:nvPr/>
+        </p:nvSpPr>
+        <p:spPr>
+          <a:xfrm xmlns:a="http://schemas.openxmlformats.org/drawingml/2006/main">
+            <a:off x="8058150" y="2628900"/>
+            <a:ext cx="3028950" cy="2095500"/>
+          </a:xfrm>
+          <a:prstGeom xmlns:a="http://schemas.openxmlformats.org/drawingml/2006/main" prst="rect">
+            <a:avLst/>
+          </a:prstGeom>
+          <a:solidFill xmlns:a="http://schemas.openxmlformats.org/drawingml/2006/main">
+            <a:srgbClr val="F4F7F6"/>
+          </a:solidFill>
+          <a:ln xmlns:a="http://schemas.openxmlformats.org/drawingml/2006/main" w="9525">
+            <a:solidFill>
+              <a:srgbClr val="D8DEDF"/>
+            </a:solidFill>
+            <a:prstDash val="solid"/>
+          </a:ln>
+        </p:spPr>
+      </p:sp>
+      <p:sp>
+        <p:nvSpPr>
+          <p:cNvPr id="13" name="">
+            <a:extLst xmlns:a="http://schemas.openxmlformats.org/drawingml/2006/main">
+              <a:ext uri="{FF2B5EF4-FFF2-40B4-BE49-F238E27FC236}">
+                <a16:creationId xmlns:a16="http://schemas.microsoft.com/office/drawing/2014/main" id="{52CEC295-372D-4F38-827B-55939732DC2C}"/>
+              </a:ext>
+            </a:extLst>
+          </p:cNvPr>
+          <p:cNvSpPr>
+            <a:spLocks xmlns:a="http://schemas.openxmlformats.org/drawingml/2006/main" noGrp="1"/>
+          </p:cNvSpPr>
+          <p:nvPr/>
+        </p:nvSpPr>
+        <p:spPr>
+          <a:xfrm xmlns:a="http://schemas.openxmlformats.org/drawingml/2006/main">
+            <a:off x="8324850" y="2990850"/>
+            <a:ext cx="2286000" cy="381000"/>
+          </a:xfrm>
+          <a:prstGeom xmlns:a="http://schemas.openxmlformats.org/drawingml/2006/main" prst="rect">
+            <a:avLst/>
+          </a:prstGeom>
+          <a:noFill xmlns:a="http://schemas.openxmlformats.org/drawingml/2006/main"/>
+          <a:ln xmlns:a="http://schemas.openxmlformats.org/drawingml/2006/main" w="0">
+            <a:noFill/>
+            <a:prstDash val="solid"/>
+          </a:ln>
+        </p:spPr>
+        <p:txBody>
+          <a:bodyPr xmlns:a="http://schemas.openxmlformats.org/drawingml/2006/main"/>
+          <a:lstStyle xmlns:a="http://schemas.openxmlformats.org/drawingml/2006/main"/>
+          <a:p xmlns:a="http://schemas.openxmlformats.org/drawingml/2006/main">
+            <a:pPr>
+              <a:defRPr sz="2550" b="1">
+                <a:solidFill>
+                  <a:srgbClr val="E4144F"/>
+                </a:solidFill>
+              </a:defRPr>
+            </a:pPr>
+            <a:r>
+              <a:rPr sz="2550" b="1">
+                <a:solidFill>
+                  <a:srgbClr val="E4144F"/>
+                </a:solidFill>
+              </a:rPr>
+              <a:t>Review</a:t>
+            </a:r>
+          </a:p>
+        </p:txBody>
+      </p:sp>
+      <p:sp>
+        <p:nvSpPr>
+          <p:cNvPr id="14" name="">
+            <a:extLst xmlns:a="http://schemas.openxmlformats.org/drawingml/2006/main">
+              <a:ext uri="{FF2B5EF4-FFF2-40B4-BE49-F238E27FC236}">
+                <a16:creationId xmlns:a16="http://schemas.microsoft.com/office/drawing/2014/main" id="{6B6E6679-FF63-4DE9-AE3B-E319CBBC482D}"/>
+              </a:ext>
+            </a:extLst>
+          </p:cNvPr>
+          <p:cNvSpPr>
+            <a:spLocks xmlns:a="http://schemas.openxmlformats.org/drawingml/2006/main" noGrp="1"/>
+          </p:cNvSpPr>
+          <p:nvPr/>
+        </p:nvSpPr>
+        <p:spPr>
+          <a:xfrm xmlns:a="http://schemas.openxmlformats.org/drawingml/2006/main">
+            <a:off x="8324850" y="3676650"/>
+            <a:ext cx="2266950" cy="723900"/>
+          </a:xfrm>
+          <a:prstGeom xmlns:a="http://schemas.openxmlformats.org/drawingml/2006/main" prst="rect">
+            <a:avLst/>
+          </a:prstGeom>
+          <a:noFill xmlns:a="http://schemas.openxmlformats.org/drawingml/2006/main"/>
+          <a:ln xmlns:a="http://schemas.openxmlformats.org/drawingml/2006/main" w="0">
+            <a:noFill/>
+            <a:prstDash val="solid"/>
+          </a:ln>
+        </p:spPr>
+        <p:txBody>
+          <a:bodyPr xmlns:a="http://schemas.openxmlformats.org/drawingml/2006/main"/>
+          <a:lstStyle xmlns:a="http://schemas.openxmlformats.org/drawingml/2006/main"/>
+          <a:p xmlns:a="http://schemas.openxmlformats.org/drawingml/2006/main">
+            <a:pPr>
+              <a:defRPr sz="1575" b="0">
+                <a:solidFill>
+                  <a:srgbClr val="101820"/>
+                </a:solidFill>
+              </a:defRPr>
+            </a:pPr>
+            <a:r>
+              <a:rPr sz="1575" b="0">
+                <a:solidFill>
+                  <a:srgbClr val="101820"/>
+                </a:solidFill>
+              </a:rPr>
+              <a:t>Use risk flags before any credit or support decision.</a:t>
+            </a:r>
+          </a:p>
+        </p:txBody>
+      </p:sp>
+      <p:sp>
+        <p:nvSpPr>
+          <p:cNvPr id="15" name="">
+            <a:extLst xmlns:a="http://schemas.openxmlformats.org/drawingml/2006/main">
+              <a:ext uri="{FF2B5EF4-FFF2-40B4-BE49-F238E27FC236}">
+                <a16:creationId xmlns:a16="http://schemas.microsoft.com/office/drawing/2014/main" id="{6BC50F1A-708D-4F9A-A9A4-83C6ACA5AB82}"/>
+              </a:ext>
+            </a:extLst>
+          </p:cNvPr>
+          <p:cNvSpPr>
+            <a:spLocks xmlns:a="http://schemas.openxmlformats.org/drawingml/2006/main" noGrp="1"/>
+          </p:cNvSpPr>
+          <p:nvPr/>
+        </p:nvSpPr>
+        <p:spPr>
+          <a:xfrm xmlns:a="http://schemas.openxmlformats.org/drawingml/2006/main">
+            <a:off x="819150" y="5314950"/>
+            <a:ext cx="8858250" cy="438150"/>
+          </a:xfrm>
+          <a:prstGeom xmlns:a="http://schemas.openxmlformats.org/drawingml/2006/main" prst="rect">
+            <a:avLst/>
+          </a:prstGeom>
+          <a:noFill xmlns:a="http://schemas.openxmlformats.org/drawingml/2006/main"/>
+          <a:ln xmlns:a="http://schemas.openxmlformats.org/drawingml/2006/main" w="0">
+            <a:noFill/>
+            <a:prstDash val="solid"/>
+          </a:ln>
+        </p:spPr>
+        <p:txBody>
+          <a:bodyPr xmlns:a="http://schemas.openxmlformats.org/drawingml/2006/main"/>
+          <a:lstStyle xmlns:a="http://schemas.openxmlformats.org/drawingml/2006/main"/>
+          <a:p xmlns:a="http://schemas.openxmlformats.org/drawingml/2006/main">
+            <a:pPr>
+              <a:defRPr sz="2250" b="1">
+                <a:solidFill>
+                  <a:srgbClr val="003D48"/>
+                </a:solidFill>
+              </a:defRPr>
+            </a:pPr>
+            <a:r>
+              <a:rPr sz="2250" b="1">
+                <a:solidFill>
+                  <a:srgbClr val="003D48"/>
+                </a:solidFill>
+              </a:rPr>
+              <a:t>The first win is not automated lending. It is better merchant visibility.</a:t>
             </a:r>
           </a:p>
         </p:txBody>
@@ -5453,7 +5191,7 @@
     </p:spTree>
     <p:extLst>
       <p:ext uri="{BB962C8B-B14F-4D97-AF65-F5344CB8AC3E}">
-        <p14:creationId xmlns:p14="http://schemas.microsoft.com/office/powerpoint/2010/main" val="2085241380"/>
+        <p14:creationId xmlns:p14="http://schemas.microsoft.com/office/powerpoint/2010/main" val="1082875132"/>
       </p:ext>
     </p:extLst>
   </p:cSld>
@@ -5484,19 +5222,19 @@
           <p:cNvPr id="1" name="">
             <a:extLst xmlns:a="http://schemas.openxmlformats.org/drawingml/2006/main">
               <a:ext uri="{FF2B5EF4-FFF2-40B4-BE49-F238E27FC236}">
-                <a16:creationId xmlns:a16="http://schemas.microsoft.com/office/drawing/2014/main" id="{86AFE6F9-ABF1-4A6B-83CA-ADF3A86ECD19}"/>
-              </a:ext>
-            </a:extLst>
-          </p:cNvPr>
-          <p:cNvSpPr>
-            <a:spLocks xmlns:a="http://schemas.openxmlformats.org/drawingml/2006/main" noGrp="1"/>
-          </p:cNvSpPr>
-          <p:nvPr/>
-        </p:nvSpPr>
-        <p:spPr>
-          <a:xfrm xmlns:a="http://schemas.openxmlformats.org/drawingml/2006/main">
-            <a:off x="533400" y="514350"/>
-            <a:ext cx="9525000" cy="990600"/>
+                <a16:creationId xmlns:a16="http://schemas.microsoft.com/office/drawing/2014/main" id="{17806FD0-403B-48F0-B745-E97F8814EC97}"/>
+              </a:ext>
+            </a:extLst>
+          </p:cNvPr>
+          <p:cNvSpPr>
+            <a:spLocks xmlns:a="http://schemas.openxmlformats.org/drawingml/2006/main" noGrp="1"/>
+          </p:cNvSpPr>
+          <p:nvPr/>
+        </p:nvSpPr>
+        <p:spPr>
+          <a:xfrm xmlns:a="http://schemas.openxmlformats.org/drawingml/2006/main">
+            <a:off x="533400" y="457200"/>
+            <a:ext cx="10287000" cy="819150"/>
           </a:xfrm>
           <a:prstGeom xmlns:a="http://schemas.openxmlformats.org/drawingml/2006/main" prst="rect">
             <a:avLst/>
@@ -5524,7 +5262,7 @@
                   <a:srgbClr val="101820"/>
                 </a:solidFill>
               </a:rPr>
-              <a:t>The MVP is intentionally narrow and demoable</a:t>
+              <a:t>The backend is an evidence engine</a:t>
             </a:r>
           </a:p>
         </p:txBody>
@@ -5534,19 +5272,19 @@
           <p:cNvPr id="2" name="">
             <a:extLst xmlns:a="http://schemas.openxmlformats.org/drawingml/2006/main">
               <a:ext uri="{FF2B5EF4-FFF2-40B4-BE49-F238E27FC236}">
-                <a16:creationId xmlns:a16="http://schemas.microsoft.com/office/drawing/2014/main" id="{D785FD66-1F0F-4170-9D76-BDC4F47267BF}"/>
-              </a:ext>
-            </a:extLst>
-          </p:cNvPr>
-          <p:cNvSpPr>
-            <a:spLocks xmlns:a="http://schemas.openxmlformats.org/drawingml/2006/main" noGrp="1"/>
-          </p:cNvSpPr>
-          <p:nvPr/>
-        </p:nvSpPr>
-        <p:spPr>
-          <a:xfrm xmlns:a="http://schemas.openxmlformats.org/drawingml/2006/main">
-            <a:off x="552450" y="1352550"/>
-            <a:ext cx="6667500" cy="514350"/>
+                <a16:creationId xmlns:a16="http://schemas.microsoft.com/office/drawing/2014/main" id="{B5243F16-C00E-49F6-AE2A-D73B07C62004}"/>
+              </a:ext>
+            </a:extLst>
+          </p:cNvPr>
+          <p:cNvSpPr>
+            <a:spLocks xmlns:a="http://schemas.openxmlformats.org/drawingml/2006/main" noGrp="1"/>
+          </p:cNvSpPr>
+          <p:nvPr/>
+        </p:nvSpPr>
+        <p:spPr>
+          <a:xfrm xmlns:a="http://schemas.openxmlformats.org/drawingml/2006/main">
+            <a:off x="552450" y="1333500"/>
+            <a:ext cx="8763000" cy="400050"/>
           </a:xfrm>
           <a:prstGeom xmlns:a="http://schemas.openxmlformats.org/drawingml/2006/main" prst="rect">
             <a:avLst/>
@@ -5562,19 +5300,19 @@
           <a:lstStyle xmlns:a="http://schemas.openxmlformats.org/drawingml/2006/main"/>
           <a:p xmlns:a="http://schemas.openxmlformats.org/drawingml/2006/main">
             <a:pPr>
-              <a:defRPr sz="1650" b="0">
-                <a:solidFill>
-                  <a:srgbClr val="59666A"/>
-                </a:solidFill>
-              </a:defRPr>
-            </a:pPr>
-            <a:r>
-              <a:rPr sz="1650" b="0">
-                <a:solidFill>
-                  <a:srgbClr val="59666A"/>
-                </a:solidFill>
-              </a:rPr>
-              <a:t>A narrow build wins because judges can see it working.</a:t>
+              <a:defRPr sz="1800" b="0">
+                <a:solidFill>
+                  <a:srgbClr val="536267"/>
+                </a:solidFill>
+              </a:defRPr>
+            </a:pPr>
+            <a:r>
+              <a:rPr sz="1800" b="0">
+                <a:solidFill>
+                  <a:srgbClr val="536267"/>
+                </a:solidFill>
+              </a:rPr>
+              <a:t>The build is realistic: ingest, normalize, reconcile, score, expose.</a:t>
             </a:r>
           </a:p>
         </p:txBody>
@@ -5584,19 +5322,19 @@
           <p:cNvPr id="3" name="">
             <a:extLst xmlns:a="http://schemas.openxmlformats.org/drawingml/2006/main">
               <a:ext uri="{FF2B5EF4-FFF2-40B4-BE49-F238E27FC236}">
-                <a16:creationId xmlns:a16="http://schemas.microsoft.com/office/drawing/2014/main" id="{C288B655-7734-4BEF-973E-45E9A7C07D21}"/>
-              </a:ext>
-            </a:extLst>
-          </p:cNvPr>
-          <p:cNvSpPr>
-            <a:spLocks xmlns:a="http://schemas.openxmlformats.org/drawingml/2006/main" noGrp="1"/>
-          </p:cNvSpPr>
-          <p:nvPr/>
-        </p:nvSpPr>
-        <p:spPr>
-          <a:xfrm xmlns:a="http://schemas.openxmlformats.org/drawingml/2006/main">
-            <a:off x="533400" y="1943100"/>
-            <a:ext cx="10572750" cy="0"/>
+                <a16:creationId xmlns:a16="http://schemas.microsoft.com/office/drawing/2014/main" id="{6539C5E0-8F8A-4448-9C25-A2B90E8BE9B6}"/>
+              </a:ext>
+            </a:extLst>
+          </p:cNvPr>
+          <p:cNvSpPr>
+            <a:spLocks xmlns:a="http://schemas.openxmlformats.org/drawingml/2006/main" noGrp="1"/>
+          </p:cNvSpPr>
+          <p:nvPr/>
+        </p:nvSpPr>
+        <p:spPr>
+          <a:xfrm xmlns:a="http://schemas.openxmlformats.org/drawingml/2006/main">
+            <a:off x="533400" y="2000250"/>
+            <a:ext cx="10591800" cy="0"/>
           </a:xfrm>
           <a:prstGeom xmlns:a="http://schemas.openxmlformats.org/drawingml/2006/main" prst="line">
             <a:avLst/>
@@ -5604,7 +5342,7 @@
           <a:noFill xmlns:a="http://schemas.openxmlformats.org/drawingml/2006/main"/>
           <a:ln xmlns:a="http://schemas.openxmlformats.org/drawingml/2006/main" w="13335">
             <a:solidFill>
-              <a:srgbClr val="C8D1D2"/>
+              <a:srgbClr val="D8DEDF"/>
             </a:solidFill>
             <a:prstDash val="solid"/>
           </a:ln>
@@ -5615,29 +5353,129 @@
           <p:cNvPr id="4" name="">
             <a:extLst xmlns:a="http://schemas.openxmlformats.org/drawingml/2006/main">
               <a:ext uri="{FF2B5EF4-FFF2-40B4-BE49-F238E27FC236}">
-                <a16:creationId xmlns:a16="http://schemas.microsoft.com/office/drawing/2014/main" id="{6E16BB3F-DA9B-4391-A1EE-EEBB8A36B32B}"/>
-              </a:ext>
-            </a:extLst>
-          </p:cNvPr>
-          <p:cNvSpPr>
-            <a:spLocks xmlns:a="http://schemas.openxmlformats.org/drawingml/2006/main" noGrp="1"/>
-          </p:cNvSpPr>
-          <p:nvPr/>
-        </p:nvSpPr>
-        <p:spPr>
-          <a:xfrm xmlns:a="http://schemas.openxmlformats.org/drawingml/2006/main">
-            <a:off x="685800" y="2457450"/>
-            <a:ext cx="3714750" cy="2533650"/>
+                <a16:creationId xmlns:a16="http://schemas.microsoft.com/office/drawing/2014/main" id="{5755AB13-D088-478E-A4B0-484533D8D650}"/>
+              </a:ext>
+            </a:extLst>
+          </p:cNvPr>
+          <p:cNvSpPr>
+            <a:spLocks xmlns:a="http://schemas.openxmlformats.org/drawingml/2006/main" noGrp="1"/>
+          </p:cNvSpPr>
+          <p:nvPr/>
+        </p:nvSpPr>
+        <p:spPr>
+          <a:xfrm xmlns:a="http://schemas.openxmlformats.org/drawingml/2006/main">
+            <a:off x="533400" y="6362700"/>
+            <a:ext cx="5334000" cy="228600"/>
+          </a:xfrm>
+          <a:prstGeom xmlns:a="http://schemas.openxmlformats.org/drawingml/2006/main" prst="rect">
+            <a:avLst/>
+          </a:prstGeom>
+          <a:noFill xmlns:a="http://schemas.openxmlformats.org/drawingml/2006/main"/>
+          <a:ln xmlns:a="http://schemas.openxmlformats.org/drawingml/2006/main" w="0">
+            <a:noFill/>
+            <a:prstDash val="solid"/>
+          </a:ln>
+        </p:spPr>
+        <p:txBody>
+          <a:bodyPr xmlns:a="http://schemas.openxmlformats.org/drawingml/2006/main"/>
+          <a:lstStyle xmlns:a="http://schemas.openxmlformats.org/drawingml/2006/main"/>
+          <a:p xmlns:a="http://schemas.openxmlformats.org/drawingml/2006/main">
+            <a:pPr>
+              <a:defRPr sz="1050" b="1">
+                <a:solidFill>
+                  <a:srgbClr val="536267"/>
+                </a:solidFill>
+              </a:defRPr>
+            </a:pPr>
+            <a:r>
+              <a:rPr sz="1050" b="1">
+                <a:solidFill>
+                  <a:srgbClr val="536267"/>
+                </a:solidFill>
+              </a:rPr>
+              <a:t>TrustTill | Hackaholics 7.0 | Financial Inclusion</a:t>
+            </a:r>
+          </a:p>
+        </p:txBody>
+      </p:sp>
+      <p:sp>
+        <p:nvSpPr>
+          <p:cNvPr id="5" name="">
+            <a:extLst xmlns:a="http://schemas.openxmlformats.org/drawingml/2006/main">
+              <a:ext uri="{FF2B5EF4-FFF2-40B4-BE49-F238E27FC236}">
+                <a16:creationId xmlns:a16="http://schemas.microsoft.com/office/drawing/2014/main" id="{6C6365C1-755C-453A-8776-D45EB756A715}"/>
+              </a:ext>
+            </a:extLst>
+          </p:cNvPr>
+          <p:cNvSpPr>
+            <a:spLocks xmlns:a="http://schemas.openxmlformats.org/drawingml/2006/main" noGrp="1"/>
+          </p:cNvSpPr>
+          <p:nvPr/>
+        </p:nvSpPr>
+        <p:spPr>
+          <a:xfrm xmlns:a="http://schemas.openxmlformats.org/drawingml/2006/main">
+            <a:off x="11315700" y="6362700"/>
+            <a:ext cx="342900" cy="228600"/>
+          </a:xfrm>
+          <a:prstGeom xmlns:a="http://schemas.openxmlformats.org/drawingml/2006/main" prst="rect">
+            <a:avLst/>
+          </a:prstGeom>
+          <a:noFill xmlns:a="http://schemas.openxmlformats.org/drawingml/2006/main"/>
+          <a:ln xmlns:a="http://schemas.openxmlformats.org/drawingml/2006/main" w="0">
+            <a:noFill/>
+            <a:prstDash val="solid"/>
+          </a:ln>
+        </p:spPr>
+        <p:txBody>
+          <a:bodyPr xmlns:a="http://schemas.openxmlformats.org/drawingml/2006/main"/>
+          <a:lstStyle xmlns:a="http://schemas.openxmlformats.org/drawingml/2006/main"/>
+          <a:p xmlns:a="http://schemas.openxmlformats.org/drawingml/2006/main">
+            <a:pPr algn="r">
+              <a:defRPr sz="1050" b="1">
+                <a:solidFill>
+                  <a:srgbClr val="536267"/>
+                </a:solidFill>
+              </a:defRPr>
+            </a:pPr>
+            <a:r>
+              <a:rPr sz="1050" b="1">
+                <a:solidFill>
+                  <a:srgbClr val="536267"/>
+                </a:solidFill>
+              </a:rPr>
+              <a:t>6</a:t>
+            </a:r>
+          </a:p>
+        </p:txBody>
+      </p:sp>
+      <p:sp>
+        <p:nvSpPr>
+          <p:cNvPr id="6" name="">
+            <a:extLst xmlns:a="http://schemas.openxmlformats.org/drawingml/2006/main">
+              <a:ext uri="{FF2B5EF4-FFF2-40B4-BE49-F238E27FC236}">
+                <a16:creationId xmlns:a16="http://schemas.microsoft.com/office/drawing/2014/main" id="{EE69B463-7FD5-4A24-9DFA-893B26313658}"/>
+              </a:ext>
+            </a:extLst>
+          </p:cNvPr>
+          <p:cNvSpPr>
+            <a:spLocks xmlns:a="http://schemas.openxmlformats.org/drawingml/2006/main" noGrp="1"/>
+          </p:cNvSpPr>
+          <p:nvPr/>
+        </p:nvSpPr>
+        <p:spPr>
+          <a:xfrm xmlns:a="http://schemas.openxmlformats.org/drawingml/2006/main">
+            <a:off x="685800" y="2724150"/>
+            <a:ext cx="1676400" cy="1485900"/>
           </a:xfrm>
           <a:prstGeom xmlns:a="http://schemas.openxmlformats.org/drawingml/2006/main" prst="rect">
             <a:avLst/>
           </a:prstGeom>
           <a:solidFill xmlns:a="http://schemas.openxmlformats.org/drawingml/2006/main">
-            <a:srgbClr val="F2F5F4"/>
+            <a:srgbClr val="FBF5EA"/>
           </a:solidFill>
           <a:ln xmlns:a="http://schemas.openxmlformats.org/drawingml/2006/main" w="9525">
             <a:solidFill>
-              <a:srgbClr val="C8D1D2"/>
+              <a:srgbClr val="D8DEDF"/>
             </a:solidFill>
             <a:prstDash val="solid"/>
           </a:ln>
@@ -5645,200 +5483,199 @@
       </p:sp>
       <p:sp>
         <p:nvSpPr>
-          <p:cNvPr id="5" name="">
-            <a:extLst xmlns:a="http://schemas.openxmlformats.org/drawingml/2006/main">
-              <a:ext uri="{FF2B5EF4-FFF2-40B4-BE49-F238E27FC236}">
-                <a16:creationId xmlns:a16="http://schemas.microsoft.com/office/drawing/2014/main" id="{D7C81B8C-CB2E-4D17-8629-C22617CA5C6C}"/>
-              </a:ext>
-            </a:extLst>
-          </p:cNvPr>
-          <p:cNvSpPr>
-            <a:spLocks xmlns:a="http://schemas.openxmlformats.org/drawingml/2006/main" noGrp="1"/>
-          </p:cNvSpPr>
-          <p:nvPr/>
-        </p:nvSpPr>
-        <p:spPr>
-          <a:xfrm xmlns:a="http://schemas.openxmlformats.org/drawingml/2006/main">
-            <a:off x="952500" y="2724150"/>
-            <a:ext cx="2667000" cy="361950"/>
-          </a:xfrm>
-          <a:prstGeom xmlns:a="http://schemas.openxmlformats.org/drawingml/2006/main" prst="rect">
-            <a:avLst/>
-          </a:prstGeom>
-          <a:noFill xmlns:a="http://schemas.openxmlformats.org/drawingml/2006/main"/>
-          <a:ln xmlns:a="http://schemas.openxmlformats.org/drawingml/2006/main" w="0">
-            <a:noFill/>
-            <a:prstDash val="solid"/>
-          </a:ln>
-        </p:spPr>
-        <p:txBody>
-          <a:bodyPr xmlns:a="http://schemas.openxmlformats.org/drawingml/2006/main"/>
-          <a:lstStyle xmlns:a="http://schemas.openxmlformats.org/drawingml/2006/main"/>
-          <a:p xmlns:a="http://schemas.openxmlformats.org/drawingml/2006/main">
-            <a:pPr>
-              <a:defRPr sz="2250" b="1">
+          <p:cNvPr id="7" name="">
+            <a:extLst xmlns:a="http://schemas.openxmlformats.org/drawingml/2006/main">
+              <a:ext uri="{FF2B5EF4-FFF2-40B4-BE49-F238E27FC236}">
+                <a16:creationId xmlns:a16="http://schemas.microsoft.com/office/drawing/2014/main" id="{77D4E311-74B7-4700-8E9C-88F1E94013AA}"/>
+              </a:ext>
+            </a:extLst>
+          </p:cNvPr>
+          <p:cNvSpPr>
+            <a:spLocks xmlns:a="http://schemas.openxmlformats.org/drawingml/2006/main" noGrp="1"/>
+          </p:cNvSpPr>
+          <p:nvPr/>
+        </p:nvSpPr>
+        <p:spPr>
+          <a:xfrm xmlns:a="http://schemas.openxmlformats.org/drawingml/2006/main">
+            <a:off x="857250" y="3009900"/>
+            <a:ext cx="1314450" cy="304800"/>
+          </a:xfrm>
+          <a:prstGeom xmlns:a="http://schemas.openxmlformats.org/drawingml/2006/main" prst="rect">
+            <a:avLst/>
+          </a:prstGeom>
+          <a:noFill xmlns:a="http://schemas.openxmlformats.org/drawingml/2006/main"/>
+          <a:ln xmlns:a="http://schemas.openxmlformats.org/drawingml/2006/main" w="0">
+            <a:noFill/>
+            <a:prstDash val="solid"/>
+          </a:ln>
+        </p:spPr>
+        <p:txBody>
+          <a:bodyPr xmlns:a="http://schemas.openxmlformats.org/drawingml/2006/main"/>
+          <a:lstStyle xmlns:a="http://schemas.openxmlformats.org/drawingml/2006/main"/>
+          <a:p xmlns:a="http://schemas.openxmlformats.org/drawingml/2006/main">
+            <a:pPr algn="ctr">
+              <a:defRPr sz="1800" b="1">
                 <a:solidFill>
                   <a:srgbClr val="003D48"/>
                 </a:solidFill>
               </a:defRPr>
             </a:pPr>
             <a:r>
-              <a:rPr sz="2250" b="1">
+              <a:rPr sz="1800" b="1">
                 <a:solidFill>
                   <a:srgbClr val="003D48"/>
                 </a:solidFill>
               </a:rPr>
-              <a:t>Must ship</a:t>
-            </a:r>
-          </a:p>
-        </p:txBody>
-      </p:sp>
-      <p:sp>
-        <p:nvSpPr>
-          <p:cNvPr id="6" name="">
-            <a:extLst xmlns:a="http://schemas.openxmlformats.org/drawingml/2006/main">
-              <a:ext uri="{FF2B5EF4-FFF2-40B4-BE49-F238E27FC236}">
-                <a16:creationId xmlns:a16="http://schemas.microsoft.com/office/drawing/2014/main" id="{E60B921E-667F-4D6E-BF87-199ACBE250EC}"/>
-              </a:ext>
-            </a:extLst>
-          </p:cNvPr>
-          <p:cNvSpPr>
-            <a:spLocks xmlns:a="http://schemas.openxmlformats.org/drawingml/2006/main" noGrp="1"/>
-          </p:cNvSpPr>
-          <p:nvPr/>
-        </p:nvSpPr>
-        <p:spPr>
-          <a:xfrm xmlns:a="http://schemas.openxmlformats.org/drawingml/2006/main">
-            <a:off x="952500" y="3333750"/>
-            <a:ext cx="2762250" cy="1238250"/>
-          </a:xfrm>
-          <a:prstGeom xmlns:a="http://schemas.openxmlformats.org/drawingml/2006/main" prst="rect">
-            <a:avLst/>
-          </a:prstGeom>
-          <a:noFill xmlns:a="http://schemas.openxmlformats.org/drawingml/2006/main"/>
-          <a:ln xmlns:a="http://schemas.openxmlformats.org/drawingml/2006/main" w="0">
-            <a:noFill/>
-            <a:prstDash val="solid"/>
-          </a:ln>
-        </p:spPr>
-        <p:txBody>
-          <a:bodyPr xmlns:a="http://schemas.openxmlformats.org/drawingml/2006/main"/>
-          <a:lstStyle xmlns:a="http://schemas.openxmlformats.org/drawingml/2006/main"/>
-          <a:p xmlns:a="http://schemas.openxmlformats.org/drawingml/2006/main">
-            <a:pPr>
-              <a:defRPr sz="2100" b="1">
+              <a:t>Sources</a:t>
+            </a:r>
+          </a:p>
+        </p:txBody>
+      </p:sp>
+      <p:sp>
+        <p:nvSpPr>
+          <p:cNvPr id="8" name="">
+            <a:extLst xmlns:a="http://schemas.openxmlformats.org/drawingml/2006/main">
+              <a:ext uri="{FF2B5EF4-FFF2-40B4-BE49-F238E27FC236}">
+                <a16:creationId xmlns:a16="http://schemas.microsoft.com/office/drawing/2014/main" id="{D20831DF-C08B-4818-B605-88A5AC8070ED}"/>
+              </a:ext>
+            </a:extLst>
+          </p:cNvPr>
+          <p:cNvSpPr>
+            <a:spLocks xmlns:a="http://schemas.openxmlformats.org/drawingml/2006/main" noGrp="1"/>
+          </p:cNvSpPr>
+          <p:nvPr/>
+        </p:nvSpPr>
+        <p:spPr>
+          <a:xfrm xmlns:a="http://schemas.openxmlformats.org/drawingml/2006/main">
+            <a:off x="857250" y="3505200"/>
+            <a:ext cx="1314450" cy="514350"/>
+          </a:xfrm>
+          <a:prstGeom xmlns:a="http://schemas.openxmlformats.org/drawingml/2006/main" prst="rect">
+            <a:avLst/>
+          </a:prstGeom>
+          <a:noFill xmlns:a="http://schemas.openxmlformats.org/drawingml/2006/main"/>
+          <a:ln xmlns:a="http://schemas.openxmlformats.org/drawingml/2006/main" w="0">
+            <a:noFill/>
+            <a:prstDash val="solid"/>
+          </a:ln>
+        </p:spPr>
+        <p:txBody>
+          <a:bodyPr xmlns:a="http://schemas.openxmlformats.org/drawingml/2006/main"/>
+          <a:lstStyle xmlns:a="http://schemas.openxmlformats.org/drawingml/2006/main"/>
+          <a:p xmlns:a="http://schemas.openxmlformats.org/drawingml/2006/main">
+            <a:pPr algn="ctr">
+              <a:defRPr sz="1350" b="0">
                 <a:solidFill>
                   <a:srgbClr val="101820"/>
                 </a:solidFill>
               </a:defRPr>
             </a:pPr>
             <a:r>
-              <a:rPr sz="2100" b="1">
+              <a:rPr sz="1350" b="0">
                 <a:solidFill>
                   <a:srgbClr val="101820"/>
                 </a:solidFill>
               </a:rPr>
-              <a:t>Merchant profile</a:t>
-            </a:r>
-          </a:p>
-          <a:p xmlns:a="http://schemas.openxmlformats.org/drawingml/2006/main">
-            <a:pPr>
-              <a:defRPr sz="2100" b="1">
+              <a:t>cash, alerts,</a:t>
+            </a:r>
+          </a:p>
+          <a:p xmlns:a="http://schemas.openxmlformats.org/drawingml/2006/main">
+            <a:pPr algn="ctr">
+              <a:defRPr sz="1350" b="0">
                 <a:solidFill>
                   <a:srgbClr val="101820"/>
                 </a:solidFill>
               </a:defRPr>
             </a:pPr>
             <a:r>
-              <a:rPr sz="2100" b="1">
+              <a:rPr sz="1350" b="0">
                 <a:solidFill>
                   <a:srgbClr val="101820"/>
                 </a:solidFill>
               </a:rPr>
-              <a:t>Payment alert parser</a:t>
-            </a:r>
-          </a:p>
-          <a:p xmlns:a="http://schemas.openxmlformats.org/drawingml/2006/main">
-            <a:pPr>
-              <a:defRPr sz="2100" b="1">
-                <a:solidFill>
-                  <a:srgbClr val="101820"/>
-                </a:solidFill>
-              </a:defRPr>
-            </a:pPr>
-            <a:r>
-              <a:rPr sz="2100" b="1">
-                <a:solidFill>
-                  <a:srgbClr val="101820"/>
-                </a:solidFill>
-              </a:rPr>
-              <a:t>Risk review</a:t>
-            </a:r>
-          </a:p>
-          <a:p xmlns:a="http://schemas.openxmlformats.org/drawingml/2006/main">
-            <a:pPr>
-              <a:defRPr sz="2100" b="1">
-                <a:solidFill>
-                  <a:srgbClr val="101820"/>
-                </a:solidFill>
-              </a:defRPr>
-            </a:pPr>
-            <a:r>
-              <a:rPr sz="2100" b="1">
-                <a:solidFill>
-                  <a:srgbClr val="101820"/>
-                </a:solidFill>
-              </a:rPr>
-              <a:t>Readiness score</a:t>
-            </a:r>
-          </a:p>
-          <a:p xmlns:a="http://schemas.openxmlformats.org/drawingml/2006/main">
-            <a:pPr>
-              <a:defRPr sz="2100" b="1">
-                <a:solidFill>
-                  <a:srgbClr val="101820"/>
-                </a:solidFill>
-              </a:defRPr>
-            </a:pPr>
-            <a:r>
-              <a:rPr sz="2100" b="1">
-                <a:solidFill>
-                  <a:srgbClr val="101820"/>
-                </a:solidFill>
-              </a:rPr>
-              <a:t>Wema Desk</a:t>
-            </a:r>
-          </a:p>
-        </p:txBody>
-      </p:sp>
-      <p:sp>
-        <p:nvSpPr>
-          <p:cNvPr id="7" name="">
-            <a:extLst xmlns:a="http://schemas.openxmlformats.org/drawingml/2006/main">
-              <a:ext uri="{FF2B5EF4-FFF2-40B4-BE49-F238E27FC236}">
-                <a16:creationId xmlns:a16="http://schemas.microsoft.com/office/drawing/2014/main" id="{989E2C8E-AD7E-4A7F-A685-402B2683B58D}"/>
-              </a:ext>
-            </a:extLst>
-          </p:cNvPr>
-          <p:cNvSpPr>
-            <a:spLocks xmlns:a="http://schemas.openxmlformats.org/drawingml/2006/main" noGrp="1"/>
-          </p:cNvSpPr>
-          <p:nvPr/>
-        </p:nvSpPr>
-        <p:spPr>
-          <a:xfrm xmlns:a="http://schemas.openxmlformats.org/drawingml/2006/main">
-            <a:off x="5200650" y="2457450"/>
-            <a:ext cx="3714750" cy="2533650"/>
+              <a:t>receipts, POS</a:t>
+            </a:r>
+          </a:p>
+        </p:txBody>
+      </p:sp>
+      <p:sp>
+        <p:nvSpPr>
+          <p:cNvPr id="9" name="">
+            <a:extLst xmlns:a="http://schemas.openxmlformats.org/drawingml/2006/main">
+              <a:ext uri="{FF2B5EF4-FFF2-40B4-BE49-F238E27FC236}">
+                <a16:creationId xmlns:a16="http://schemas.microsoft.com/office/drawing/2014/main" id="{AE35953F-9CE0-4FAF-B900-91AEA52D6F4D}"/>
+              </a:ext>
+            </a:extLst>
+          </p:cNvPr>
+          <p:cNvSpPr>
+            <a:spLocks xmlns:a="http://schemas.openxmlformats.org/drawingml/2006/main" noGrp="1"/>
+          </p:cNvSpPr>
+          <p:nvPr/>
+        </p:nvSpPr>
+        <p:spPr>
+          <a:xfrm xmlns:a="http://schemas.openxmlformats.org/drawingml/2006/main">
+            <a:off x="2495550" y="3295650"/>
+            <a:ext cx="323850" cy="457200"/>
+          </a:xfrm>
+          <a:prstGeom xmlns:a="http://schemas.openxmlformats.org/drawingml/2006/main" prst="rect">
+            <a:avLst/>
+          </a:prstGeom>
+          <a:noFill xmlns:a="http://schemas.openxmlformats.org/drawingml/2006/main"/>
+          <a:ln xmlns:a="http://schemas.openxmlformats.org/drawingml/2006/main" w="0">
+            <a:noFill/>
+            <a:prstDash val="solid"/>
+          </a:ln>
+        </p:spPr>
+        <p:txBody>
+          <a:bodyPr xmlns:a="http://schemas.openxmlformats.org/drawingml/2006/main"/>
+          <a:lstStyle xmlns:a="http://schemas.openxmlformats.org/drawingml/2006/main"/>
+          <a:p xmlns:a="http://schemas.openxmlformats.org/drawingml/2006/main">
+            <a:pPr algn="ctr">
+              <a:defRPr sz="2700" b="1">
+                <a:solidFill>
+                  <a:srgbClr val="E4144F"/>
+                </a:solidFill>
+              </a:defRPr>
+            </a:pPr>
+            <a:r>
+              <a:rPr sz="2700" b="1">
+                <a:solidFill>
+                  <a:srgbClr val="E4144F"/>
+                </a:solidFill>
+              </a:rPr>
+              <a:t>&gt;</a:t>
+            </a:r>
+          </a:p>
+        </p:txBody>
+      </p:sp>
+      <p:sp>
+        <p:nvSpPr>
+          <p:cNvPr id="10" name="">
+            <a:extLst xmlns:a="http://schemas.openxmlformats.org/drawingml/2006/main">
+              <a:ext uri="{FF2B5EF4-FFF2-40B4-BE49-F238E27FC236}">
+                <a16:creationId xmlns:a16="http://schemas.microsoft.com/office/drawing/2014/main" id="{5043C1C6-6CAB-4062-B5E8-B5C69C30A22B}"/>
+              </a:ext>
+            </a:extLst>
+          </p:cNvPr>
+          <p:cNvSpPr>
+            <a:spLocks xmlns:a="http://schemas.openxmlformats.org/drawingml/2006/main" noGrp="1"/>
+          </p:cNvSpPr>
+          <p:nvPr/>
+        </p:nvSpPr>
+        <p:spPr>
+          <a:xfrm xmlns:a="http://schemas.openxmlformats.org/drawingml/2006/main">
+            <a:off x="2876550" y="2724150"/>
+            <a:ext cx="1676400" cy="1485900"/>
           </a:xfrm>
           <a:prstGeom xmlns:a="http://schemas.openxmlformats.org/drawingml/2006/main" prst="rect">
             <a:avLst/>
           </a:prstGeom>
           <a:solidFill xmlns:a="http://schemas.openxmlformats.org/drawingml/2006/main">
-            <a:srgbClr val="F8F3EA"/>
+            <a:srgbClr val="F4F7F6"/>
           </a:solidFill>
           <a:ln xmlns:a="http://schemas.openxmlformats.org/drawingml/2006/main" w="9525">
             <a:solidFill>
-              <a:srgbClr val="C8D1D2"/>
+              <a:srgbClr val="D8DEDF"/>
             </a:solidFill>
             <a:prstDash val="solid"/>
           </a:ln>
@@ -5846,301 +5683,800 @@
       </p:sp>
       <p:sp>
         <p:nvSpPr>
-          <p:cNvPr id="8" name="">
-            <a:extLst xmlns:a="http://schemas.openxmlformats.org/drawingml/2006/main">
-              <a:ext uri="{FF2B5EF4-FFF2-40B4-BE49-F238E27FC236}">
-                <a16:creationId xmlns:a16="http://schemas.microsoft.com/office/drawing/2014/main" id="{B8664A81-E862-4362-AA40-2C48A8495780}"/>
-              </a:ext>
-            </a:extLst>
-          </p:cNvPr>
-          <p:cNvSpPr>
-            <a:spLocks xmlns:a="http://schemas.openxmlformats.org/drawingml/2006/main" noGrp="1"/>
-          </p:cNvSpPr>
-          <p:nvPr/>
-        </p:nvSpPr>
-        <p:spPr>
-          <a:xfrm xmlns:a="http://schemas.openxmlformats.org/drawingml/2006/main">
-            <a:off x="5467350" y="2724150"/>
-            <a:ext cx="2667000" cy="361950"/>
-          </a:xfrm>
-          <a:prstGeom xmlns:a="http://schemas.openxmlformats.org/drawingml/2006/main" prst="rect">
-            <a:avLst/>
-          </a:prstGeom>
-          <a:noFill xmlns:a="http://schemas.openxmlformats.org/drawingml/2006/main"/>
-          <a:ln xmlns:a="http://schemas.openxmlformats.org/drawingml/2006/main" w="0">
-            <a:noFill/>
-            <a:prstDash val="solid"/>
-          </a:ln>
-        </p:spPr>
-        <p:txBody>
-          <a:bodyPr xmlns:a="http://schemas.openxmlformats.org/drawingml/2006/main"/>
-          <a:lstStyle xmlns:a="http://schemas.openxmlformats.org/drawingml/2006/main"/>
-          <a:p xmlns:a="http://schemas.openxmlformats.org/drawingml/2006/main">
-            <a:pPr>
-              <a:defRPr sz="2250" b="1">
-                <a:solidFill>
-                  <a:srgbClr val="DE1A4C"/>
-                </a:solidFill>
-              </a:defRPr>
-            </a:pPr>
-            <a:r>
-              <a:rPr sz="2250" b="1">
-                <a:solidFill>
-                  <a:srgbClr val="DE1A4C"/>
-                </a:solidFill>
-              </a:rPr>
-              <a:t>Avoid for now</a:t>
-            </a:r>
-          </a:p>
-        </p:txBody>
-      </p:sp>
-      <p:sp>
-        <p:nvSpPr>
-          <p:cNvPr id="9" name="">
-            <a:extLst xmlns:a="http://schemas.openxmlformats.org/drawingml/2006/main">
-              <a:ext uri="{FF2B5EF4-FFF2-40B4-BE49-F238E27FC236}">
-                <a16:creationId xmlns:a16="http://schemas.microsoft.com/office/drawing/2014/main" id="{1F1B50A6-0CCC-4B7C-AC57-7C7483E401DF}"/>
-              </a:ext>
-            </a:extLst>
-          </p:cNvPr>
-          <p:cNvSpPr>
-            <a:spLocks xmlns:a="http://schemas.openxmlformats.org/drawingml/2006/main" noGrp="1"/>
-          </p:cNvSpPr>
-          <p:nvPr/>
-        </p:nvSpPr>
-        <p:spPr>
-          <a:xfrm xmlns:a="http://schemas.openxmlformats.org/drawingml/2006/main">
-            <a:off x="5467350" y="3333750"/>
-            <a:ext cx="2762250" cy="1238250"/>
-          </a:xfrm>
-          <a:prstGeom xmlns:a="http://schemas.openxmlformats.org/drawingml/2006/main" prst="rect">
-            <a:avLst/>
-          </a:prstGeom>
-          <a:noFill xmlns:a="http://schemas.openxmlformats.org/drawingml/2006/main"/>
-          <a:ln xmlns:a="http://schemas.openxmlformats.org/drawingml/2006/main" w="0">
-            <a:noFill/>
-            <a:prstDash val="solid"/>
-          </a:ln>
-        </p:spPr>
-        <p:txBody>
-          <a:bodyPr xmlns:a="http://schemas.openxmlformats.org/drawingml/2006/main"/>
-          <a:lstStyle xmlns:a="http://schemas.openxmlformats.org/drawingml/2006/main"/>
-          <a:p xmlns:a="http://schemas.openxmlformats.org/drawingml/2006/main">
-            <a:pPr>
-              <a:defRPr sz="2100" b="1">
+          <p:cNvPr id="11" name="">
+            <a:extLst xmlns:a="http://schemas.openxmlformats.org/drawingml/2006/main">
+              <a:ext uri="{FF2B5EF4-FFF2-40B4-BE49-F238E27FC236}">
+                <a16:creationId xmlns:a16="http://schemas.microsoft.com/office/drawing/2014/main" id="{67420ADB-10FB-4D89-AF3D-42BDDFD475C7}"/>
+              </a:ext>
+            </a:extLst>
+          </p:cNvPr>
+          <p:cNvSpPr>
+            <a:spLocks xmlns:a="http://schemas.openxmlformats.org/drawingml/2006/main" noGrp="1"/>
+          </p:cNvSpPr>
+          <p:nvPr/>
+        </p:nvSpPr>
+        <p:spPr>
+          <a:xfrm xmlns:a="http://schemas.openxmlformats.org/drawingml/2006/main">
+            <a:off x="3048000" y="3009900"/>
+            <a:ext cx="1314450" cy="304800"/>
+          </a:xfrm>
+          <a:prstGeom xmlns:a="http://schemas.openxmlformats.org/drawingml/2006/main" prst="rect">
+            <a:avLst/>
+          </a:prstGeom>
+          <a:noFill xmlns:a="http://schemas.openxmlformats.org/drawingml/2006/main"/>
+          <a:ln xmlns:a="http://schemas.openxmlformats.org/drawingml/2006/main" w="0">
+            <a:noFill/>
+            <a:prstDash val="solid"/>
+          </a:ln>
+        </p:spPr>
+        <p:txBody>
+          <a:bodyPr xmlns:a="http://schemas.openxmlformats.org/drawingml/2006/main"/>
+          <a:lstStyle xmlns:a="http://schemas.openxmlformats.org/drawingml/2006/main"/>
+          <a:p xmlns:a="http://schemas.openxmlformats.org/drawingml/2006/main">
+            <a:pPr algn="ctr">
+              <a:defRPr sz="1800" b="1">
+                <a:solidFill>
+                  <a:srgbClr val="003D48"/>
+                </a:solidFill>
+              </a:defRPr>
+            </a:pPr>
+            <a:r>
+              <a:rPr sz="1800" b="1">
+                <a:solidFill>
+                  <a:srgbClr val="003D48"/>
+                </a:solidFill>
+              </a:rPr>
+              <a:t>Ingestion</a:t>
+            </a:r>
+          </a:p>
+        </p:txBody>
+      </p:sp>
+      <p:sp>
+        <p:nvSpPr>
+          <p:cNvPr id="12" name="">
+            <a:extLst xmlns:a="http://schemas.openxmlformats.org/drawingml/2006/main">
+              <a:ext uri="{FF2B5EF4-FFF2-40B4-BE49-F238E27FC236}">
+                <a16:creationId xmlns:a16="http://schemas.microsoft.com/office/drawing/2014/main" id="{8FCE7723-0092-4B7E-B65E-2CE8F6FA27E5}"/>
+              </a:ext>
+            </a:extLst>
+          </p:cNvPr>
+          <p:cNvSpPr>
+            <a:spLocks xmlns:a="http://schemas.openxmlformats.org/drawingml/2006/main" noGrp="1"/>
+          </p:cNvSpPr>
+          <p:nvPr/>
+        </p:nvSpPr>
+        <p:spPr>
+          <a:xfrm xmlns:a="http://schemas.openxmlformats.org/drawingml/2006/main">
+            <a:off x="3048000" y="3505200"/>
+            <a:ext cx="1314450" cy="514350"/>
+          </a:xfrm>
+          <a:prstGeom xmlns:a="http://schemas.openxmlformats.org/drawingml/2006/main" prst="rect">
+            <a:avLst/>
+          </a:prstGeom>
+          <a:noFill xmlns:a="http://schemas.openxmlformats.org/drawingml/2006/main"/>
+          <a:ln xmlns:a="http://schemas.openxmlformats.org/drawingml/2006/main" w="0">
+            <a:noFill/>
+            <a:prstDash val="solid"/>
+          </a:ln>
+        </p:spPr>
+        <p:txBody>
+          <a:bodyPr xmlns:a="http://schemas.openxmlformats.org/drawingml/2006/main"/>
+          <a:lstStyle xmlns:a="http://schemas.openxmlformats.org/drawingml/2006/main"/>
+          <a:p xmlns:a="http://schemas.openxmlformats.org/drawingml/2006/main">
+            <a:pPr algn="ctr">
+              <a:defRPr sz="1350" b="0">
                 <a:solidFill>
                   <a:srgbClr val="101820"/>
                 </a:solidFill>
               </a:defRPr>
             </a:pPr>
             <a:r>
-              <a:rPr sz="2100" b="1">
+              <a:rPr sz="1350" b="0">
                 <a:solidFill>
                   <a:srgbClr val="101820"/>
                 </a:solidFill>
               </a:rPr>
-              <a:t>Full core banking</a:t>
-            </a:r>
-          </a:p>
-          <a:p xmlns:a="http://schemas.openxmlformats.org/drawingml/2006/main">
-            <a:pPr>
-              <a:defRPr sz="2100" b="1">
+              <a:t>EvidenceItem</a:t>
+            </a:r>
+          </a:p>
+          <a:p xmlns:a="http://schemas.openxmlformats.org/drawingml/2006/main">
+            <a:pPr algn="ctr">
+              <a:defRPr sz="1350" b="0">
                 <a:solidFill>
                   <a:srgbClr val="101820"/>
                 </a:solidFill>
               </a:defRPr>
             </a:pPr>
             <a:r>
-              <a:rPr sz="2100" b="1">
+              <a:rPr sz="1350" b="0">
                 <a:solidFill>
                   <a:srgbClr val="101820"/>
                 </a:solidFill>
               </a:rPr>
-              <a:t>Production credit scoring</a:t>
-            </a:r>
-          </a:p>
-          <a:p xmlns:a="http://schemas.openxmlformats.org/drawingml/2006/main">
-            <a:pPr>
-              <a:defRPr sz="2100" b="1">
+              <a:t>API</a:t>
+            </a:r>
+          </a:p>
+        </p:txBody>
+      </p:sp>
+      <p:sp>
+        <p:nvSpPr>
+          <p:cNvPr id="13" name="">
+            <a:extLst xmlns:a="http://schemas.openxmlformats.org/drawingml/2006/main">
+              <a:ext uri="{FF2B5EF4-FFF2-40B4-BE49-F238E27FC236}">
+                <a16:creationId xmlns:a16="http://schemas.microsoft.com/office/drawing/2014/main" id="{D3AB66EF-1C5E-4534-95C8-4D1E4E054603}"/>
+              </a:ext>
+            </a:extLst>
+          </p:cNvPr>
+          <p:cNvSpPr>
+            <a:spLocks xmlns:a="http://schemas.openxmlformats.org/drawingml/2006/main" noGrp="1"/>
+          </p:cNvSpPr>
+          <p:nvPr/>
+        </p:nvSpPr>
+        <p:spPr>
+          <a:xfrm xmlns:a="http://schemas.openxmlformats.org/drawingml/2006/main">
+            <a:off x="4686300" y="3295650"/>
+            <a:ext cx="323850" cy="457200"/>
+          </a:xfrm>
+          <a:prstGeom xmlns:a="http://schemas.openxmlformats.org/drawingml/2006/main" prst="rect">
+            <a:avLst/>
+          </a:prstGeom>
+          <a:noFill xmlns:a="http://schemas.openxmlformats.org/drawingml/2006/main"/>
+          <a:ln xmlns:a="http://schemas.openxmlformats.org/drawingml/2006/main" w="0">
+            <a:noFill/>
+            <a:prstDash val="solid"/>
+          </a:ln>
+        </p:spPr>
+        <p:txBody>
+          <a:bodyPr xmlns:a="http://schemas.openxmlformats.org/drawingml/2006/main"/>
+          <a:lstStyle xmlns:a="http://schemas.openxmlformats.org/drawingml/2006/main"/>
+          <a:p xmlns:a="http://schemas.openxmlformats.org/drawingml/2006/main">
+            <a:pPr algn="ctr">
+              <a:defRPr sz="2700" b="1">
+                <a:solidFill>
+                  <a:srgbClr val="E4144F"/>
+                </a:solidFill>
+              </a:defRPr>
+            </a:pPr>
+            <a:r>
+              <a:rPr sz="2700" b="1">
+                <a:solidFill>
+                  <a:srgbClr val="E4144F"/>
+                </a:solidFill>
+              </a:rPr>
+              <a:t>&gt;</a:t>
+            </a:r>
+          </a:p>
+        </p:txBody>
+      </p:sp>
+      <p:sp>
+        <p:nvSpPr>
+          <p:cNvPr id="14" name="">
+            <a:extLst xmlns:a="http://schemas.openxmlformats.org/drawingml/2006/main">
+              <a:ext uri="{FF2B5EF4-FFF2-40B4-BE49-F238E27FC236}">
+                <a16:creationId xmlns:a16="http://schemas.microsoft.com/office/drawing/2014/main" id="{D22447F8-2E8C-4A49-853D-C886AC561A3B}"/>
+              </a:ext>
+            </a:extLst>
+          </p:cNvPr>
+          <p:cNvSpPr>
+            <a:spLocks xmlns:a="http://schemas.openxmlformats.org/drawingml/2006/main" noGrp="1"/>
+          </p:cNvSpPr>
+          <p:nvPr/>
+        </p:nvSpPr>
+        <p:spPr>
+          <a:xfrm xmlns:a="http://schemas.openxmlformats.org/drawingml/2006/main">
+            <a:off x="5067300" y="2724150"/>
+            <a:ext cx="1676400" cy="1485900"/>
+          </a:xfrm>
+          <a:prstGeom xmlns:a="http://schemas.openxmlformats.org/drawingml/2006/main" prst="rect">
+            <a:avLst/>
+          </a:prstGeom>
+          <a:solidFill xmlns:a="http://schemas.openxmlformats.org/drawingml/2006/main">
+            <a:srgbClr val="F4F7F6"/>
+          </a:solidFill>
+          <a:ln xmlns:a="http://schemas.openxmlformats.org/drawingml/2006/main" w="9525">
+            <a:solidFill>
+              <a:srgbClr val="D8DEDF"/>
+            </a:solidFill>
+            <a:prstDash val="solid"/>
+          </a:ln>
+        </p:spPr>
+      </p:sp>
+      <p:sp>
+        <p:nvSpPr>
+          <p:cNvPr id="15" name="">
+            <a:extLst xmlns:a="http://schemas.openxmlformats.org/drawingml/2006/main">
+              <a:ext uri="{FF2B5EF4-FFF2-40B4-BE49-F238E27FC236}">
+                <a16:creationId xmlns:a16="http://schemas.microsoft.com/office/drawing/2014/main" id="{F10C2D2D-5F53-409F-9D4A-DFF10249CC80}"/>
+              </a:ext>
+            </a:extLst>
+          </p:cNvPr>
+          <p:cNvSpPr>
+            <a:spLocks xmlns:a="http://schemas.openxmlformats.org/drawingml/2006/main" noGrp="1"/>
+          </p:cNvSpPr>
+          <p:nvPr/>
+        </p:nvSpPr>
+        <p:spPr>
+          <a:xfrm xmlns:a="http://schemas.openxmlformats.org/drawingml/2006/main">
+            <a:off x="5238750" y="3009900"/>
+            <a:ext cx="1314450" cy="304800"/>
+          </a:xfrm>
+          <a:prstGeom xmlns:a="http://schemas.openxmlformats.org/drawingml/2006/main" prst="rect">
+            <a:avLst/>
+          </a:prstGeom>
+          <a:noFill xmlns:a="http://schemas.openxmlformats.org/drawingml/2006/main"/>
+          <a:ln xmlns:a="http://schemas.openxmlformats.org/drawingml/2006/main" w="0">
+            <a:noFill/>
+            <a:prstDash val="solid"/>
+          </a:ln>
+        </p:spPr>
+        <p:txBody>
+          <a:bodyPr xmlns:a="http://schemas.openxmlformats.org/drawingml/2006/main"/>
+          <a:lstStyle xmlns:a="http://schemas.openxmlformats.org/drawingml/2006/main"/>
+          <a:p xmlns:a="http://schemas.openxmlformats.org/drawingml/2006/main">
+            <a:pPr algn="ctr">
+              <a:defRPr sz="1800" b="1">
+                <a:solidFill>
+                  <a:srgbClr val="003D48"/>
+                </a:solidFill>
+              </a:defRPr>
+            </a:pPr>
+            <a:r>
+              <a:rPr sz="1800" b="1">
+                <a:solidFill>
+                  <a:srgbClr val="003D48"/>
+                </a:solidFill>
+              </a:rPr>
+              <a:t>Extraction</a:t>
+            </a:r>
+          </a:p>
+        </p:txBody>
+      </p:sp>
+      <p:sp>
+        <p:nvSpPr>
+          <p:cNvPr id="16" name="">
+            <a:extLst xmlns:a="http://schemas.openxmlformats.org/drawingml/2006/main">
+              <a:ext uri="{FF2B5EF4-FFF2-40B4-BE49-F238E27FC236}">
+                <a16:creationId xmlns:a16="http://schemas.microsoft.com/office/drawing/2014/main" id="{5D87A5D1-269E-4758-9F4C-CC4EED36730C}"/>
+              </a:ext>
+            </a:extLst>
+          </p:cNvPr>
+          <p:cNvSpPr>
+            <a:spLocks xmlns:a="http://schemas.openxmlformats.org/drawingml/2006/main" noGrp="1"/>
+          </p:cNvSpPr>
+          <p:nvPr/>
+        </p:nvSpPr>
+        <p:spPr>
+          <a:xfrm xmlns:a="http://schemas.openxmlformats.org/drawingml/2006/main">
+            <a:off x="5238750" y="3505200"/>
+            <a:ext cx="1314450" cy="514350"/>
+          </a:xfrm>
+          <a:prstGeom xmlns:a="http://schemas.openxmlformats.org/drawingml/2006/main" prst="rect">
+            <a:avLst/>
+          </a:prstGeom>
+          <a:noFill xmlns:a="http://schemas.openxmlformats.org/drawingml/2006/main"/>
+          <a:ln xmlns:a="http://schemas.openxmlformats.org/drawingml/2006/main" w="0">
+            <a:noFill/>
+            <a:prstDash val="solid"/>
+          </a:ln>
+        </p:spPr>
+        <p:txBody>
+          <a:bodyPr xmlns:a="http://schemas.openxmlformats.org/drawingml/2006/main"/>
+          <a:lstStyle xmlns:a="http://schemas.openxmlformats.org/drawingml/2006/main"/>
+          <a:p xmlns:a="http://schemas.openxmlformats.org/drawingml/2006/main">
+            <a:pPr algn="ctr">
+              <a:defRPr sz="1350" b="0">
                 <a:solidFill>
                   <a:srgbClr val="101820"/>
                 </a:solidFill>
               </a:defRPr>
             </a:pPr>
             <a:r>
-              <a:rPr sz="2100" b="1">
+              <a:rPr sz="1350" b="0">
                 <a:solidFill>
                   <a:srgbClr val="101820"/>
                 </a:solidFill>
               </a:rPr>
-              <a:t>Regulatory claims</a:t>
-            </a:r>
-          </a:p>
-          <a:p xmlns:a="http://schemas.openxmlformats.org/drawingml/2006/main">
-            <a:pPr>
-              <a:defRPr sz="2100" b="1">
+              <a:t>AI parser +</a:t>
+            </a:r>
+          </a:p>
+          <a:p xmlns:a="http://schemas.openxmlformats.org/drawingml/2006/main">
+            <a:pPr algn="ctr">
+              <a:defRPr sz="1350" b="0">
                 <a:solidFill>
                   <a:srgbClr val="101820"/>
                 </a:solidFill>
               </a:defRPr>
             </a:pPr>
             <a:r>
-              <a:rPr sz="2100" b="1">
+              <a:rPr sz="1350" b="0">
                 <a:solidFill>
                   <a:srgbClr val="101820"/>
                 </a:solidFill>
               </a:rPr>
-              <a:t>Generic chatbot</a:t>
-            </a:r>
-          </a:p>
-        </p:txBody>
-      </p:sp>
-      <p:sp>
-        <p:nvSpPr>
-          <p:cNvPr id="10" name="">
-            <a:extLst xmlns:a="http://schemas.openxmlformats.org/drawingml/2006/main">
-              <a:ext uri="{FF2B5EF4-FFF2-40B4-BE49-F238E27FC236}">
-                <a16:creationId xmlns:a16="http://schemas.microsoft.com/office/drawing/2014/main" id="{40210927-43AC-46C6-9F57-13474123E259}"/>
-              </a:ext>
-            </a:extLst>
-          </p:cNvPr>
-          <p:cNvSpPr>
-            <a:spLocks xmlns:a="http://schemas.openxmlformats.org/drawingml/2006/main" noGrp="1"/>
-          </p:cNvSpPr>
-          <p:nvPr/>
-        </p:nvSpPr>
-        <p:spPr>
-          <a:xfrm xmlns:a="http://schemas.openxmlformats.org/drawingml/2006/main">
-            <a:off x="685800" y="5372100"/>
-            <a:ext cx="6858000" cy="476250"/>
-          </a:xfrm>
-          <a:prstGeom xmlns:a="http://schemas.openxmlformats.org/drawingml/2006/main" prst="rect">
-            <a:avLst/>
-          </a:prstGeom>
-          <a:noFill xmlns:a="http://schemas.openxmlformats.org/drawingml/2006/main"/>
-          <a:ln xmlns:a="http://schemas.openxmlformats.org/drawingml/2006/main" w="0">
-            <a:noFill/>
-            <a:prstDash val="solid"/>
-          </a:ln>
-        </p:spPr>
-        <p:txBody>
-          <a:bodyPr xmlns:a="http://schemas.openxmlformats.org/drawingml/2006/main"/>
-          <a:lstStyle xmlns:a="http://schemas.openxmlformats.org/drawingml/2006/main"/>
-          <a:p xmlns:a="http://schemas.openxmlformats.org/drawingml/2006/main">
-            <a:pPr>
-              <a:defRPr sz="2550" b="1">
+              <a:t>validation</a:t>
+            </a:r>
+          </a:p>
+        </p:txBody>
+      </p:sp>
+      <p:sp>
+        <p:nvSpPr>
+          <p:cNvPr id="17" name="">
+            <a:extLst xmlns:a="http://schemas.openxmlformats.org/drawingml/2006/main">
+              <a:ext uri="{FF2B5EF4-FFF2-40B4-BE49-F238E27FC236}">
+                <a16:creationId xmlns:a16="http://schemas.microsoft.com/office/drawing/2014/main" id="{1A45F0AD-7A2B-49E2-9725-1177B37917B4}"/>
+              </a:ext>
+            </a:extLst>
+          </p:cNvPr>
+          <p:cNvSpPr>
+            <a:spLocks xmlns:a="http://schemas.openxmlformats.org/drawingml/2006/main" noGrp="1"/>
+          </p:cNvSpPr>
+          <p:nvPr/>
+        </p:nvSpPr>
+        <p:spPr>
+          <a:xfrm xmlns:a="http://schemas.openxmlformats.org/drawingml/2006/main">
+            <a:off x="6877050" y="3295650"/>
+            <a:ext cx="323850" cy="457200"/>
+          </a:xfrm>
+          <a:prstGeom xmlns:a="http://schemas.openxmlformats.org/drawingml/2006/main" prst="rect">
+            <a:avLst/>
+          </a:prstGeom>
+          <a:noFill xmlns:a="http://schemas.openxmlformats.org/drawingml/2006/main"/>
+          <a:ln xmlns:a="http://schemas.openxmlformats.org/drawingml/2006/main" w="0">
+            <a:noFill/>
+            <a:prstDash val="solid"/>
+          </a:ln>
+        </p:spPr>
+        <p:txBody>
+          <a:bodyPr xmlns:a="http://schemas.openxmlformats.org/drawingml/2006/main"/>
+          <a:lstStyle xmlns:a="http://schemas.openxmlformats.org/drawingml/2006/main"/>
+          <a:p xmlns:a="http://schemas.openxmlformats.org/drawingml/2006/main">
+            <a:pPr algn="ctr">
+              <a:defRPr sz="2700" b="1">
+                <a:solidFill>
+                  <a:srgbClr val="E4144F"/>
+                </a:solidFill>
+              </a:defRPr>
+            </a:pPr>
+            <a:r>
+              <a:rPr sz="2700" b="1">
+                <a:solidFill>
+                  <a:srgbClr val="E4144F"/>
+                </a:solidFill>
+              </a:rPr>
+              <a:t>&gt;</a:t>
+            </a:r>
+          </a:p>
+        </p:txBody>
+      </p:sp>
+      <p:sp>
+        <p:nvSpPr>
+          <p:cNvPr id="18" name="">
+            <a:extLst xmlns:a="http://schemas.openxmlformats.org/drawingml/2006/main">
+              <a:ext uri="{FF2B5EF4-FFF2-40B4-BE49-F238E27FC236}">
+                <a16:creationId xmlns:a16="http://schemas.microsoft.com/office/drawing/2014/main" id="{FA153A35-EE93-4F4B-9E12-91319C08D56B}"/>
+              </a:ext>
+            </a:extLst>
+          </p:cNvPr>
+          <p:cNvSpPr>
+            <a:spLocks xmlns:a="http://schemas.openxmlformats.org/drawingml/2006/main" noGrp="1"/>
+          </p:cNvSpPr>
+          <p:nvPr/>
+        </p:nvSpPr>
+        <p:spPr>
+          <a:xfrm xmlns:a="http://schemas.openxmlformats.org/drawingml/2006/main">
+            <a:off x="7258050" y="2724150"/>
+            <a:ext cx="1676400" cy="1485900"/>
+          </a:xfrm>
+          <a:prstGeom xmlns:a="http://schemas.openxmlformats.org/drawingml/2006/main" prst="rect">
+            <a:avLst/>
+          </a:prstGeom>
+          <a:solidFill xmlns:a="http://schemas.openxmlformats.org/drawingml/2006/main">
+            <a:srgbClr val="F4F7F6"/>
+          </a:solidFill>
+          <a:ln xmlns:a="http://schemas.openxmlformats.org/drawingml/2006/main" w="9525">
+            <a:solidFill>
+              <a:srgbClr val="D8DEDF"/>
+            </a:solidFill>
+            <a:prstDash val="solid"/>
+          </a:ln>
+        </p:spPr>
+      </p:sp>
+      <p:sp>
+        <p:nvSpPr>
+          <p:cNvPr id="19" name="">
+            <a:extLst xmlns:a="http://schemas.openxmlformats.org/drawingml/2006/main">
+              <a:ext uri="{FF2B5EF4-FFF2-40B4-BE49-F238E27FC236}">
+                <a16:creationId xmlns:a16="http://schemas.microsoft.com/office/drawing/2014/main" id="{70B5AF46-2D96-438C-B2BA-2A6B2C8BBA94}"/>
+              </a:ext>
+            </a:extLst>
+          </p:cNvPr>
+          <p:cNvSpPr>
+            <a:spLocks xmlns:a="http://schemas.openxmlformats.org/drawingml/2006/main" noGrp="1"/>
+          </p:cNvSpPr>
+          <p:nvPr/>
+        </p:nvSpPr>
+        <p:spPr>
+          <a:xfrm xmlns:a="http://schemas.openxmlformats.org/drawingml/2006/main">
+            <a:off x="7429500" y="3009900"/>
+            <a:ext cx="1314450" cy="304800"/>
+          </a:xfrm>
+          <a:prstGeom xmlns:a="http://schemas.openxmlformats.org/drawingml/2006/main" prst="rect">
+            <a:avLst/>
+          </a:prstGeom>
+          <a:noFill xmlns:a="http://schemas.openxmlformats.org/drawingml/2006/main"/>
+          <a:ln xmlns:a="http://schemas.openxmlformats.org/drawingml/2006/main" w="0">
+            <a:noFill/>
+            <a:prstDash val="solid"/>
+          </a:ln>
+        </p:spPr>
+        <p:txBody>
+          <a:bodyPr xmlns:a="http://schemas.openxmlformats.org/drawingml/2006/main"/>
+          <a:lstStyle xmlns:a="http://schemas.openxmlformats.org/drawingml/2006/main"/>
+          <a:p xmlns:a="http://schemas.openxmlformats.org/drawingml/2006/main">
+            <a:pPr algn="ctr">
+              <a:defRPr sz="1800" b="1">
                 <a:solidFill>
                   <a:srgbClr val="003D48"/>
                 </a:solidFill>
               </a:defRPr>
             </a:pPr>
             <a:r>
-              <a:rPr sz="2550" b="1">
+              <a:rPr sz="1800" b="1">
                 <a:solidFill>
                   <a:srgbClr val="003D48"/>
                 </a:solidFill>
               </a:rPr>
-              <a:t>Scope discipline is the hack.</a:t>
-            </a:r>
-          </a:p>
-        </p:txBody>
-      </p:sp>
-      <p:sp>
-        <p:nvSpPr>
-          <p:cNvPr id="11" name="">
-            <a:extLst xmlns:a="http://schemas.openxmlformats.org/drawingml/2006/main">
-              <a:ext uri="{FF2B5EF4-FFF2-40B4-BE49-F238E27FC236}">
-                <a16:creationId xmlns:a16="http://schemas.microsoft.com/office/drawing/2014/main" id="{90536D1B-C0D1-42B3-8112-97C886EE64CA}"/>
-              </a:ext>
-            </a:extLst>
-          </p:cNvPr>
-          <p:cNvSpPr>
-            <a:spLocks xmlns:a="http://schemas.openxmlformats.org/drawingml/2006/main" noGrp="1"/>
-          </p:cNvSpPr>
-          <p:nvPr/>
-        </p:nvSpPr>
-        <p:spPr>
-          <a:xfrm xmlns:a="http://schemas.openxmlformats.org/drawingml/2006/main">
-            <a:off x="400050" y="6362700"/>
-            <a:ext cx="5905500" cy="228600"/>
-          </a:xfrm>
-          <a:prstGeom xmlns:a="http://schemas.openxmlformats.org/drawingml/2006/main" prst="rect">
-            <a:avLst/>
-          </a:prstGeom>
-          <a:noFill xmlns:a="http://schemas.openxmlformats.org/drawingml/2006/main"/>
-          <a:ln xmlns:a="http://schemas.openxmlformats.org/drawingml/2006/main" w="0">
-            <a:noFill/>
-            <a:prstDash val="solid"/>
-          </a:ln>
-        </p:spPr>
-        <p:txBody>
-          <a:bodyPr xmlns:a="http://schemas.openxmlformats.org/drawingml/2006/main"/>
-          <a:lstStyle xmlns:a="http://schemas.openxmlformats.org/drawingml/2006/main"/>
-          <a:p xmlns:a="http://schemas.openxmlformats.org/drawingml/2006/main">
-            <a:pPr>
-              <a:defRPr sz="1050" b="1">
-                <a:solidFill>
-                  <a:srgbClr val="59666A"/>
-                </a:solidFill>
-              </a:defRPr>
-            </a:pPr>
-            <a:r>
-              <a:rPr sz="1050" b="1">
-                <a:solidFill>
-                  <a:srgbClr val="59666A"/>
-                </a:solidFill>
-              </a:rPr>
-              <a:t>TrustTill | Hackaholics 7.0 | Financial Inclusion</a:t>
-            </a:r>
-          </a:p>
-        </p:txBody>
-      </p:sp>
-      <p:sp>
-        <p:nvSpPr>
-          <p:cNvPr id="12" name="">
-            <a:extLst xmlns:a="http://schemas.openxmlformats.org/drawingml/2006/main">
-              <a:ext uri="{FF2B5EF4-FFF2-40B4-BE49-F238E27FC236}">
-                <a16:creationId xmlns:a16="http://schemas.microsoft.com/office/drawing/2014/main" id="{FAFA7099-7E11-4421-9841-57431BAF62A7}"/>
-              </a:ext>
-            </a:extLst>
-          </p:cNvPr>
-          <p:cNvSpPr>
-            <a:spLocks xmlns:a="http://schemas.openxmlformats.org/drawingml/2006/main" noGrp="1"/>
-          </p:cNvSpPr>
-          <p:nvPr/>
-        </p:nvSpPr>
-        <p:spPr>
-          <a:xfrm xmlns:a="http://schemas.openxmlformats.org/drawingml/2006/main">
-            <a:off x="11468100" y="6362700"/>
-            <a:ext cx="323850" cy="228600"/>
-          </a:xfrm>
-          <a:prstGeom xmlns:a="http://schemas.openxmlformats.org/drawingml/2006/main" prst="rect">
-            <a:avLst/>
-          </a:prstGeom>
-          <a:noFill xmlns:a="http://schemas.openxmlformats.org/drawingml/2006/main"/>
-          <a:ln xmlns:a="http://schemas.openxmlformats.org/drawingml/2006/main" w="0">
-            <a:noFill/>
-            <a:prstDash val="solid"/>
-          </a:ln>
-        </p:spPr>
-        <p:txBody>
-          <a:bodyPr xmlns:a="http://schemas.openxmlformats.org/drawingml/2006/main"/>
-          <a:lstStyle xmlns:a="http://schemas.openxmlformats.org/drawingml/2006/main"/>
-          <a:p xmlns:a="http://schemas.openxmlformats.org/drawingml/2006/main">
-            <a:pPr algn="r">
-              <a:defRPr sz="1050" b="1">
-                <a:solidFill>
-                  <a:srgbClr val="59666A"/>
-                </a:solidFill>
-              </a:defRPr>
-            </a:pPr>
-            <a:r>
-              <a:rPr sz="1050" b="1">
-                <a:solidFill>
-                  <a:srgbClr val="59666A"/>
-                </a:solidFill>
-              </a:rPr>
-              <a:t>6</a:t>
+              <a:t>Matching</a:t>
+            </a:r>
+          </a:p>
+        </p:txBody>
+      </p:sp>
+      <p:sp>
+        <p:nvSpPr>
+          <p:cNvPr id="20" name="">
+            <a:extLst xmlns:a="http://schemas.openxmlformats.org/drawingml/2006/main">
+              <a:ext uri="{FF2B5EF4-FFF2-40B4-BE49-F238E27FC236}">
+                <a16:creationId xmlns:a16="http://schemas.microsoft.com/office/drawing/2014/main" id="{FA8E9B63-A065-4814-86F0-E15C7B0C97CB}"/>
+              </a:ext>
+            </a:extLst>
+          </p:cNvPr>
+          <p:cNvSpPr>
+            <a:spLocks xmlns:a="http://schemas.openxmlformats.org/drawingml/2006/main" noGrp="1"/>
+          </p:cNvSpPr>
+          <p:nvPr/>
+        </p:nvSpPr>
+        <p:spPr>
+          <a:xfrm xmlns:a="http://schemas.openxmlformats.org/drawingml/2006/main">
+            <a:off x="7429500" y="3505200"/>
+            <a:ext cx="1314450" cy="514350"/>
+          </a:xfrm>
+          <a:prstGeom xmlns:a="http://schemas.openxmlformats.org/drawingml/2006/main" prst="rect">
+            <a:avLst/>
+          </a:prstGeom>
+          <a:noFill xmlns:a="http://schemas.openxmlformats.org/drawingml/2006/main"/>
+          <a:ln xmlns:a="http://schemas.openxmlformats.org/drawingml/2006/main" w="0">
+            <a:noFill/>
+            <a:prstDash val="solid"/>
+          </a:ln>
+        </p:spPr>
+        <p:txBody>
+          <a:bodyPr xmlns:a="http://schemas.openxmlformats.org/drawingml/2006/main"/>
+          <a:lstStyle xmlns:a="http://schemas.openxmlformats.org/drawingml/2006/main"/>
+          <a:p xmlns:a="http://schemas.openxmlformats.org/drawingml/2006/main">
+            <a:pPr algn="ctr">
+              <a:defRPr sz="1350" b="0">
+                <a:solidFill>
+                  <a:srgbClr val="101820"/>
+                </a:solidFill>
+              </a:defRPr>
+            </a:pPr>
+            <a:r>
+              <a:rPr sz="1350" b="0">
+                <a:solidFill>
+                  <a:srgbClr val="101820"/>
+                </a:solidFill>
+              </a:rPr>
+              <a:t>SaleEvent</a:t>
+            </a:r>
+          </a:p>
+          <a:p xmlns:a="http://schemas.openxmlformats.org/drawingml/2006/main">
+            <a:pPr algn="ctr">
+              <a:defRPr sz="1350" b="0">
+                <a:solidFill>
+                  <a:srgbClr val="101820"/>
+                </a:solidFill>
+              </a:defRPr>
+            </a:pPr>
+            <a:r>
+              <a:rPr sz="1350" b="0">
+                <a:solidFill>
+                  <a:srgbClr val="101820"/>
+                </a:solidFill>
+              </a:rPr>
+              <a:t>ledger</a:t>
+            </a:r>
+          </a:p>
+        </p:txBody>
+      </p:sp>
+      <p:sp>
+        <p:nvSpPr>
+          <p:cNvPr id="21" name="">
+            <a:extLst xmlns:a="http://schemas.openxmlformats.org/drawingml/2006/main">
+              <a:ext uri="{FF2B5EF4-FFF2-40B4-BE49-F238E27FC236}">
+                <a16:creationId xmlns:a16="http://schemas.microsoft.com/office/drawing/2014/main" id="{52E44A22-C0A9-416E-8494-694AFADECEF5}"/>
+              </a:ext>
+            </a:extLst>
+          </p:cNvPr>
+          <p:cNvSpPr>
+            <a:spLocks xmlns:a="http://schemas.openxmlformats.org/drawingml/2006/main" noGrp="1"/>
+          </p:cNvSpPr>
+          <p:nvPr/>
+        </p:nvSpPr>
+        <p:spPr>
+          <a:xfrm xmlns:a="http://schemas.openxmlformats.org/drawingml/2006/main">
+            <a:off x="9067800" y="3295650"/>
+            <a:ext cx="323850" cy="457200"/>
+          </a:xfrm>
+          <a:prstGeom xmlns:a="http://schemas.openxmlformats.org/drawingml/2006/main" prst="rect">
+            <a:avLst/>
+          </a:prstGeom>
+          <a:noFill xmlns:a="http://schemas.openxmlformats.org/drawingml/2006/main"/>
+          <a:ln xmlns:a="http://schemas.openxmlformats.org/drawingml/2006/main" w="0">
+            <a:noFill/>
+            <a:prstDash val="solid"/>
+          </a:ln>
+        </p:spPr>
+        <p:txBody>
+          <a:bodyPr xmlns:a="http://schemas.openxmlformats.org/drawingml/2006/main"/>
+          <a:lstStyle xmlns:a="http://schemas.openxmlformats.org/drawingml/2006/main"/>
+          <a:p xmlns:a="http://schemas.openxmlformats.org/drawingml/2006/main">
+            <a:pPr algn="ctr">
+              <a:defRPr sz="2700" b="1">
+                <a:solidFill>
+                  <a:srgbClr val="E4144F"/>
+                </a:solidFill>
+              </a:defRPr>
+            </a:pPr>
+            <a:r>
+              <a:rPr sz="2700" b="1">
+                <a:solidFill>
+                  <a:srgbClr val="E4144F"/>
+                </a:solidFill>
+              </a:rPr>
+              <a:t>&gt;</a:t>
+            </a:r>
+          </a:p>
+        </p:txBody>
+      </p:sp>
+      <p:sp>
+        <p:nvSpPr>
+          <p:cNvPr id="22" name="">
+            <a:extLst xmlns:a="http://schemas.openxmlformats.org/drawingml/2006/main">
+              <a:ext uri="{FF2B5EF4-FFF2-40B4-BE49-F238E27FC236}">
+                <a16:creationId xmlns:a16="http://schemas.microsoft.com/office/drawing/2014/main" id="{093E99AC-39B3-4E14-94E3-9D0E0328BE52}"/>
+              </a:ext>
+            </a:extLst>
+          </p:cNvPr>
+          <p:cNvSpPr>
+            <a:spLocks xmlns:a="http://schemas.openxmlformats.org/drawingml/2006/main" noGrp="1"/>
+          </p:cNvSpPr>
+          <p:nvPr/>
+        </p:nvSpPr>
+        <p:spPr>
+          <a:xfrm xmlns:a="http://schemas.openxmlformats.org/drawingml/2006/main">
+            <a:off x="9448800" y="2724150"/>
+            <a:ext cx="1676400" cy="1485900"/>
+          </a:xfrm>
+          <a:prstGeom xmlns:a="http://schemas.openxmlformats.org/drawingml/2006/main" prst="rect">
+            <a:avLst/>
+          </a:prstGeom>
+          <a:solidFill xmlns:a="http://schemas.openxmlformats.org/drawingml/2006/main">
+            <a:srgbClr val="F4F7F6"/>
+          </a:solidFill>
+          <a:ln xmlns:a="http://schemas.openxmlformats.org/drawingml/2006/main" w="9525">
+            <a:solidFill>
+              <a:srgbClr val="D8DEDF"/>
+            </a:solidFill>
+            <a:prstDash val="solid"/>
+          </a:ln>
+        </p:spPr>
+      </p:sp>
+      <p:sp>
+        <p:nvSpPr>
+          <p:cNvPr id="23" name="">
+            <a:extLst xmlns:a="http://schemas.openxmlformats.org/drawingml/2006/main">
+              <a:ext uri="{FF2B5EF4-FFF2-40B4-BE49-F238E27FC236}">
+                <a16:creationId xmlns:a16="http://schemas.microsoft.com/office/drawing/2014/main" id="{A48A5776-C5AD-4239-B4F9-AA679F2F9902}"/>
+              </a:ext>
+            </a:extLst>
+          </p:cNvPr>
+          <p:cNvSpPr>
+            <a:spLocks xmlns:a="http://schemas.openxmlformats.org/drawingml/2006/main" noGrp="1"/>
+          </p:cNvSpPr>
+          <p:nvPr/>
+        </p:nvSpPr>
+        <p:spPr>
+          <a:xfrm xmlns:a="http://schemas.openxmlformats.org/drawingml/2006/main">
+            <a:off x="9620250" y="3009900"/>
+            <a:ext cx="1314450" cy="304800"/>
+          </a:xfrm>
+          <a:prstGeom xmlns:a="http://schemas.openxmlformats.org/drawingml/2006/main" prst="rect">
+            <a:avLst/>
+          </a:prstGeom>
+          <a:noFill xmlns:a="http://schemas.openxmlformats.org/drawingml/2006/main"/>
+          <a:ln xmlns:a="http://schemas.openxmlformats.org/drawingml/2006/main" w="0">
+            <a:noFill/>
+            <a:prstDash val="solid"/>
+          </a:ln>
+        </p:spPr>
+        <p:txBody>
+          <a:bodyPr xmlns:a="http://schemas.openxmlformats.org/drawingml/2006/main"/>
+          <a:lstStyle xmlns:a="http://schemas.openxmlformats.org/drawingml/2006/main"/>
+          <a:p xmlns:a="http://schemas.openxmlformats.org/drawingml/2006/main">
+            <a:pPr algn="ctr">
+              <a:defRPr sz="1800" b="1">
+                <a:solidFill>
+                  <a:srgbClr val="003D48"/>
+                </a:solidFill>
+              </a:defRPr>
+            </a:pPr>
+            <a:r>
+              <a:rPr sz="1800" b="1">
+                <a:solidFill>
+                  <a:srgbClr val="003D48"/>
+                </a:solidFill>
+              </a:rPr>
+              <a:t>Profile</a:t>
+            </a:r>
+          </a:p>
+        </p:txBody>
+      </p:sp>
+      <p:sp>
+        <p:nvSpPr>
+          <p:cNvPr id="24" name="">
+            <a:extLst xmlns:a="http://schemas.openxmlformats.org/drawingml/2006/main">
+              <a:ext uri="{FF2B5EF4-FFF2-40B4-BE49-F238E27FC236}">
+                <a16:creationId xmlns:a16="http://schemas.microsoft.com/office/drawing/2014/main" id="{13DB05C6-A857-4C94-88CB-145C8FC446D8}"/>
+              </a:ext>
+            </a:extLst>
+          </p:cNvPr>
+          <p:cNvSpPr>
+            <a:spLocks xmlns:a="http://schemas.openxmlformats.org/drawingml/2006/main" noGrp="1"/>
+          </p:cNvSpPr>
+          <p:nvPr/>
+        </p:nvSpPr>
+        <p:spPr>
+          <a:xfrm xmlns:a="http://schemas.openxmlformats.org/drawingml/2006/main">
+            <a:off x="9620250" y="3505200"/>
+            <a:ext cx="1314450" cy="514350"/>
+          </a:xfrm>
+          <a:prstGeom xmlns:a="http://schemas.openxmlformats.org/drawingml/2006/main" prst="rect">
+            <a:avLst/>
+          </a:prstGeom>
+          <a:noFill xmlns:a="http://schemas.openxmlformats.org/drawingml/2006/main"/>
+          <a:ln xmlns:a="http://schemas.openxmlformats.org/drawingml/2006/main" w="0">
+            <a:noFill/>
+            <a:prstDash val="solid"/>
+          </a:ln>
+        </p:spPr>
+        <p:txBody>
+          <a:bodyPr xmlns:a="http://schemas.openxmlformats.org/drawingml/2006/main"/>
+          <a:lstStyle xmlns:a="http://schemas.openxmlformats.org/drawingml/2006/main"/>
+          <a:p xmlns:a="http://schemas.openxmlformats.org/drawingml/2006/main">
+            <a:pPr algn="ctr">
+              <a:defRPr sz="1350" b="0">
+                <a:solidFill>
+                  <a:srgbClr val="101820"/>
+                </a:solidFill>
+              </a:defRPr>
+            </a:pPr>
+            <a:r>
+              <a:rPr sz="1350" b="0">
+                <a:solidFill>
+                  <a:srgbClr val="101820"/>
+                </a:solidFill>
+              </a:rPr>
+              <a:t>Wema-ready</a:t>
+            </a:r>
+          </a:p>
+          <a:p xmlns:a="http://schemas.openxmlformats.org/drawingml/2006/main">
+            <a:pPr algn="ctr">
+              <a:defRPr sz="1350" b="0">
+                <a:solidFill>
+                  <a:srgbClr val="101820"/>
+                </a:solidFill>
+              </a:defRPr>
+            </a:pPr>
+            <a:r>
+              <a:rPr sz="1350" b="0">
+                <a:solidFill>
+                  <a:srgbClr val="101820"/>
+                </a:solidFill>
+              </a:rPr>
+              <a:t>review API</a:t>
+            </a:r>
+          </a:p>
+        </p:txBody>
+      </p:sp>
+      <p:sp>
+        <p:nvSpPr>
+          <p:cNvPr id="25" name="">
+            <a:extLst xmlns:a="http://schemas.openxmlformats.org/drawingml/2006/main">
+              <a:ext uri="{FF2B5EF4-FFF2-40B4-BE49-F238E27FC236}">
+                <a16:creationId xmlns:a16="http://schemas.microsoft.com/office/drawing/2014/main" id="{1691E01C-F66C-49FB-B2CF-EDEF8B6624F4}"/>
+              </a:ext>
+            </a:extLst>
+          </p:cNvPr>
+          <p:cNvSpPr>
+            <a:spLocks xmlns:a="http://schemas.openxmlformats.org/drawingml/2006/main" noGrp="1"/>
+          </p:cNvSpPr>
+          <p:nvPr/>
+        </p:nvSpPr>
+        <p:spPr>
+          <a:xfrm xmlns:a="http://schemas.openxmlformats.org/drawingml/2006/main">
+            <a:off x="1371600" y="5010150"/>
+            <a:ext cx="9048750" cy="609600"/>
+          </a:xfrm>
+          <a:prstGeom xmlns:a="http://schemas.openxmlformats.org/drawingml/2006/main" prst="rect">
+            <a:avLst/>
+          </a:prstGeom>
+          <a:solidFill xmlns:a="http://schemas.openxmlformats.org/drawingml/2006/main">
+            <a:srgbClr val="FFFFFF"/>
+          </a:solidFill>
+          <a:ln xmlns:a="http://schemas.openxmlformats.org/drawingml/2006/main" w="9525">
+            <a:solidFill>
+              <a:srgbClr val="D8DEDF"/>
+            </a:solidFill>
+            <a:prstDash val="solid"/>
+          </a:ln>
+        </p:spPr>
+      </p:sp>
+      <p:sp>
+        <p:nvSpPr>
+          <p:cNvPr id="26" name="">
+            <a:extLst xmlns:a="http://schemas.openxmlformats.org/drawingml/2006/main">
+              <a:ext uri="{FF2B5EF4-FFF2-40B4-BE49-F238E27FC236}">
+                <a16:creationId xmlns:a16="http://schemas.microsoft.com/office/drawing/2014/main" id="{FDB107B6-A43B-456C-A5C3-F229D2B43B78}"/>
+              </a:ext>
+            </a:extLst>
+          </p:cNvPr>
+          <p:cNvSpPr>
+            <a:spLocks xmlns:a="http://schemas.openxmlformats.org/drawingml/2006/main" noGrp="1"/>
+          </p:cNvSpPr>
+          <p:nvPr/>
+        </p:nvSpPr>
+        <p:spPr>
+          <a:xfrm xmlns:a="http://schemas.openxmlformats.org/drawingml/2006/main">
+            <a:off x="1676400" y="5200650"/>
+            <a:ext cx="8382000" cy="266700"/>
+          </a:xfrm>
+          <a:prstGeom xmlns:a="http://schemas.openxmlformats.org/drawingml/2006/main" prst="rect">
+            <a:avLst/>
+          </a:prstGeom>
+          <a:noFill xmlns:a="http://schemas.openxmlformats.org/drawingml/2006/main"/>
+          <a:ln xmlns:a="http://schemas.openxmlformats.org/drawingml/2006/main" w="0">
+            <a:noFill/>
+            <a:prstDash val="solid"/>
+          </a:ln>
+        </p:spPr>
+        <p:txBody>
+          <a:bodyPr xmlns:a="http://schemas.openxmlformats.org/drawingml/2006/main"/>
+          <a:lstStyle xmlns:a="http://schemas.openxmlformats.org/drawingml/2006/main"/>
+          <a:p xmlns:a="http://schemas.openxmlformats.org/drawingml/2006/main">
+            <a:pPr algn="ctr">
+              <a:defRPr sz="1650" b="1">
+                <a:solidFill>
+                  <a:srgbClr val="101820"/>
+                </a:solidFill>
+              </a:defRPr>
+            </a:pPr>
+            <a:r>
+              <a:rPr sz="1650" b="1">
+                <a:solidFill>
+                  <a:srgbClr val="101820"/>
+                </a:solidFill>
+              </a:rPr>
+              <a:t>This is why backend experience matters: the hard part is reliable data flow, not a flashy chatbot.</a:t>
             </a:r>
           </a:p>
         </p:txBody>
@@ -6148,7 +6484,7 @@
     </p:spTree>
     <p:extLst>
       <p:ext uri="{BB962C8B-B14F-4D97-AF65-F5344CB8AC3E}">
-        <p14:creationId xmlns:p14="http://schemas.microsoft.com/office/powerpoint/2010/main" val="1663901943"/>
+        <p14:creationId xmlns:p14="http://schemas.microsoft.com/office/powerpoint/2010/main" val="1959737550"/>
       </p:ext>
     </p:extLst>
   </p:cSld>
@@ -6179,19 +6515,19 @@
           <p:cNvPr id="1" name="">
             <a:extLst xmlns:a="http://schemas.openxmlformats.org/drawingml/2006/main">
               <a:ext uri="{FF2B5EF4-FFF2-40B4-BE49-F238E27FC236}">
-                <a16:creationId xmlns:a16="http://schemas.microsoft.com/office/drawing/2014/main" id="{C3AA49E8-9D02-45AA-B371-ABFFA7C16EA7}"/>
-              </a:ext>
-            </a:extLst>
-          </p:cNvPr>
-          <p:cNvSpPr>
-            <a:spLocks xmlns:a="http://schemas.openxmlformats.org/drawingml/2006/main" noGrp="1"/>
-          </p:cNvSpPr>
-          <p:nvPr/>
-        </p:nvSpPr>
-        <p:spPr>
-          <a:xfrm xmlns:a="http://schemas.openxmlformats.org/drawingml/2006/main">
-            <a:off x="533400" y="590550"/>
-            <a:ext cx="8572500" cy="666750"/>
+                <a16:creationId xmlns:a16="http://schemas.microsoft.com/office/drawing/2014/main" id="{2DDD863E-34AE-4A20-9B26-56D3AD0543EE}"/>
+              </a:ext>
+            </a:extLst>
+          </p:cNvPr>
+          <p:cNvSpPr>
+            <a:spLocks xmlns:a="http://schemas.openxmlformats.org/drawingml/2006/main" noGrp="1"/>
+          </p:cNvSpPr>
+          <p:nvPr/>
+        </p:nvSpPr>
+        <p:spPr>
+          <a:xfrm xmlns:a="http://schemas.openxmlformats.org/drawingml/2006/main">
+            <a:off x="609600" y="571500"/>
+            <a:ext cx="8572500" cy="723900"/>
           </a:xfrm>
           <a:prstGeom xmlns:a="http://schemas.openxmlformats.org/drawingml/2006/main" prst="rect">
             <a:avLst/>
@@ -6207,19 +6543,19 @@
           <a:lstStyle xmlns:a="http://schemas.openxmlformats.org/drawingml/2006/main"/>
           <a:p xmlns:a="http://schemas.openxmlformats.org/drawingml/2006/main">
             <a:pPr>
-              <a:defRPr sz="3750" b="1">
+              <a:defRPr sz="4200" b="1">
                 <a:solidFill>
                   <a:srgbClr val="101820"/>
                 </a:solidFill>
               </a:defRPr>
             </a:pPr>
             <a:r>
-              <a:rPr sz="3750" b="1">
+              <a:rPr sz="4200" b="1">
                 <a:solidFill>
                   <a:srgbClr val="101820"/>
                 </a:solidFill>
               </a:rPr>
-              <a:t>The ask is a small, credible pilot</a:t>
+              <a:t>The ask is a 30-day pilot</a:t>
             </a:r>
           </a:p>
         </p:txBody>
@@ -6229,19 +6565,19 @@
           <p:cNvPr id="2" name="">
             <a:extLst xmlns:a="http://schemas.openxmlformats.org/drawingml/2006/main">
               <a:ext uri="{FF2B5EF4-FFF2-40B4-BE49-F238E27FC236}">
-                <a16:creationId xmlns:a16="http://schemas.microsoft.com/office/drawing/2014/main" id="{38C0FE52-AA28-48A4-BC37-9E2906AC38F6}"/>
-              </a:ext>
-            </a:extLst>
-          </p:cNvPr>
-          <p:cNvSpPr>
-            <a:spLocks xmlns:a="http://schemas.openxmlformats.org/drawingml/2006/main" noGrp="1"/>
-          </p:cNvSpPr>
-          <p:nvPr/>
-        </p:nvSpPr>
-        <p:spPr>
-          <a:xfrm xmlns:a="http://schemas.openxmlformats.org/drawingml/2006/main">
-            <a:off x="552450" y="1466850"/>
-            <a:ext cx="7810500" cy="666750"/>
+                <a16:creationId xmlns:a16="http://schemas.microsoft.com/office/drawing/2014/main" id="{E587532C-288D-44F1-964D-2F50FBB30BF9}"/>
+              </a:ext>
+            </a:extLst>
+          </p:cNvPr>
+          <p:cNvSpPr>
+            <a:spLocks xmlns:a="http://schemas.openxmlformats.org/drawingml/2006/main" noGrp="1"/>
+          </p:cNvSpPr>
+          <p:nvPr/>
+        </p:nvSpPr>
+        <p:spPr>
+          <a:xfrm xmlns:a="http://schemas.openxmlformats.org/drawingml/2006/main">
+            <a:off x="647700" y="1466850"/>
+            <a:ext cx="8096250" cy="419100"/>
           </a:xfrm>
           <a:prstGeom xmlns:a="http://schemas.openxmlformats.org/drawingml/2006/main" prst="rect">
             <a:avLst/>
@@ -6257,19 +6593,19 @@
           <a:lstStyle xmlns:a="http://schemas.openxmlformats.org/drawingml/2006/main"/>
           <a:p xmlns:a="http://schemas.openxmlformats.org/drawingml/2006/main">
             <a:pPr>
-              <a:defRPr sz="2100" b="0">
-                <a:solidFill>
-                  <a:srgbClr val="59666A"/>
-                </a:solidFill>
-              </a:defRPr>
-            </a:pPr>
-            <a:r>
-              <a:rPr sz="2100" b="0">
-                <a:solidFill>
-                  <a:srgbClr val="59666A"/>
-                </a:solidFill>
-              </a:rPr>
-              <a:t>TrustTill needs mentorship, API guidance, and access to a small group of campus or market merchants.</a:t>
+              <a:defRPr sz="2025" b="0">
+                <a:solidFill>
+                  <a:srgbClr val="536267"/>
+                </a:solidFill>
+              </a:defRPr>
+            </a:pPr>
+            <a:r>
+              <a:rPr sz="2025" b="0">
+                <a:solidFill>
+                  <a:srgbClr val="536267"/>
+                </a:solidFill>
+              </a:rPr>
+              <a:t>Start small, learn fast, and prove whether merchant evidence quality improves.</a:t>
             </a:r>
           </a:p>
         </p:txBody>
@@ -6279,29 +6615,60 @@
           <p:cNvPr id="3" name="">
             <a:extLst xmlns:a="http://schemas.openxmlformats.org/drawingml/2006/main">
               <a:ext uri="{FF2B5EF4-FFF2-40B4-BE49-F238E27FC236}">
-                <a16:creationId xmlns:a16="http://schemas.microsoft.com/office/drawing/2014/main" id="{0102BD86-EBE3-49F7-A942-D23B6826A118}"/>
-              </a:ext>
-            </a:extLst>
-          </p:cNvPr>
-          <p:cNvSpPr>
-            <a:spLocks xmlns:a="http://schemas.openxmlformats.org/drawingml/2006/main" noGrp="1"/>
-          </p:cNvSpPr>
-          <p:nvPr/>
-        </p:nvSpPr>
-        <p:spPr>
-          <a:xfrm xmlns:a="http://schemas.openxmlformats.org/drawingml/2006/main">
-            <a:off x="685800" y="2781300"/>
-            <a:ext cx="3105150" cy="1619250"/>
+                <a16:creationId xmlns:a16="http://schemas.microsoft.com/office/drawing/2014/main" id="{83F18F04-4959-45A7-AB6C-E084A0BEB767}"/>
+              </a:ext>
+            </a:extLst>
+          </p:cNvPr>
+          <p:cNvSpPr>
+            <a:spLocks xmlns:a="http://schemas.openxmlformats.org/drawingml/2006/main" noGrp="1"/>
+          </p:cNvSpPr>
+          <p:nvPr/>
+        </p:nvSpPr>
+        <p:spPr>
+          <a:xfrm xmlns:a="http://schemas.openxmlformats.org/drawingml/2006/main">
+            <a:off x="609600" y="2076450"/>
+            <a:ext cx="10477500" cy="0"/>
+          </a:xfrm>
+          <a:prstGeom xmlns:a="http://schemas.openxmlformats.org/drawingml/2006/main" prst="line">
+            <a:avLst/>
+          </a:prstGeom>
+          <a:noFill xmlns:a="http://schemas.openxmlformats.org/drawingml/2006/main"/>
+          <a:ln xmlns:a="http://schemas.openxmlformats.org/drawingml/2006/main" w="13335">
+            <a:solidFill>
+              <a:srgbClr val="D8DEDF"/>
+            </a:solidFill>
+            <a:prstDash val="solid"/>
+          </a:ln>
+        </p:spPr>
+      </p:sp>
+      <p:sp>
+        <p:nvSpPr>
+          <p:cNvPr id="4" name="">
+            <a:extLst xmlns:a="http://schemas.openxmlformats.org/drawingml/2006/main">
+              <a:ext uri="{FF2B5EF4-FFF2-40B4-BE49-F238E27FC236}">
+                <a16:creationId xmlns:a16="http://schemas.microsoft.com/office/drawing/2014/main" id="{1AD885F9-C9D4-4D99-95B3-D14281DEAE6A}"/>
+              </a:ext>
+            </a:extLst>
+          </p:cNvPr>
+          <p:cNvSpPr>
+            <a:spLocks xmlns:a="http://schemas.openxmlformats.org/drawingml/2006/main" noGrp="1"/>
+          </p:cNvSpPr>
+          <p:nvPr/>
+        </p:nvSpPr>
+        <p:spPr>
+          <a:xfrm xmlns:a="http://schemas.openxmlformats.org/drawingml/2006/main">
+            <a:off x="742950" y="2667000"/>
+            <a:ext cx="2971800" cy="2190750"/>
           </a:xfrm>
           <a:prstGeom xmlns:a="http://schemas.openxmlformats.org/drawingml/2006/main" prst="rect">
             <a:avLst/>
           </a:prstGeom>
           <a:solidFill xmlns:a="http://schemas.openxmlformats.org/drawingml/2006/main">
-            <a:srgbClr val="F2F5F4"/>
+            <a:srgbClr val="F4F7F6"/>
           </a:solidFill>
           <a:ln xmlns:a="http://schemas.openxmlformats.org/drawingml/2006/main" w="9525">
             <a:solidFill>
-              <a:srgbClr val="C8D1D2"/>
+              <a:srgbClr val="D8DEDF"/>
             </a:solidFill>
             <a:prstDash val="solid"/>
           </a:ln>
@@ -6309,22 +6676,22 @@
       </p:sp>
       <p:sp>
         <p:nvSpPr>
-          <p:cNvPr id="4" name="">
-            <a:extLst xmlns:a="http://schemas.openxmlformats.org/drawingml/2006/main">
-              <a:ext uri="{FF2B5EF4-FFF2-40B4-BE49-F238E27FC236}">
-                <a16:creationId xmlns:a16="http://schemas.microsoft.com/office/drawing/2014/main" id="{A3CFB599-9D04-4F28-8758-EDBE44E9D947}"/>
-              </a:ext>
-            </a:extLst>
-          </p:cNvPr>
-          <p:cNvSpPr>
-            <a:spLocks xmlns:a="http://schemas.openxmlformats.org/drawingml/2006/main" noGrp="1"/>
-          </p:cNvSpPr>
-          <p:nvPr/>
-        </p:nvSpPr>
-        <p:spPr>
-          <a:xfrm xmlns:a="http://schemas.openxmlformats.org/drawingml/2006/main">
-            <a:off x="914400" y="3048000"/>
-            <a:ext cx="2381250" cy="323850"/>
+          <p:cNvPr id="5" name="">
+            <a:extLst xmlns:a="http://schemas.openxmlformats.org/drawingml/2006/main">
+              <a:ext uri="{FF2B5EF4-FFF2-40B4-BE49-F238E27FC236}">
+                <a16:creationId xmlns:a16="http://schemas.microsoft.com/office/drawing/2014/main" id="{C81B19C2-97B9-42FB-BC14-1267FE9D220E}"/>
+              </a:ext>
+            </a:extLst>
+          </p:cNvPr>
+          <p:cNvSpPr>
+            <a:spLocks xmlns:a="http://schemas.openxmlformats.org/drawingml/2006/main" noGrp="1"/>
+          </p:cNvSpPr>
+          <p:nvPr/>
+        </p:nvSpPr>
+        <p:spPr>
+          <a:xfrm xmlns:a="http://schemas.openxmlformats.org/drawingml/2006/main">
+            <a:off x="1028700" y="3009900"/>
+            <a:ext cx="2095500" cy="361950"/>
           </a:xfrm>
           <a:prstGeom xmlns:a="http://schemas.openxmlformats.org/drawingml/2006/main" prst="rect">
             <a:avLst/>
@@ -6352,29 +6719,29 @@
                   <a:srgbClr val="003D48"/>
                 </a:solidFill>
               </a:rPr>
-              <a:t>Mentorship</a:t>
-            </a:r>
-          </a:p>
-        </p:txBody>
-      </p:sp>
-      <p:sp>
-        <p:nvSpPr>
-          <p:cNvPr id="5" name="">
-            <a:extLst xmlns:a="http://schemas.openxmlformats.org/drawingml/2006/main">
-              <a:ext uri="{FF2B5EF4-FFF2-40B4-BE49-F238E27FC236}">
-                <a16:creationId xmlns:a16="http://schemas.microsoft.com/office/drawing/2014/main" id="{CB210117-BBAD-43D3-8AC2-C14ABAE2866C}"/>
-              </a:ext>
-            </a:extLst>
-          </p:cNvPr>
-          <p:cNvSpPr>
-            <a:spLocks xmlns:a="http://schemas.openxmlformats.org/drawingml/2006/main" noGrp="1"/>
-          </p:cNvSpPr>
-          <p:nvPr/>
-        </p:nvSpPr>
-        <p:spPr>
-          <a:xfrm xmlns:a="http://schemas.openxmlformats.org/drawingml/2006/main">
-            <a:off x="914400" y="3581400"/>
-            <a:ext cx="2457450" cy="590550"/>
+              <a:t>Pilot group</a:t>
+            </a:r>
+          </a:p>
+        </p:txBody>
+      </p:sp>
+      <p:sp>
+        <p:nvSpPr>
+          <p:cNvPr id="6" name="">
+            <a:extLst xmlns:a="http://schemas.openxmlformats.org/drawingml/2006/main">
+              <a:ext uri="{FF2B5EF4-FFF2-40B4-BE49-F238E27FC236}">
+                <a16:creationId xmlns:a16="http://schemas.microsoft.com/office/drawing/2014/main" id="{1B3D9273-B9E0-439C-99A8-C81C9AA0BE8C}"/>
+              </a:ext>
+            </a:extLst>
+          </p:cNvPr>
+          <p:cNvSpPr>
+            <a:spLocks xmlns:a="http://schemas.openxmlformats.org/drawingml/2006/main" noGrp="1"/>
+          </p:cNvSpPr>
+          <p:nvPr/>
+        </p:nvSpPr>
+        <p:spPr>
+          <a:xfrm xmlns:a="http://schemas.openxmlformats.org/drawingml/2006/main">
+            <a:off x="1047750" y="3714750"/>
+            <a:ext cx="2114550" cy="838200"/>
           </a:xfrm>
           <a:prstGeom xmlns:a="http://schemas.openxmlformats.org/drawingml/2006/main" prst="rect">
             <a:avLst/>
@@ -6390,51 +6757,51 @@
           <a:lstStyle xmlns:a="http://schemas.openxmlformats.org/drawingml/2006/main"/>
           <a:p xmlns:a="http://schemas.openxmlformats.org/drawingml/2006/main">
             <a:pPr>
-              <a:defRPr sz="1500" b="0">
+              <a:defRPr sz="1650" b="0">
                 <a:solidFill>
                   <a:srgbClr val="101820"/>
                 </a:solidFill>
               </a:defRPr>
             </a:pPr>
             <a:r>
-              <a:rPr sz="1500" b="0">
+              <a:rPr sz="1650" b="0">
                 <a:solidFill>
                   <a:srgbClr val="101820"/>
                 </a:solidFill>
               </a:rPr>
-              <a:t>Product, compliance, and financial inclusion guidance.</a:t>
-            </a:r>
-          </a:p>
-        </p:txBody>
-      </p:sp>
-      <p:sp>
-        <p:nvSpPr>
-          <p:cNvPr id="6" name="">
-            <a:extLst xmlns:a="http://schemas.openxmlformats.org/drawingml/2006/main">
-              <a:ext uri="{FF2B5EF4-FFF2-40B4-BE49-F238E27FC236}">
-                <a16:creationId xmlns:a16="http://schemas.microsoft.com/office/drawing/2014/main" id="{838B3B4E-6D96-4C69-9DB7-B81B6AC78113}"/>
-              </a:ext>
-            </a:extLst>
-          </p:cNvPr>
-          <p:cNvSpPr>
-            <a:spLocks xmlns:a="http://schemas.openxmlformats.org/drawingml/2006/main" noGrp="1"/>
-          </p:cNvSpPr>
-          <p:nvPr/>
-        </p:nvSpPr>
-        <p:spPr>
-          <a:xfrm xmlns:a="http://schemas.openxmlformats.org/drawingml/2006/main">
-            <a:off x="4324350" y="2781300"/>
-            <a:ext cx="3105150" cy="1619250"/>
+              <a:t>20 to 50 campus or market merchants.</a:t>
+            </a:r>
+          </a:p>
+        </p:txBody>
+      </p:sp>
+      <p:sp>
+        <p:nvSpPr>
+          <p:cNvPr id="7" name="">
+            <a:extLst xmlns:a="http://schemas.openxmlformats.org/drawingml/2006/main">
+              <a:ext uri="{FF2B5EF4-FFF2-40B4-BE49-F238E27FC236}">
+                <a16:creationId xmlns:a16="http://schemas.microsoft.com/office/drawing/2014/main" id="{8CFE00F0-94A5-4312-8A66-A3FC801B1D98}"/>
+              </a:ext>
+            </a:extLst>
+          </p:cNvPr>
+          <p:cNvSpPr>
+            <a:spLocks xmlns:a="http://schemas.openxmlformats.org/drawingml/2006/main" noGrp="1"/>
+          </p:cNvSpPr>
+          <p:nvPr/>
+        </p:nvSpPr>
+        <p:spPr>
+          <a:xfrm xmlns:a="http://schemas.openxmlformats.org/drawingml/2006/main">
+            <a:off x="4419600" y="2667000"/>
+            <a:ext cx="2971800" cy="2190750"/>
           </a:xfrm>
           <a:prstGeom xmlns:a="http://schemas.openxmlformats.org/drawingml/2006/main" prst="rect">
             <a:avLst/>
           </a:prstGeom>
           <a:solidFill xmlns:a="http://schemas.openxmlformats.org/drawingml/2006/main">
-            <a:srgbClr val="F8F3EA"/>
+            <a:srgbClr val="FBF5EA"/>
           </a:solidFill>
           <a:ln xmlns:a="http://schemas.openxmlformats.org/drawingml/2006/main" w="9525">
             <a:solidFill>
-              <a:srgbClr val="C8D1D2"/>
+              <a:srgbClr val="D8DEDF"/>
             </a:solidFill>
             <a:prstDash val="solid"/>
           </a:ln>
@@ -6442,22 +6809,22 @@
       </p:sp>
       <p:sp>
         <p:nvSpPr>
-          <p:cNvPr id="7" name="">
-            <a:extLst xmlns:a="http://schemas.openxmlformats.org/drawingml/2006/main">
-              <a:ext uri="{FF2B5EF4-FFF2-40B4-BE49-F238E27FC236}">
-                <a16:creationId xmlns:a16="http://schemas.microsoft.com/office/drawing/2014/main" id="{7D5474B0-9ED2-48C6-9769-416C2F7239F5}"/>
-              </a:ext>
-            </a:extLst>
-          </p:cNvPr>
-          <p:cNvSpPr>
-            <a:spLocks xmlns:a="http://schemas.openxmlformats.org/drawingml/2006/main" noGrp="1"/>
-          </p:cNvSpPr>
-          <p:nvPr/>
-        </p:nvSpPr>
-        <p:spPr>
-          <a:xfrm xmlns:a="http://schemas.openxmlformats.org/drawingml/2006/main">
-            <a:off x="4552950" y="3048000"/>
-            <a:ext cx="2381250" cy="323850"/>
+          <p:cNvPr id="8" name="">
+            <a:extLst xmlns:a="http://schemas.openxmlformats.org/drawingml/2006/main">
+              <a:ext uri="{FF2B5EF4-FFF2-40B4-BE49-F238E27FC236}">
+                <a16:creationId xmlns:a16="http://schemas.microsoft.com/office/drawing/2014/main" id="{B20A2954-1C1D-4087-84C6-8585B67B97A2}"/>
+              </a:ext>
+            </a:extLst>
+          </p:cNvPr>
+          <p:cNvSpPr>
+            <a:spLocks xmlns:a="http://schemas.openxmlformats.org/drawingml/2006/main" noGrp="1"/>
+          </p:cNvSpPr>
+          <p:nvPr/>
+        </p:nvSpPr>
+        <p:spPr>
+          <a:xfrm xmlns:a="http://schemas.openxmlformats.org/drawingml/2006/main">
+            <a:off x="4705350" y="3009900"/>
+            <a:ext cx="2286000" cy="361950"/>
           </a:xfrm>
           <a:prstGeom xmlns:a="http://schemas.openxmlformats.org/drawingml/2006/main" prst="rect">
             <a:avLst/>
@@ -6485,29 +6852,29 @@
                   <a:srgbClr val="003D48"/>
                 </a:solidFill>
               </a:rPr>
-              <a:t>Sandbox</a:t>
-            </a:r>
-          </a:p>
-        </p:txBody>
-      </p:sp>
-      <p:sp>
-        <p:nvSpPr>
-          <p:cNvPr id="8" name="">
-            <a:extLst xmlns:a="http://schemas.openxmlformats.org/drawingml/2006/main">
-              <a:ext uri="{FF2B5EF4-FFF2-40B4-BE49-F238E27FC236}">
-                <a16:creationId xmlns:a16="http://schemas.microsoft.com/office/drawing/2014/main" id="{5E157B1F-BFCA-4DF0-B048-7776B9E4E891}"/>
-              </a:ext>
-            </a:extLst>
-          </p:cNvPr>
-          <p:cNvSpPr>
-            <a:spLocks xmlns:a="http://schemas.openxmlformats.org/drawingml/2006/main" noGrp="1"/>
-          </p:cNvSpPr>
-          <p:nvPr/>
-        </p:nvSpPr>
-        <p:spPr>
-          <a:xfrm xmlns:a="http://schemas.openxmlformats.org/drawingml/2006/main">
-            <a:off x="4552950" y="3581400"/>
-            <a:ext cx="2457450" cy="590550"/>
+              <a:t>Support needed</a:t>
+            </a:r>
+          </a:p>
+        </p:txBody>
+      </p:sp>
+      <p:sp>
+        <p:nvSpPr>
+          <p:cNvPr id="9" name="">
+            <a:extLst xmlns:a="http://schemas.openxmlformats.org/drawingml/2006/main">
+              <a:ext uri="{FF2B5EF4-FFF2-40B4-BE49-F238E27FC236}">
+                <a16:creationId xmlns:a16="http://schemas.microsoft.com/office/drawing/2014/main" id="{1D26EA0F-8A83-47A5-9F8A-ED5A843C36FC}"/>
+              </a:ext>
+            </a:extLst>
+          </p:cNvPr>
+          <p:cNvSpPr>
+            <a:spLocks xmlns:a="http://schemas.openxmlformats.org/drawingml/2006/main" noGrp="1"/>
+          </p:cNvSpPr>
+          <p:nvPr/>
+        </p:nvSpPr>
+        <p:spPr>
+          <a:xfrm xmlns:a="http://schemas.openxmlformats.org/drawingml/2006/main">
+            <a:off x="4724400" y="3714750"/>
+            <a:ext cx="2190750" cy="895350"/>
           </a:xfrm>
           <a:prstGeom xmlns:a="http://schemas.openxmlformats.org/drawingml/2006/main" prst="rect">
             <a:avLst/>
@@ -6523,51 +6890,51 @@
           <a:lstStyle xmlns:a="http://schemas.openxmlformats.org/drawingml/2006/main"/>
           <a:p xmlns:a="http://schemas.openxmlformats.org/drawingml/2006/main">
             <a:pPr>
-              <a:defRPr sz="1500" b="0">
+              <a:defRPr sz="1575" b="0">
                 <a:solidFill>
                   <a:srgbClr val="101820"/>
                 </a:solidFill>
               </a:defRPr>
             </a:pPr>
             <a:r>
-              <a:rPr sz="1500" b="0">
+              <a:rPr sz="1575" b="0">
                 <a:solidFill>
                   <a:srgbClr val="101820"/>
                 </a:solidFill>
               </a:rPr>
-              <a:t>Wema or ALAT API direction for realistic integration.</a:t>
-            </a:r>
-          </a:p>
-        </p:txBody>
-      </p:sp>
-      <p:sp>
-        <p:nvSpPr>
-          <p:cNvPr id="9" name="">
-            <a:extLst xmlns:a="http://schemas.openxmlformats.org/drawingml/2006/main">
-              <a:ext uri="{FF2B5EF4-FFF2-40B4-BE49-F238E27FC236}">
-                <a16:creationId xmlns:a16="http://schemas.microsoft.com/office/drawing/2014/main" id="{B0C9B0E8-2FD6-4A94-8D9C-213A2482D871}"/>
-              </a:ext>
-            </a:extLst>
-          </p:cNvPr>
-          <p:cNvSpPr>
-            <a:spLocks xmlns:a="http://schemas.openxmlformats.org/drawingml/2006/main" noGrp="1"/>
-          </p:cNvSpPr>
-          <p:nvPr/>
-        </p:nvSpPr>
-        <p:spPr>
-          <a:xfrm xmlns:a="http://schemas.openxmlformats.org/drawingml/2006/main">
-            <a:off x="7962900" y="2781300"/>
-            <a:ext cx="3105150" cy="1619250"/>
+              <a:t>Mentorship, API guidance, and compliance feedback.</a:t>
+            </a:r>
+          </a:p>
+        </p:txBody>
+      </p:sp>
+      <p:sp>
+        <p:nvSpPr>
+          <p:cNvPr id="10" name="">
+            <a:extLst xmlns:a="http://schemas.openxmlformats.org/drawingml/2006/main">
+              <a:ext uri="{FF2B5EF4-FFF2-40B4-BE49-F238E27FC236}">
+                <a16:creationId xmlns:a16="http://schemas.microsoft.com/office/drawing/2014/main" id="{7E97AC09-6C88-45E2-9021-8DD1CF594D63}"/>
+              </a:ext>
+            </a:extLst>
+          </p:cNvPr>
+          <p:cNvSpPr>
+            <a:spLocks xmlns:a="http://schemas.openxmlformats.org/drawingml/2006/main" noGrp="1"/>
+          </p:cNvSpPr>
+          <p:nvPr/>
+        </p:nvSpPr>
+        <p:spPr>
+          <a:xfrm xmlns:a="http://schemas.openxmlformats.org/drawingml/2006/main">
+            <a:off x="8096250" y="2667000"/>
+            <a:ext cx="2971800" cy="2190750"/>
           </a:xfrm>
           <a:prstGeom xmlns:a="http://schemas.openxmlformats.org/drawingml/2006/main" prst="rect">
             <a:avLst/>
           </a:prstGeom>
           <a:solidFill xmlns:a="http://schemas.openxmlformats.org/drawingml/2006/main">
-            <a:srgbClr val="F2F5F4"/>
+            <a:srgbClr val="F4F7F6"/>
           </a:solidFill>
           <a:ln xmlns:a="http://schemas.openxmlformats.org/drawingml/2006/main" w="9525">
             <a:solidFill>
-              <a:srgbClr val="C8D1D2"/>
+              <a:srgbClr val="D8DEDF"/>
             </a:solidFill>
             <a:prstDash val="solid"/>
           </a:ln>
@@ -6575,22 +6942,22 @@
       </p:sp>
       <p:sp>
         <p:nvSpPr>
-          <p:cNvPr id="10" name="">
-            <a:extLst xmlns:a="http://schemas.openxmlformats.org/drawingml/2006/main">
-              <a:ext uri="{FF2B5EF4-FFF2-40B4-BE49-F238E27FC236}">
-                <a16:creationId xmlns:a16="http://schemas.microsoft.com/office/drawing/2014/main" id="{E86CF94D-AB4F-4988-845A-6F05E0F6127A}"/>
-              </a:ext>
-            </a:extLst>
-          </p:cNvPr>
-          <p:cNvSpPr>
-            <a:spLocks xmlns:a="http://schemas.openxmlformats.org/drawingml/2006/main" noGrp="1"/>
-          </p:cNvSpPr>
-          <p:nvPr/>
-        </p:nvSpPr>
-        <p:spPr>
-          <a:xfrm xmlns:a="http://schemas.openxmlformats.org/drawingml/2006/main">
-            <a:off x="8191500" y="3048000"/>
-            <a:ext cx="2381250" cy="323850"/>
+          <p:cNvPr id="11" name="">
+            <a:extLst xmlns:a="http://schemas.openxmlformats.org/drawingml/2006/main">
+              <a:ext uri="{FF2B5EF4-FFF2-40B4-BE49-F238E27FC236}">
+                <a16:creationId xmlns:a16="http://schemas.microsoft.com/office/drawing/2014/main" id="{B25006C4-02C1-4056-BA63-AB75AC96B2C8}"/>
+              </a:ext>
+            </a:extLst>
+          </p:cNvPr>
+          <p:cNvSpPr>
+            <a:spLocks xmlns:a="http://schemas.openxmlformats.org/drawingml/2006/main" noGrp="1"/>
+          </p:cNvSpPr>
+          <p:nvPr/>
+        </p:nvSpPr>
+        <p:spPr>
+          <a:xfrm xmlns:a="http://schemas.openxmlformats.org/drawingml/2006/main">
+            <a:off x="8382000" y="3009900"/>
+            <a:ext cx="2286000" cy="361950"/>
           </a:xfrm>
           <a:prstGeom xmlns:a="http://schemas.openxmlformats.org/drawingml/2006/main" prst="rect">
             <a:avLst/>
@@ -6618,29 +6985,29 @@
                   <a:srgbClr val="003D48"/>
                 </a:solidFill>
               </a:rPr>
-              <a:t>Pilot access</a:t>
-            </a:r>
-          </a:p>
-        </p:txBody>
-      </p:sp>
-      <p:sp>
-        <p:nvSpPr>
-          <p:cNvPr id="11" name="">
-            <a:extLst xmlns:a="http://schemas.openxmlformats.org/drawingml/2006/main">
-              <a:ext uri="{FF2B5EF4-FFF2-40B4-BE49-F238E27FC236}">
-                <a16:creationId xmlns:a16="http://schemas.microsoft.com/office/drawing/2014/main" id="{090CFEB0-4CE1-4409-A501-F5F2AD070C7C}"/>
-              </a:ext>
-            </a:extLst>
-          </p:cNvPr>
-          <p:cNvSpPr>
-            <a:spLocks xmlns:a="http://schemas.openxmlformats.org/drawingml/2006/main" noGrp="1"/>
-          </p:cNvSpPr>
-          <p:nvPr/>
-        </p:nvSpPr>
-        <p:spPr>
-          <a:xfrm xmlns:a="http://schemas.openxmlformats.org/drawingml/2006/main">
-            <a:off x="8191500" y="3581400"/>
-            <a:ext cx="2457450" cy="590550"/>
+              <a:t>Success metric</a:t>
+            </a:r>
+          </a:p>
+        </p:txBody>
+      </p:sp>
+      <p:sp>
+        <p:nvSpPr>
+          <p:cNvPr id="12" name="">
+            <a:extLst xmlns:a="http://schemas.openxmlformats.org/drawingml/2006/main">
+              <a:ext uri="{FF2B5EF4-FFF2-40B4-BE49-F238E27FC236}">
+                <a16:creationId xmlns:a16="http://schemas.microsoft.com/office/drawing/2014/main" id="{2CB7C0D3-3595-43EB-BB15-FDAFB6B44F1B}"/>
+              </a:ext>
+            </a:extLst>
+          </p:cNvPr>
+          <p:cNvSpPr>
+            <a:spLocks xmlns:a="http://schemas.openxmlformats.org/drawingml/2006/main" noGrp="1"/>
+          </p:cNvSpPr>
+          <p:nvPr/>
+        </p:nvSpPr>
+        <p:spPr>
+          <a:xfrm xmlns:a="http://schemas.openxmlformats.org/drawingml/2006/main">
+            <a:off x="8401050" y="3714750"/>
+            <a:ext cx="2190750" cy="895350"/>
           </a:xfrm>
           <a:prstGeom xmlns:a="http://schemas.openxmlformats.org/drawingml/2006/main" prst="rect">
             <a:avLst/>
@@ -6656,41 +7023,41 @@
           <a:lstStyle xmlns:a="http://schemas.openxmlformats.org/drawingml/2006/main"/>
           <a:p xmlns:a="http://schemas.openxmlformats.org/drawingml/2006/main">
             <a:pPr>
-              <a:defRPr sz="1500" b="0">
+              <a:defRPr sz="1575" b="0">
                 <a:solidFill>
                   <a:srgbClr val="101820"/>
                 </a:solidFill>
               </a:defRPr>
             </a:pPr>
             <a:r>
-              <a:rPr sz="1500" b="0">
+              <a:rPr sz="1575" b="0">
                 <a:solidFill>
                   <a:srgbClr val="101820"/>
                 </a:solidFill>
               </a:rPr>
-              <a:t>Campus and market merchants with repeat payment evidence.</a:t>
-            </a:r>
-          </a:p>
-        </p:txBody>
-      </p:sp>
-      <p:sp>
-        <p:nvSpPr>
-          <p:cNvPr id="12" name="">
-            <a:extLst xmlns:a="http://schemas.openxmlformats.org/drawingml/2006/main">
-              <a:ext uri="{FF2B5EF4-FFF2-40B4-BE49-F238E27FC236}">
-                <a16:creationId xmlns:a16="http://schemas.microsoft.com/office/drawing/2014/main" id="{C64975BC-221F-4001-B942-E8CBF84D9DBE}"/>
-              </a:ext>
-            </a:extLst>
-          </p:cNvPr>
-          <p:cNvSpPr>
-            <a:spLocks xmlns:a="http://schemas.openxmlformats.org/drawingml/2006/main" noGrp="1"/>
-          </p:cNvSpPr>
-          <p:nvPr/>
-        </p:nvSpPr>
-        <p:spPr>
-          <a:xfrm xmlns:a="http://schemas.openxmlformats.org/drawingml/2006/main">
-            <a:off x="723900" y="5257800"/>
-            <a:ext cx="8096250" cy="514350"/>
+              <a:t>More verified records and clearer Wema review decisions.</a:t>
+            </a:r>
+          </a:p>
+        </p:txBody>
+      </p:sp>
+      <p:sp>
+        <p:nvSpPr>
+          <p:cNvPr id="13" name="">
+            <a:extLst xmlns:a="http://schemas.openxmlformats.org/drawingml/2006/main">
+              <a:ext uri="{FF2B5EF4-FFF2-40B4-BE49-F238E27FC236}">
+                <a16:creationId xmlns:a16="http://schemas.microsoft.com/office/drawing/2014/main" id="{4DC777BA-C38F-46C4-B9A4-697A54B76E73}"/>
+              </a:ext>
+            </a:extLst>
+          </p:cNvPr>
+          <p:cNvSpPr>
+            <a:spLocks xmlns:a="http://schemas.openxmlformats.org/drawingml/2006/main" noGrp="1"/>
+          </p:cNvSpPr>
+          <p:nvPr/>
+        </p:nvSpPr>
+        <p:spPr>
+          <a:xfrm xmlns:a="http://schemas.openxmlformats.org/drawingml/2006/main">
+            <a:off x="762000" y="5334000"/>
+            <a:ext cx="8191500" cy="533400"/>
           </a:xfrm>
           <a:prstGeom xmlns:a="http://schemas.openxmlformats.org/drawingml/2006/main" prst="rect">
             <a:avLst/>
@@ -6708,14 +7075,14 @@
             <a:pPr>
               <a:defRPr sz="3150" b="1">
                 <a:solidFill>
-                  <a:srgbClr val="DE1A4C"/>
+                  <a:srgbClr val="E4144F"/>
                 </a:solidFill>
               </a:defRPr>
             </a:pPr>
             <a:r>
               <a:rPr sz="3150" b="1">
                 <a:solidFill>
-                  <a:srgbClr val="DE1A4C"/>
+                  <a:srgbClr val="E4144F"/>
                 </a:solidFill>
               </a:rPr>
               <a:t>Make existing merchant evidence count.</a:t>
@@ -6725,22 +7092,22 @@
       </p:sp>
       <p:sp>
         <p:nvSpPr>
-          <p:cNvPr id="13" name="">
-            <a:extLst xmlns:a="http://schemas.openxmlformats.org/drawingml/2006/main">
-              <a:ext uri="{FF2B5EF4-FFF2-40B4-BE49-F238E27FC236}">
-                <a16:creationId xmlns:a16="http://schemas.microsoft.com/office/drawing/2014/main" id="{4A321E97-4C27-4342-8352-D3E321225B3F}"/>
-              </a:ext>
-            </a:extLst>
-          </p:cNvPr>
-          <p:cNvSpPr>
-            <a:spLocks xmlns:a="http://schemas.openxmlformats.org/drawingml/2006/main" noGrp="1"/>
-          </p:cNvSpPr>
-          <p:nvPr/>
-        </p:nvSpPr>
-        <p:spPr>
-          <a:xfrm xmlns:a="http://schemas.openxmlformats.org/drawingml/2006/main">
-            <a:off x="400050" y="6362700"/>
-            <a:ext cx="5905500" cy="228600"/>
+          <p:cNvPr id="14" name="">
+            <a:extLst xmlns:a="http://schemas.openxmlformats.org/drawingml/2006/main">
+              <a:ext uri="{FF2B5EF4-FFF2-40B4-BE49-F238E27FC236}">
+                <a16:creationId xmlns:a16="http://schemas.microsoft.com/office/drawing/2014/main" id="{09D1B519-8C87-4984-970E-7532CB5BF164}"/>
+              </a:ext>
+            </a:extLst>
+          </p:cNvPr>
+          <p:cNvSpPr>
+            <a:spLocks xmlns:a="http://schemas.openxmlformats.org/drawingml/2006/main" noGrp="1"/>
+          </p:cNvSpPr>
+          <p:nvPr/>
+        </p:nvSpPr>
+        <p:spPr>
+          <a:xfrm xmlns:a="http://schemas.openxmlformats.org/drawingml/2006/main">
+            <a:off x="533400" y="6362700"/>
+            <a:ext cx="5334000" cy="228600"/>
           </a:xfrm>
           <a:prstGeom xmlns:a="http://schemas.openxmlformats.org/drawingml/2006/main" prst="rect">
             <a:avLst/>
@@ -6758,14 +7125,14 @@
             <a:pPr>
               <a:defRPr sz="1050" b="1">
                 <a:solidFill>
-                  <a:srgbClr val="59666A"/>
+                  <a:srgbClr val="536267"/>
                 </a:solidFill>
               </a:defRPr>
             </a:pPr>
             <a:r>
               <a:rPr sz="1050" b="1">
                 <a:solidFill>
-                  <a:srgbClr val="59666A"/>
+                  <a:srgbClr val="536267"/>
                 </a:solidFill>
               </a:rPr>
               <a:t>TrustTill | Hackaholics 7.0 | Financial Inclusion</a:t>
@@ -6775,22 +7142,22 @@
       </p:sp>
       <p:sp>
         <p:nvSpPr>
-          <p:cNvPr id="14" name="">
-            <a:extLst xmlns:a="http://schemas.openxmlformats.org/drawingml/2006/main">
-              <a:ext uri="{FF2B5EF4-FFF2-40B4-BE49-F238E27FC236}">
-                <a16:creationId xmlns:a16="http://schemas.microsoft.com/office/drawing/2014/main" id="{03E1E6DB-A93A-4F08-ABDE-D8FD67CCF589}"/>
-              </a:ext>
-            </a:extLst>
-          </p:cNvPr>
-          <p:cNvSpPr>
-            <a:spLocks xmlns:a="http://schemas.openxmlformats.org/drawingml/2006/main" noGrp="1"/>
-          </p:cNvSpPr>
-          <p:nvPr/>
-        </p:nvSpPr>
-        <p:spPr>
-          <a:xfrm xmlns:a="http://schemas.openxmlformats.org/drawingml/2006/main">
-            <a:off x="11468100" y="6362700"/>
-            <a:ext cx="323850" cy="228600"/>
+          <p:cNvPr id="15" name="">
+            <a:extLst xmlns:a="http://schemas.openxmlformats.org/drawingml/2006/main">
+              <a:ext uri="{FF2B5EF4-FFF2-40B4-BE49-F238E27FC236}">
+                <a16:creationId xmlns:a16="http://schemas.microsoft.com/office/drawing/2014/main" id="{40BB6356-8379-46F0-94D7-81C37860210C}"/>
+              </a:ext>
+            </a:extLst>
+          </p:cNvPr>
+          <p:cNvSpPr>
+            <a:spLocks xmlns:a="http://schemas.openxmlformats.org/drawingml/2006/main" noGrp="1"/>
+          </p:cNvSpPr>
+          <p:nvPr/>
+        </p:nvSpPr>
+        <p:spPr>
+          <a:xfrm xmlns:a="http://schemas.openxmlformats.org/drawingml/2006/main">
+            <a:off x="11315700" y="6362700"/>
+            <a:ext cx="342900" cy="228600"/>
           </a:xfrm>
           <a:prstGeom xmlns:a="http://schemas.openxmlformats.org/drawingml/2006/main" prst="rect">
             <a:avLst/>
@@ -6808,14 +7175,14 @@
             <a:pPr algn="r">
               <a:defRPr sz="1050" b="1">
                 <a:solidFill>
-                  <a:srgbClr val="59666A"/>
+                  <a:srgbClr val="536267"/>
                 </a:solidFill>
               </a:defRPr>
             </a:pPr>
             <a:r>
               <a:rPr sz="1050" b="1">
                 <a:solidFill>
-                  <a:srgbClr val="59666A"/>
+                  <a:srgbClr val="536267"/>
                 </a:solidFill>
               </a:rPr>
               <a:t>7</a:t>
@@ -6826,7 +7193,7 @@
     </p:spTree>
     <p:extLst>
       <p:ext uri="{BB962C8B-B14F-4D97-AF65-F5344CB8AC3E}">
-        <p14:creationId xmlns:p14="http://schemas.microsoft.com/office/powerpoint/2010/main" val="1019842886"/>
+        <p14:creationId xmlns:p14="http://schemas.microsoft.com/office/powerpoint/2010/main" val="751949616"/>
       </p:ext>
     </p:extLst>
   </p:cSld>
